--- a/outputs/pptx/2026-04-19_dm-okr-fy26-for-gm.pptx
+++ b/outputs/pptx/2026-04-19_dm-okr-fy26-for-gm.pptx
@@ -22,9 +22,10 @@
     <p:sldId id="270" r:id="rId16"/>
     <p:sldId id="271" r:id="rId17"/>
     <p:sldId id="272" r:id="rId18"/>
+    <p:sldId id="273" r:id="rId19"/>
   </p:sldIdLst>
   <p:notesMasterIdLst>
-    <p:notesMasterId r:id="rId19"/>
+    <p:notesMasterId r:id="rId20"/>
   </p:notesMasterIdLst>
   <p:sldSz cx="9144000" cy="5143500"/>
   <p:notesSz cx="5143500" cy="9144000"/>
@@ -1246,6 +1247,94 @@
             <a:fld id="{F7021451-1387-4CA6-816F-3879F97B5CBC}" type="slidenum">
               <a:rPr lang="en-US"/>
               <a:t>17</a:t>
+            </a:fld>
+            <a:endParaRPr lang="en-US"/>
+          </a:p>
+        </p:txBody>
+      </p:sp>
+    </p:spTree>
+    <p:extLst>
+      <p:ext uri="{BB962C8B-B14F-4D97-AF65-F5344CB8AC3E}">
+        <p14:creationId xmlns:p14="http://schemas.microsoft.com/office/powerpoint/2010/main" val="1024086991"/>
+      </p:ext>
+    </p:extLst>
+  </p:cSld>
+  <p:clrMapOvr>
+    <a:masterClrMapping/>
+  </p:clrMapOvr>
+</p:notes>
+</file>
+
+<file path=ppt/notesSlides/notesSlide18.xml><?xml version="1.0" encoding="utf-8"?>
+<p:notes xmlns:a="http://schemas.openxmlformats.org/drawingml/2006/main" xmlns:r="http://schemas.openxmlformats.org/officeDocument/2006/relationships" xmlns:p="http://schemas.openxmlformats.org/presentationml/2006/main">
+  <p:cSld>
+    <p:spTree>
+      <p:nvGrpSpPr>
+        <p:cNvPr id="1" name=""/>
+        <p:cNvGrpSpPr/>
+        <p:nvPr/>
+      </p:nvGrpSpPr>
+      <p:grpSpPr>
+        <a:xfrm>
+          <a:off x="0" y="0"/>
+          <a:ext cx="0" cy="0"/>
+          <a:chOff x="0" y="0"/>
+          <a:chExt cx="0" cy="0"/>
+        </a:xfrm>
+      </p:grpSpPr>
+      <p:sp>
+        <p:nvSpPr>
+          <p:cNvPr id="2" name="Slide Image Placeholder 1"/>
+          <p:cNvSpPr>
+            <a:spLocks noGrp="1" noRot="1" noChangeAspect="1"/>
+          </p:cNvSpPr>
+          <p:nvPr>
+            <p:ph type="sldImg"/>
+          </p:nvPr>
+        </p:nvSpPr>
+        <p:spPr/>
+      </p:sp>
+      <p:sp>
+        <p:nvSpPr>
+          <p:cNvPr id="3" name="Notes Placeholder 2"/>
+          <p:cNvSpPr>
+            <a:spLocks noGrp="1"/>
+          </p:cNvSpPr>
+          <p:nvPr>
+            <p:ph type="body" idx="1"/>
+          </p:nvPr>
+        </p:nvSpPr>
+        <p:spPr/>
+        <p:txBody>
+          <a:bodyPr/>
+          <a:lstStyle/>
+          <a:p>
+            <a:r>
+              <a:rPr lang="en-US" dirty="0"/>
+              <a:t/>
+            </a:r>
+            <a:endParaRPr lang="en-US" dirty="0"/>
+          </a:p>
+        </p:txBody>
+      </p:sp>
+      <p:sp>
+        <p:nvSpPr>
+          <p:cNvPr id="4" name="Slide Number Placeholder 3"/>
+          <p:cNvSpPr>
+            <a:spLocks noGrp="1"/>
+          </p:cNvSpPr>
+          <p:nvPr>
+            <p:ph type="sldNum" sz="quarter" idx="10"/>
+          </p:nvPr>
+        </p:nvSpPr>
+        <p:spPr/>
+        <p:txBody>
+          <a:bodyPr/>
+          <a:lstStyle/>
+          <a:p>
+            <a:fld id="{F7021451-1387-4CA6-816F-3879F97B5CBC}" type="slidenum">
+              <a:rPr lang="en-US"/>
+              <a:t>18</a:t>
             </a:fld>
             <a:endParaRPr lang="en-US"/>
           </a:p>
@@ -2845,11 +2934,11 @@
         <p:spPr>
           <a:xfrm>
             <a:off x="365760" y="1463040"/>
-            <a:ext cx="4206240" cy="1463040"/>
+            <a:ext cx="2682240" cy="2697480"/>
           </a:xfrm>
           <a:prstGeom prst="roundRect">
             <a:avLst>
-              <a:gd name="adj" fmla="val 1875"/>
+              <a:gd name="adj" fmla="val 1023"/>
             </a:avLst>
           </a:prstGeom>
           <a:solidFill>
@@ -2874,7 +2963,7 @@
         <p:spPr>
           <a:xfrm>
             <a:off x="384048" y="1463040"/>
-            <a:ext cx="4169664" cy="54864"/>
+            <a:ext cx="2645664" cy="54864"/>
           </a:xfrm>
           <a:prstGeom prst="rect">
             <a:avLst/>
@@ -2894,7 +2983,7 @@
         <p:spPr>
           <a:xfrm>
             <a:off x="502920" y="1600200"/>
-            <a:ext cx="3931920" cy="365760"/>
+            <a:ext cx="2407920" cy="365760"/>
           </a:xfrm>
           <a:prstGeom prst="rect">
             <a:avLst/>
@@ -2933,7 +3022,7 @@
         <p:spPr>
           <a:xfrm>
             <a:off x="502920" y="1965960"/>
-            <a:ext cx="3931920" cy="822960"/>
+            <a:ext cx="2407920" cy="2057400"/>
           </a:xfrm>
           <a:prstGeom prst="rect">
             <a:avLst/>
@@ -2960,30 +3049,10 @@
                 <a:ea typeface="Meiryo" pitchFamily="34" charset="-122"/>
                 <a:cs typeface="Meiryo" pitchFamily="34" charset="-120"/>
               </a:rPr>
-              <a:t>開発に入る「前」で時間を失うことを止め、</a:t>
+              <a:t>開発に入る「前」で時間を失うことを止め、開発中の手戻りと方向違いの実装を減らす。人を増やすのではなく、仕様・判断・スコープの制御を先に整える。</a:t>
             </a:r>
             <a:endParaRPr lang="en-US" sz="1300" dirty="0"/>
           </a:p>
-          <a:p>
-            <a:pPr algn="l" indent="0" marL="0">
-              <a:lnSpc>
-                <a:spcPct val="150000"/>
-              </a:lnSpc>
-              <a:buNone/>
-            </a:pPr>
-            <a:r>
-              <a:rPr lang="en-US" sz="1300" dirty="0">
-                <a:solidFill>
-                  <a:srgbClr val="1A1A2E"/>
-                </a:solidFill>
-                <a:latin typeface="Meiryo" pitchFamily="34" charset="0"/>
-                <a:ea typeface="Meiryo" pitchFamily="34" charset="-122"/>
-                <a:cs typeface="Meiryo" pitchFamily="34" charset="-120"/>
-              </a:rPr>
-              <a:t>開発中の手戻りと方向違いの実装を減らす。</a:t>
-            </a:r>
-            <a:endParaRPr lang="en-US" sz="1300" dirty="0"/>
-          </a:p>
         </p:txBody>
       </p:sp>
       <p:sp>
@@ -2994,12 +3063,12 @@
         </p:nvSpPr>
         <p:spPr>
           <a:xfrm>
-            <a:off x="4572000" y="1463040"/>
-            <a:ext cx="4206240" cy="1463040"/>
+            <a:off x="3230880" y="1463040"/>
+            <a:ext cx="2682240" cy="2697480"/>
           </a:xfrm>
           <a:prstGeom prst="roundRect">
             <a:avLst>
-              <a:gd name="adj" fmla="val 1875"/>
+              <a:gd name="adj" fmla="val 1023"/>
             </a:avLst>
           </a:prstGeom>
           <a:solidFill>
@@ -3023,8 +3092,8 @@
         </p:nvSpPr>
         <p:spPr>
           <a:xfrm>
-            <a:off x="4590288" y="1463040"/>
-            <a:ext cx="4169664" cy="54864"/>
+            <a:off x="3249168" y="1463040"/>
+            <a:ext cx="2645664" cy="54864"/>
           </a:xfrm>
           <a:prstGeom prst="rect">
             <a:avLst/>
@@ -3043,8 +3112,8 @@
         </p:nvSpPr>
         <p:spPr>
           <a:xfrm>
-            <a:off x="4709160" y="1600200"/>
-            <a:ext cx="3931920" cy="365760"/>
+            <a:off x="3368040" y="1600200"/>
+            <a:ext cx="2407920" cy="365760"/>
           </a:xfrm>
           <a:prstGeom prst="rect">
             <a:avLst/>
@@ -3068,7 +3137,7 @@
                 <a:ea typeface="Meiryo" pitchFamily="34" charset="-122"/>
                 <a:cs typeface="Meiryo" pitchFamily="34" charset="-120"/>
               </a:rPr>
-              <a:t>問題認識</a:t>
+              <a:t>年度マイルストーン</a:t>
             </a:r>
             <a:endParaRPr lang="en-US" sz="1400" dirty="0"/>
           </a:p>
@@ -3082,8 +3151,8 @@
         </p:nvSpPr>
         <p:spPr>
           <a:xfrm>
-            <a:off x="4709160" y="1965960"/>
-            <a:ext cx="3931920" cy="822960"/>
+            <a:off x="3368040" y="1965960"/>
+            <a:ext cx="2407920" cy="2057400"/>
           </a:xfrm>
           <a:prstGeom prst="rect">
             <a:avLst/>
@@ -3110,10 +3179,139 @@
                 <a:ea typeface="Meiryo" pitchFamily="34" charset="-122"/>
                 <a:cs typeface="Meiryo" pitchFamily="34" charset="-120"/>
               </a:rPr>
-              <a:t>Naikistのデプロイ頻度は1週間。遅さの本質は開発「前後」── 仕様確定遅延、PO判断待ち、並行PJ依存、スコープ膨張。エンジニア人数・技術力ではなく仕様制御の問題。</a:t>
+              <a:t>FY26末：</a:t>
             </a:r>
             <a:endParaRPr lang="en-US" sz="1300" dirty="0"/>
           </a:p>
+          <a:p>
+            <a:pPr algn="l" indent="0" marL="0">
+              <a:lnSpc>
+                <a:spcPct val="150000"/>
+              </a:lnSpc>
+              <a:buNone/>
+            </a:pPr>
+            <a:r>
+              <a:rPr lang="en-US" sz="1300" dirty="0">
+                <a:solidFill>
+                  <a:srgbClr val="1A1A2E"/>
+                </a:solidFill>
+                <a:latin typeface="Meiryo" pitchFamily="34" charset="0"/>
+                <a:ea typeface="Meiryo" pitchFamily="34" charset="-122"/>
+                <a:cs typeface="Meiryo" pitchFamily="34" charset="-120"/>
+              </a:rPr>
+              <a:t>・ベースライン数値を確定</a:t>
+            </a:r>
+            <a:endParaRPr lang="en-US" sz="1300" dirty="0"/>
+          </a:p>
+          <a:p>
+            <a:pPr algn="l" indent="0" marL="0">
+              <a:lnSpc>
+                <a:spcPct val="150000"/>
+              </a:lnSpc>
+              <a:buNone/>
+            </a:pPr>
+            <a:r>
+              <a:rPr lang="en-US" sz="1300" dirty="0">
+                <a:solidFill>
+                  <a:srgbClr val="1A1A2E"/>
+                </a:solidFill>
+                <a:latin typeface="Meiryo" pitchFamily="34" charset="0"/>
+                <a:ea typeface="Meiryo" pitchFamily="34" charset="-122"/>
+                <a:cs typeface="Meiryo" pitchFamily="34" charset="-120"/>
+              </a:rPr>
+              <a:t>・手戻り削減の下降トレンドを示す</a:t>
+            </a:r>
+            <a:endParaRPr lang="en-US" sz="1300" dirty="0"/>
+          </a:p>
+          <a:p>
+            <a:pPr algn="l" indent="0" marL="0">
+              <a:lnSpc>
+                <a:spcPct val="150000"/>
+              </a:lnSpc>
+              <a:buNone/>
+            </a:pPr>
+            <a:r>
+              <a:rPr lang="en-US" sz="1300" dirty="0">
+                <a:solidFill>
+                  <a:srgbClr val="1A1A2E"/>
+                </a:solidFill>
+                <a:latin typeface="Meiryo" pitchFamily="34" charset="0"/>
+                <a:ea typeface="Meiryo" pitchFamily="34" charset="-122"/>
+                <a:cs typeface="Meiryo" pitchFamily="34" charset="-120"/>
+              </a:rPr>
+              <a:t>・全チームでReady定義が標準化</a:t>
+            </a:r>
+            <a:endParaRPr lang="en-US" sz="1300" dirty="0"/>
+          </a:p>
+          <a:p>
+            <a:pPr algn="l" indent="0" marL="0">
+              <a:lnSpc>
+                <a:spcPct val="150000"/>
+              </a:lnSpc>
+              <a:buNone/>
+            </a:pPr>
+            <a:endParaRPr lang="en-US" sz="1300" dirty="0"/>
+          </a:p>
+          <a:p>
+            <a:pPr algn="l" indent="0" marL="0">
+              <a:lnSpc>
+                <a:spcPct val="150000"/>
+              </a:lnSpc>
+              <a:buNone/>
+            </a:pPr>
+            <a:r>
+              <a:rPr lang="en-US" sz="1300" dirty="0">
+                <a:solidFill>
+                  <a:srgbClr val="1A1A2E"/>
+                </a:solidFill>
+                <a:latin typeface="Meiryo" pitchFamily="34" charset="0"/>
+                <a:ea typeface="Meiryo" pitchFamily="34" charset="-122"/>
+                <a:cs typeface="Meiryo" pitchFamily="34" charset="-120"/>
+              </a:rPr>
+              <a:t>FY28末：</a:t>
+            </a:r>
+            <a:endParaRPr lang="en-US" sz="1300" dirty="0"/>
+          </a:p>
+          <a:p>
+            <a:pPr algn="l" indent="0" marL="0">
+              <a:lnSpc>
+                <a:spcPct val="150000"/>
+              </a:lnSpc>
+              <a:buNone/>
+            </a:pPr>
+            <a:r>
+              <a:rPr lang="en-US" sz="1300" dirty="0">
+                <a:solidFill>
+                  <a:srgbClr val="1A1A2E"/>
+                </a:solidFill>
+                <a:latin typeface="Meiryo" pitchFamily="34" charset="0"/>
+                <a:ea typeface="Meiryo" pitchFamily="34" charset="-122"/>
+                <a:cs typeface="Meiryo" pitchFamily="34" charset="-120"/>
+              </a:rPr>
+              <a:t>・要件定義→リリース 平均1ヶ月以内（DORA High）</a:t>
+            </a:r>
+            <a:endParaRPr lang="en-US" sz="1300" dirty="0"/>
+          </a:p>
+          <a:p>
+            <a:pPr algn="l" indent="0" marL="0">
+              <a:lnSpc>
+                <a:spcPct val="150000"/>
+              </a:lnSpc>
+              <a:buNone/>
+            </a:pPr>
+            <a:r>
+              <a:rPr lang="en-US" sz="1300" dirty="0">
+                <a:solidFill>
+                  <a:srgbClr val="1A1A2E"/>
+                </a:solidFill>
+                <a:latin typeface="Meiryo" pitchFamily="34" charset="0"/>
+                <a:ea typeface="Meiryo" pitchFamily="34" charset="-122"/>
+                <a:cs typeface="Meiryo" pitchFamily="34" charset="-120"/>
+              </a:rPr>
+              <a:t>・仕様起因の手戻りゼロ、バックログ常時Ready</a:t>
+            </a:r>
+            <a:endParaRPr lang="en-US" sz="1300" dirty="0"/>
+          </a:p>
         </p:txBody>
       </p:sp>
       <p:sp>
@@ -3124,12 +3322,12 @@
         </p:nvSpPr>
         <p:spPr>
           <a:xfrm>
-            <a:off x="365760" y="3017520"/>
-            <a:ext cx="4206240" cy="1463040"/>
+            <a:off x="6096000" y="1463040"/>
+            <a:ext cx="2682240" cy="2697480"/>
           </a:xfrm>
           <a:prstGeom prst="roundRect">
             <a:avLst>
-              <a:gd name="adj" fmla="val 1875"/>
+              <a:gd name="adj" fmla="val 1023"/>
             </a:avLst>
           </a:prstGeom>
           <a:solidFill>
@@ -3153,14 +3351,14 @@
         </p:nvSpPr>
         <p:spPr>
           <a:xfrm>
-            <a:off x="384048" y="3017520"/>
-            <a:ext cx="4169664" cy="54864"/>
+            <a:off x="6114288" y="1463040"/>
+            <a:ext cx="2645664" cy="54864"/>
           </a:xfrm>
           <a:prstGeom prst="rect">
             <a:avLst/>
           </a:prstGeom>
           <a:solidFill>
-            <a:srgbClr val="DC2626"/>
+            <a:srgbClr val="004098"/>
           </a:solidFill>
           <a:ln/>
         </p:spPr>
@@ -3173,8 +3371,8 @@
         </p:nvSpPr>
         <p:spPr>
           <a:xfrm>
-            <a:off x="502920" y="3154680"/>
-            <a:ext cx="3931920" cy="365760"/>
+            <a:off x="6233160" y="1600200"/>
+            <a:ext cx="2407920" cy="365760"/>
           </a:xfrm>
           <a:prstGeom prst="rect">
             <a:avLst/>
@@ -3192,13 +3390,13 @@
             <a:r>
               <a:rPr lang="en-US" sz="1400" b="1" dirty="0">
                 <a:solidFill>
-                  <a:srgbClr val="DC2626"/>
-                </a:solidFill>
-                <a:latin typeface="Meiryo" pitchFamily="34" charset="0"/>
-                <a:ea typeface="Meiryo" pitchFamily="34" charset="-122"/>
-                <a:cs typeface="Meiryo" pitchFamily="34" charset="-120"/>
-              </a:rPr>
-              <a:t>年度マイルストーン</a:t>
+                  <a:srgbClr val="004098"/>
+                </a:solidFill>
+                <a:latin typeface="Meiryo" pitchFamily="34" charset="0"/>
+                <a:ea typeface="Meiryo" pitchFamily="34" charset="-122"/>
+                <a:cs typeface="Meiryo" pitchFamily="34" charset="-120"/>
+              </a:rPr>
+              <a:t>主要施策（FY26）</a:t>
             </a:r>
             <a:endParaRPr lang="en-US" sz="1400" dirty="0"/>
           </a:p>
@@ -3212,8 +3410,8 @@
         </p:nvSpPr>
         <p:spPr>
           <a:xfrm>
-            <a:off x="502920" y="3520440"/>
-            <a:ext cx="3931920" cy="822960"/>
+            <a:off x="6233160" y="1965960"/>
+            <a:ext cx="2407920" cy="2057400"/>
           </a:xfrm>
           <a:prstGeom prst="rect">
             <a:avLst/>
@@ -3240,7 +3438,7 @@
                 <a:ea typeface="Meiryo" pitchFamily="34" charset="-122"/>
                 <a:cs typeface="Meiryo" pitchFamily="34" charset="-120"/>
               </a:rPr>
-              <a:t>FY26末：ベースライン確定＋手戻り削減の下降トレンド</a:t>
+              <a:t>・Ready定義を全チーム標準化展開</a:t>
             </a:r>
             <a:endParaRPr lang="en-US" sz="1300" dirty="0"/>
           </a:p>
@@ -3260,120 +3458,10 @@
                 <a:ea typeface="Meiryo" pitchFamily="34" charset="-122"/>
                 <a:cs typeface="Meiryo" pitchFamily="34" charset="-120"/>
               </a:rPr>
-              <a:t>FY28末：要件定義→リリース 平均1ヶ月以内（DORA High）、バックログ常時Ready</a:t>
+              <a:t>・手戻り原因分析の運用開始</a:t>
             </a:r>
             <a:endParaRPr lang="en-US" sz="1300" dirty="0"/>
           </a:p>
-        </p:txBody>
-      </p:sp>
-      <p:sp>
-        <p:nvSpPr>
-          <p:cNvPr id="22" name="Shape 20"/>
-          <p:cNvSpPr/>
-          <p:nvPr/>
-        </p:nvSpPr>
-        <p:spPr>
-          <a:xfrm>
-            <a:off x="4572000" y="3017520"/>
-            <a:ext cx="4206240" cy="1463040"/>
-          </a:xfrm>
-          <a:prstGeom prst="roundRect">
-            <a:avLst>
-              <a:gd name="adj" fmla="val 1875"/>
-            </a:avLst>
-          </a:prstGeom>
-          <a:solidFill>
-            <a:srgbClr val="EEF3FA"/>
-          </a:solidFill>
-          <a:ln/>
-          <a:effectLst>
-            <a:outerShdw sx="100000" sy="100000" kx="0" ky="0" algn="bl" rotWithShape="0" blurRad="50800" dist="25400" dir="8100000">
-              <a:srgbClr val="000000">
-                <a:alpha val="8000"/>
-              </a:srgbClr>
-            </a:outerShdw>
-          </a:effectLst>
-        </p:spPr>
-      </p:sp>
-      <p:sp>
-        <p:nvSpPr>
-          <p:cNvPr id="23" name="Shape 21"/>
-          <p:cNvSpPr/>
-          <p:nvPr/>
-        </p:nvSpPr>
-        <p:spPr>
-          <a:xfrm>
-            <a:off x="4590288" y="3017520"/>
-            <a:ext cx="4169664" cy="54864"/>
-          </a:xfrm>
-          <a:prstGeom prst="rect">
-            <a:avLst/>
-          </a:prstGeom>
-          <a:solidFill>
-            <a:srgbClr val="004098"/>
-          </a:solidFill>
-          <a:ln/>
-        </p:spPr>
-      </p:sp>
-      <p:sp>
-        <p:nvSpPr>
-          <p:cNvPr id="24" name="Text 22"/>
-          <p:cNvSpPr/>
-          <p:nvPr/>
-        </p:nvSpPr>
-        <p:spPr>
-          <a:xfrm>
-            <a:off x="4709160" y="3154680"/>
-            <a:ext cx="3931920" cy="365760"/>
-          </a:xfrm>
-          <a:prstGeom prst="rect">
-            <a:avLst/>
-          </a:prstGeom>
-          <a:noFill/>
-          <a:ln/>
-        </p:spPr>
-        <p:txBody>
-          <a:bodyPr wrap="square" lIns="0" tIns="0" rIns="0" bIns="0" rtlCol="0" anchor="t"/>
-          <a:lstStyle/>
-          <a:p>
-            <a:pPr algn="l" indent="0" marL="0">
-              <a:buNone/>
-            </a:pPr>
-            <a:r>
-              <a:rPr lang="en-US" sz="1400" b="1" dirty="0">
-                <a:solidFill>
-                  <a:srgbClr val="004098"/>
-                </a:solidFill>
-                <a:latin typeface="Meiryo" pitchFamily="34" charset="0"/>
-                <a:ea typeface="Meiryo" pitchFamily="34" charset="-122"/>
-                <a:cs typeface="Meiryo" pitchFamily="34" charset="-120"/>
-              </a:rPr>
-              <a:t>主要施策（FY26）</a:t>
-            </a:r>
-            <a:endParaRPr lang="en-US" sz="1400" dirty="0"/>
-          </a:p>
-        </p:txBody>
-      </p:sp>
-      <p:sp>
-        <p:nvSpPr>
-          <p:cNvPr id="25" name="Text 23"/>
-          <p:cNvSpPr/>
-          <p:nvPr/>
-        </p:nvSpPr>
-        <p:spPr>
-          <a:xfrm>
-            <a:off x="4709160" y="3520440"/>
-            <a:ext cx="3931920" cy="822960"/>
-          </a:xfrm>
-          <a:prstGeom prst="rect">
-            <a:avLst/>
-          </a:prstGeom>
-          <a:noFill/>
-          <a:ln/>
-        </p:spPr>
-        <p:txBody>
-          <a:bodyPr wrap="square" lIns="0" tIns="0" rIns="0" bIns="0" rtlCol="0" anchor="t"/>
-          <a:lstStyle/>
           <a:p>
             <a:pPr algn="l" indent="0" marL="0">
               <a:lnSpc>
@@ -3390,7 +3478,7 @@
                 <a:ea typeface="Meiryo" pitchFamily="34" charset="-122"/>
                 <a:cs typeface="Meiryo" pitchFamily="34" charset="-120"/>
               </a:rPr>
-              <a:t>・Ready定義を全チーム標準化展開</a:t>
+              <a:t>　（仕様／技術／外部の3分類）</a:t>
             </a:r>
             <a:endParaRPr lang="en-US" sz="1300" dirty="0"/>
           </a:p>
@@ -3410,7 +3498,7 @@
                 <a:ea typeface="Meiryo" pitchFamily="34" charset="-122"/>
                 <a:cs typeface="Meiryo" pitchFamily="34" charset="-120"/>
               </a:rPr>
-              <a:t>・手戻り原因分析の運用開始（仕様／技術／外部）</a:t>
+              <a:t>・工程・役割の明確化、優先対応基準の整備</a:t>
             </a:r>
             <a:endParaRPr lang="en-US" sz="1300" dirty="0"/>
           </a:p>
@@ -3430,46 +3518,26 @@
                 <a:ea typeface="Meiryo" pitchFamily="34" charset="-122"/>
                 <a:cs typeface="Meiryo" pitchFamily="34" charset="-120"/>
               </a:rPr>
-              <a:t>・工程・役割の明確化、優先対応基準の整備</a:t>
+              <a:t>・外部講師レクチャーで「小さく作り検証する」共通認識を継続支援</a:t>
             </a:r>
             <a:endParaRPr lang="en-US" sz="1300" dirty="0"/>
           </a:p>
-          <a:p>
-            <a:pPr algn="l" indent="0" marL="0">
-              <a:lnSpc>
-                <a:spcPct val="150000"/>
-              </a:lnSpc>
-              <a:buNone/>
-            </a:pPr>
-            <a:r>
-              <a:rPr lang="en-US" sz="1300" dirty="0">
-                <a:solidFill>
-                  <a:srgbClr val="1A1A2E"/>
-                </a:solidFill>
-                <a:latin typeface="Meiryo" pitchFamily="34" charset="0"/>
-                <a:ea typeface="Meiryo" pitchFamily="34" charset="-122"/>
-                <a:cs typeface="Meiryo" pitchFamily="34" charset="-120"/>
-              </a:rPr>
-              <a:t>・外部講師レクチャーで継続支援</a:t>
-            </a:r>
-            <a:endParaRPr lang="en-US" sz="1300" dirty="0"/>
-          </a:p>
         </p:txBody>
       </p:sp>
       <p:sp>
         <p:nvSpPr>
-          <p:cNvPr id="26" name="Shape 24"/>
-          <p:cNvSpPr/>
-          <p:nvPr/>
-        </p:nvSpPr>
-        <p:spPr>
-          <a:xfrm>
-            <a:off x="365760" y="4572000"/>
-            <a:ext cx="8412480" cy="365760"/>
+          <p:cNvPr id="22" name="Shape 20"/>
+          <p:cNvSpPr/>
+          <p:nvPr/>
+        </p:nvSpPr>
+        <p:spPr>
+          <a:xfrm>
+            <a:off x="365760" y="4297680"/>
+            <a:ext cx="8412480" cy="502920"/>
           </a:xfrm>
           <a:prstGeom prst="roundRect">
             <a:avLst>
-              <a:gd name="adj" fmla="val 7500"/>
+              <a:gd name="adj" fmla="val 5455"/>
             </a:avLst>
           </a:prstGeom>
           <a:solidFill>
@@ -3485,14 +3553,14 @@
       </p:sp>
       <p:sp>
         <p:nvSpPr>
-          <p:cNvPr id="27" name="Text 25"/>
-          <p:cNvSpPr/>
-          <p:nvPr/>
-        </p:nvSpPr>
-        <p:spPr>
-          <a:xfrm>
-            <a:off x="502920" y="4572000"/>
-            <a:ext cx="8138160" cy="365760"/>
+          <p:cNvPr id="23" name="Text 21"/>
+          <p:cNvSpPr/>
+          <p:nvPr/>
+        </p:nvSpPr>
+        <p:spPr>
+          <a:xfrm>
+            <a:off x="502920" y="4297680"/>
+            <a:ext cx="8138160" cy="502920"/>
           </a:xfrm>
           <a:prstGeom prst="rect">
             <a:avLst/>
@@ -3822,11 +3890,11 @@
         <p:spPr>
           <a:xfrm>
             <a:off x="365760" y="1463040"/>
-            <a:ext cx="4206240" cy="1463040"/>
+            <a:ext cx="2682240" cy="2697480"/>
           </a:xfrm>
           <a:prstGeom prst="roundRect">
             <a:avLst>
-              <a:gd name="adj" fmla="val 1875"/>
+              <a:gd name="adj" fmla="val 1023"/>
             </a:avLst>
           </a:prstGeom>
           <a:solidFill>
@@ -3851,7 +3919,7 @@
         <p:spPr>
           <a:xfrm>
             <a:off x="384048" y="1463040"/>
-            <a:ext cx="4169664" cy="54864"/>
+            <a:ext cx="2645664" cy="54864"/>
           </a:xfrm>
           <a:prstGeom prst="rect">
             <a:avLst/>
@@ -3871,7 +3939,7 @@
         <p:spPr>
           <a:xfrm>
             <a:off x="502920" y="1600200"/>
-            <a:ext cx="3931920" cy="365760"/>
+            <a:ext cx="2407920" cy="365760"/>
           </a:xfrm>
           <a:prstGeom prst="rect">
             <a:avLst/>
@@ -3910,7 +3978,7 @@
         <p:spPr>
           <a:xfrm>
             <a:off x="502920" y="1965960"/>
-            <a:ext cx="3931920" cy="822960"/>
+            <a:ext cx="2407920" cy="2057400"/>
           </a:xfrm>
           <a:prstGeom prst="rect">
             <a:avLst/>
@@ -3937,30 +4005,10 @@
                 <a:ea typeface="Meiryo" pitchFamily="34" charset="-122"/>
                 <a:cs typeface="Meiryo" pitchFamily="34" charset="-120"/>
               </a:rPr>
-              <a:t>着手からリリースまでの流れそのものを</a:t>
+              <a:t>着手からリリースまでの流れそのものを速く、予測可能にする。未安定3チーム（Fluppuccino／Discovery／Guardians）の型を言語化し、計測で見える化する。</a:t>
             </a:r>
             <a:endParaRPr lang="en-US" sz="1300" dirty="0"/>
           </a:p>
-          <a:p>
-            <a:pPr algn="l" indent="0" marL="0">
-              <a:lnSpc>
-                <a:spcPct val="150000"/>
-              </a:lnSpc>
-              <a:buNone/>
-            </a:pPr>
-            <a:r>
-              <a:rPr lang="en-US" sz="1300" dirty="0">
-                <a:solidFill>
-                  <a:srgbClr val="1A1A2E"/>
-                </a:solidFill>
-                <a:latin typeface="Meiryo" pitchFamily="34" charset="0"/>
-                <a:ea typeface="Meiryo" pitchFamily="34" charset="-122"/>
-                <a:cs typeface="Meiryo" pitchFamily="34" charset="-120"/>
-              </a:rPr>
-              <a:t>速く、予測可能にする。</a:t>
-            </a:r>
-            <a:endParaRPr lang="en-US" sz="1300" dirty="0"/>
-          </a:p>
         </p:txBody>
       </p:sp>
       <p:sp>
@@ -3971,12 +4019,12 @@
         </p:nvSpPr>
         <p:spPr>
           <a:xfrm>
-            <a:off x="4572000" y="1463040"/>
-            <a:ext cx="4206240" cy="1463040"/>
+            <a:off x="3230880" y="1463040"/>
+            <a:ext cx="2682240" cy="2697480"/>
           </a:xfrm>
           <a:prstGeom prst="roundRect">
             <a:avLst>
-              <a:gd name="adj" fmla="val 1875"/>
+              <a:gd name="adj" fmla="val 1023"/>
             </a:avLst>
           </a:prstGeom>
           <a:solidFill>
@@ -4000,8 +4048,8 @@
         </p:nvSpPr>
         <p:spPr>
           <a:xfrm>
-            <a:off x="4590288" y="1463040"/>
-            <a:ext cx="4169664" cy="54864"/>
+            <a:off x="3249168" y="1463040"/>
+            <a:ext cx="2645664" cy="54864"/>
           </a:xfrm>
           <a:prstGeom prst="rect">
             <a:avLst/>
@@ -4020,8 +4068,8 @@
         </p:nvSpPr>
         <p:spPr>
           <a:xfrm>
-            <a:off x="4709160" y="1600200"/>
-            <a:ext cx="3931920" cy="365760"/>
+            <a:off x="3368040" y="1600200"/>
+            <a:ext cx="2407920" cy="365760"/>
           </a:xfrm>
           <a:prstGeom prst="rect">
             <a:avLst/>
@@ -4045,7 +4093,7 @@
                 <a:ea typeface="Meiryo" pitchFamily="34" charset="-122"/>
                 <a:cs typeface="Meiryo" pitchFamily="34" charset="-120"/>
               </a:rPr>
-              <a:t>問題認識</a:t>
+              <a:t>年度マイルストーン</a:t>
             </a:r>
             <a:endParaRPr lang="en-US" sz="1400" dirty="0"/>
           </a:p>
@@ -4059,8 +4107,8 @@
         </p:nvSpPr>
         <p:spPr>
           <a:xfrm>
-            <a:off x="4709160" y="1965960"/>
-            <a:ext cx="3931920" cy="822960"/>
+            <a:off x="3368040" y="1965960"/>
+            <a:ext cx="2407920" cy="2057400"/>
           </a:xfrm>
           <a:prstGeom prst="rect">
             <a:avLst/>
@@ -4087,10 +4135,139 @@
                 <a:ea typeface="Meiryo" pitchFamily="34" charset="-122"/>
                 <a:cs typeface="Meiryo" pitchFamily="34" charset="-120"/>
               </a:rPr>
-              <a:t>4チーム中3チームのCT未安定（Fluppuccino／Discovery／Guardians）。PBI粒度、認識合わせ速度、見積精度、改善の回転で成熟度バラつき。リードタイム計測未整備でボトルネックが見えない。</a:t>
+              <a:t>FY26末：</a:t>
             </a:r>
             <a:endParaRPr lang="en-US" sz="1300" dirty="0"/>
           </a:p>
+          <a:p>
+            <a:pPr algn="l" indent="0" marL="0">
+              <a:lnSpc>
+                <a:spcPct val="150000"/>
+              </a:lnSpc>
+              <a:buNone/>
+            </a:pPr>
+            <a:r>
+              <a:rPr lang="en-US" sz="1300" dirty="0">
+                <a:solidFill>
+                  <a:srgbClr val="1A1A2E"/>
+                </a:solidFill>
+                <a:latin typeface="Meiryo" pitchFamily="34" charset="0"/>
+                <a:ea typeface="Meiryo" pitchFamily="34" charset="-122"/>
+                <a:cs typeface="Meiryo" pitchFamily="34" charset="-120"/>
+              </a:rPr>
+              <a:t>・全チームでサイクルタイム計測稼働</a:t>
+            </a:r>
+            <a:endParaRPr lang="en-US" sz="1300" dirty="0"/>
+          </a:p>
+          <a:p>
+            <a:pPr algn="l" indent="0" marL="0">
+              <a:lnSpc>
+                <a:spcPct val="150000"/>
+              </a:lnSpc>
+              <a:buNone/>
+            </a:pPr>
+            <a:r>
+              <a:rPr lang="en-US" sz="1300" dirty="0">
+                <a:solidFill>
+                  <a:srgbClr val="1A1A2E"/>
+                </a:solidFill>
+                <a:latin typeface="Meiryo" pitchFamily="34" charset="0"/>
+                <a:ea typeface="Meiryo" pitchFamily="34" charset="-122"/>
+                <a:cs typeface="Meiryo" pitchFamily="34" charset="-120"/>
+              </a:rPr>
+              <a:t>・未安定3チームがNaikistレベル（1〜2週）に近づく</a:t>
+            </a:r>
+            <a:endParaRPr lang="en-US" sz="1300" dirty="0"/>
+          </a:p>
+          <a:p>
+            <a:pPr algn="l" indent="0" marL="0">
+              <a:lnSpc>
+                <a:spcPct val="150000"/>
+              </a:lnSpc>
+              <a:buNone/>
+            </a:pPr>
+            <a:endParaRPr lang="en-US" sz="1300" dirty="0"/>
+          </a:p>
+          <a:p>
+            <a:pPr algn="l" indent="0" marL="0">
+              <a:lnSpc>
+                <a:spcPct val="150000"/>
+              </a:lnSpc>
+              <a:buNone/>
+            </a:pPr>
+            <a:r>
+              <a:rPr lang="en-US" sz="1300" dirty="0">
+                <a:solidFill>
+                  <a:srgbClr val="1A1A2E"/>
+                </a:solidFill>
+                <a:latin typeface="Meiryo" pitchFamily="34" charset="0"/>
+                <a:ea typeface="Meiryo" pitchFamily="34" charset="-122"/>
+                <a:cs typeface="Meiryo" pitchFamily="34" charset="-120"/>
+              </a:rPr>
+              <a:t>FY28末：</a:t>
+            </a:r>
+            <a:endParaRPr lang="en-US" sz="1300" dirty="0"/>
+          </a:p>
+          <a:p>
+            <a:pPr algn="l" indent="0" marL="0">
+              <a:lnSpc>
+                <a:spcPct val="150000"/>
+              </a:lnSpc>
+              <a:buNone/>
+            </a:pPr>
+            <a:r>
+              <a:rPr lang="en-US" sz="1300" dirty="0">
+                <a:solidFill>
+                  <a:srgbClr val="1A1A2E"/>
+                </a:solidFill>
+                <a:latin typeface="Meiryo" pitchFamily="34" charset="0"/>
+                <a:ea typeface="Meiryo" pitchFamily="34" charset="-122"/>
+                <a:cs typeface="Meiryo" pitchFamily="34" charset="-120"/>
+              </a:rPr>
+              <a:t>・サイクルタイム平均1ヶ月</a:t>
+            </a:r>
+            <a:endParaRPr lang="en-US" sz="1300" dirty="0"/>
+          </a:p>
+          <a:p>
+            <a:pPr algn="l" indent="0" marL="0">
+              <a:lnSpc>
+                <a:spcPct val="150000"/>
+              </a:lnSpc>
+              <a:buNone/>
+            </a:pPr>
+            <a:r>
+              <a:rPr lang="en-US" sz="1300" dirty="0">
+                <a:solidFill>
+                  <a:srgbClr val="1A1A2E"/>
+                </a:solidFill>
+                <a:latin typeface="Meiryo" pitchFamily="34" charset="0"/>
+                <a:ea typeface="Meiryo" pitchFamily="34" charset="-122"/>
+                <a:cs typeface="Meiryo" pitchFamily="34" charset="-120"/>
+              </a:rPr>
+              <a:t>・1スプリント見積精度90%以上</a:t>
+            </a:r>
+            <a:endParaRPr lang="en-US" sz="1300" dirty="0"/>
+          </a:p>
+          <a:p>
+            <a:pPr algn="l" indent="0" marL="0">
+              <a:lnSpc>
+                <a:spcPct val="150000"/>
+              </a:lnSpc>
+              <a:buNone/>
+            </a:pPr>
+            <a:r>
+              <a:rPr lang="en-US" sz="1300" dirty="0">
+                <a:solidFill>
+                  <a:srgbClr val="1A1A2E"/>
+                </a:solidFill>
+                <a:latin typeface="Meiryo" pitchFamily="34" charset="0"/>
+                <a:ea typeface="Meiryo" pitchFamily="34" charset="-122"/>
+                <a:cs typeface="Meiryo" pitchFamily="34" charset="-120"/>
+              </a:rPr>
+              <a:t>・DORA High レベル到達</a:t>
+            </a:r>
+            <a:endParaRPr lang="en-US" sz="1300" dirty="0"/>
+          </a:p>
         </p:txBody>
       </p:sp>
       <p:sp>
@@ -4101,12 +4278,12 @@
         </p:nvSpPr>
         <p:spPr>
           <a:xfrm>
-            <a:off x="365760" y="3017520"/>
-            <a:ext cx="4206240" cy="1463040"/>
+            <a:off x="6096000" y="1463040"/>
+            <a:ext cx="2682240" cy="2697480"/>
           </a:xfrm>
           <a:prstGeom prst="roundRect">
             <a:avLst>
-              <a:gd name="adj" fmla="val 1875"/>
+              <a:gd name="adj" fmla="val 1023"/>
             </a:avLst>
           </a:prstGeom>
           <a:solidFill>
@@ -4130,14 +4307,14 @@
         </p:nvSpPr>
         <p:spPr>
           <a:xfrm>
-            <a:off x="384048" y="3017520"/>
-            <a:ext cx="4169664" cy="54864"/>
+            <a:off x="6114288" y="1463040"/>
+            <a:ext cx="2645664" cy="54864"/>
           </a:xfrm>
           <a:prstGeom prst="rect">
             <a:avLst/>
           </a:prstGeom>
           <a:solidFill>
-            <a:srgbClr val="DC2626"/>
+            <a:srgbClr val="004098"/>
           </a:solidFill>
           <a:ln/>
         </p:spPr>
@@ -4150,8 +4327,8 @@
         </p:nvSpPr>
         <p:spPr>
           <a:xfrm>
-            <a:off x="502920" y="3154680"/>
-            <a:ext cx="3931920" cy="365760"/>
+            <a:off x="6233160" y="1600200"/>
+            <a:ext cx="2407920" cy="365760"/>
           </a:xfrm>
           <a:prstGeom prst="rect">
             <a:avLst/>
@@ -4169,13 +4346,13 @@
             <a:r>
               <a:rPr lang="en-US" sz="1400" b="1" dirty="0">
                 <a:solidFill>
-                  <a:srgbClr val="DC2626"/>
-                </a:solidFill>
-                <a:latin typeface="Meiryo" pitchFamily="34" charset="0"/>
-                <a:ea typeface="Meiryo" pitchFamily="34" charset="-122"/>
-                <a:cs typeface="Meiryo" pitchFamily="34" charset="-120"/>
-              </a:rPr>
-              <a:t>年度マイルストーン</a:t>
+                  <a:srgbClr val="004098"/>
+                </a:solidFill>
+                <a:latin typeface="Meiryo" pitchFamily="34" charset="0"/>
+                <a:ea typeface="Meiryo" pitchFamily="34" charset="-122"/>
+                <a:cs typeface="Meiryo" pitchFamily="34" charset="-120"/>
+              </a:rPr>
+              <a:t>主要施策（FY26）</a:t>
             </a:r>
             <a:endParaRPr lang="en-US" sz="1400" dirty="0"/>
           </a:p>
@@ -4189,8 +4366,8 @@
         </p:nvSpPr>
         <p:spPr>
           <a:xfrm>
-            <a:off x="502920" y="3520440"/>
-            <a:ext cx="3931920" cy="822960"/>
+            <a:off x="6233160" y="1965960"/>
+            <a:ext cx="2407920" cy="2057400"/>
           </a:xfrm>
           <a:prstGeom prst="rect">
             <a:avLst/>
@@ -4217,7 +4394,7 @@
                 <a:ea typeface="Meiryo" pitchFamily="34" charset="-122"/>
                 <a:cs typeface="Meiryo" pitchFamily="34" charset="-120"/>
               </a:rPr>
-              <a:t>FY26末：全チームCT計測稼働、未安定3チームがNaikistレベル（1〜2週）に近づく</a:t>
+              <a:t>・全チームでサイクルタイム計測導入</a:t>
             </a:r>
             <a:endParaRPr lang="en-US" sz="1300" dirty="0"/>
           </a:p>
@@ -4237,120 +4414,10 @@
                 <a:ea typeface="Meiryo" pitchFamily="34" charset="-122"/>
                 <a:cs typeface="Meiryo" pitchFamily="34" charset="-120"/>
               </a:rPr>
-              <a:t>FY28末：CT平均1ヶ月、見積精度90%以上、DORA High到達</a:t>
+              <a:t>　（Notion／Github計測ログ整備）</a:t>
             </a:r>
             <a:endParaRPr lang="en-US" sz="1300" dirty="0"/>
           </a:p>
-        </p:txBody>
-      </p:sp>
-      <p:sp>
-        <p:nvSpPr>
-          <p:cNvPr id="22" name="Shape 20"/>
-          <p:cNvSpPr/>
-          <p:nvPr/>
-        </p:nvSpPr>
-        <p:spPr>
-          <a:xfrm>
-            <a:off x="4572000" y="3017520"/>
-            <a:ext cx="4206240" cy="1463040"/>
-          </a:xfrm>
-          <a:prstGeom prst="roundRect">
-            <a:avLst>
-              <a:gd name="adj" fmla="val 1875"/>
-            </a:avLst>
-          </a:prstGeom>
-          <a:solidFill>
-            <a:srgbClr val="EEF3FA"/>
-          </a:solidFill>
-          <a:ln/>
-          <a:effectLst>
-            <a:outerShdw sx="100000" sy="100000" kx="0" ky="0" algn="bl" rotWithShape="0" blurRad="50800" dist="25400" dir="8100000">
-              <a:srgbClr val="000000">
-                <a:alpha val="8000"/>
-              </a:srgbClr>
-            </a:outerShdw>
-          </a:effectLst>
-        </p:spPr>
-      </p:sp>
-      <p:sp>
-        <p:nvSpPr>
-          <p:cNvPr id="23" name="Shape 21"/>
-          <p:cNvSpPr/>
-          <p:nvPr/>
-        </p:nvSpPr>
-        <p:spPr>
-          <a:xfrm>
-            <a:off x="4590288" y="3017520"/>
-            <a:ext cx="4169664" cy="54864"/>
-          </a:xfrm>
-          <a:prstGeom prst="rect">
-            <a:avLst/>
-          </a:prstGeom>
-          <a:solidFill>
-            <a:srgbClr val="004098"/>
-          </a:solidFill>
-          <a:ln/>
-        </p:spPr>
-      </p:sp>
-      <p:sp>
-        <p:nvSpPr>
-          <p:cNvPr id="24" name="Text 22"/>
-          <p:cNvSpPr/>
-          <p:nvPr/>
-        </p:nvSpPr>
-        <p:spPr>
-          <a:xfrm>
-            <a:off x="4709160" y="3154680"/>
-            <a:ext cx="3931920" cy="365760"/>
-          </a:xfrm>
-          <a:prstGeom prst="rect">
-            <a:avLst/>
-          </a:prstGeom>
-          <a:noFill/>
-          <a:ln/>
-        </p:spPr>
-        <p:txBody>
-          <a:bodyPr wrap="square" lIns="0" tIns="0" rIns="0" bIns="0" rtlCol="0" anchor="t"/>
-          <a:lstStyle/>
-          <a:p>
-            <a:pPr algn="l" indent="0" marL="0">
-              <a:buNone/>
-            </a:pPr>
-            <a:r>
-              <a:rPr lang="en-US" sz="1400" b="1" dirty="0">
-                <a:solidFill>
-                  <a:srgbClr val="004098"/>
-                </a:solidFill>
-                <a:latin typeface="Meiryo" pitchFamily="34" charset="0"/>
-                <a:ea typeface="Meiryo" pitchFamily="34" charset="-122"/>
-                <a:cs typeface="Meiryo" pitchFamily="34" charset="-120"/>
-              </a:rPr>
-              <a:t>主要施策（FY26）</a:t>
-            </a:r>
-            <a:endParaRPr lang="en-US" sz="1400" dirty="0"/>
-          </a:p>
-        </p:txBody>
-      </p:sp>
-      <p:sp>
-        <p:nvSpPr>
-          <p:cNvPr id="25" name="Text 23"/>
-          <p:cNvSpPr/>
-          <p:nvPr/>
-        </p:nvSpPr>
-        <p:spPr>
-          <a:xfrm>
-            <a:off x="4709160" y="3520440"/>
-            <a:ext cx="3931920" cy="822960"/>
-          </a:xfrm>
-          <a:prstGeom prst="rect">
-            <a:avLst/>
-          </a:prstGeom>
-          <a:noFill/>
-          <a:ln/>
-        </p:spPr>
-        <p:txBody>
-          <a:bodyPr wrap="square" lIns="0" tIns="0" rIns="0" bIns="0" rtlCol="0" anchor="t"/>
-          <a:lstStyle/>
           <a:p>
             <a:pPr algn="l" indent="0" marL="0">
               <a:lnSpc>
@@ -4367,7 +4434,7 @@
                 <a:ea typeface="Meiryo" pitchFamily="34" charset="-122"/>
                 <a:cs typeface="Meiryo" pitchFamily="34" charset="-120"/>
               </a:rPr>
-              <a:t>・全チームでサイクルタイム計測導入（Notion／Github）</a:t>
+              <a:t>・工程リードタイム可視化でボトルネック特定</a:t>
             </a:r>
             <a:endParaRPr lang="en-US" sz="1300" dirty="0"/>
           </a:p>
@@ -4387,7 +4454,7 @@
                 <a:ea typeface="Meiryo" pitchFamily="34" charset="-122"/>
                 <a:cs typeface="Meiryo" pitchFamily="34" charset="-120"/>
               </a:rPr>
-              <a:t>・工程リードタイム可視化でボトルネック特定</a:t>
+              <a:t>・Web／ネイティブアプリをフィーチャーチームに統合</a:t>
             </a:r>
             <a:endParaRPr lang="en-US" sz="1300" dirty="0"/>
           </a:p>
@@ -4407,46 +4474,26 @@
                 <a:ea typeface="Meiryo" pitchFamily="34" charset="-122"/>
                 <a:cs typeface="Meiryo" pitchFamily="34" charset="-120"/>
               </a:rPr>
-              <a:t>・Web/ネイティブをフィーチャーチームに統合</a:t>
+              <a:t>・優先順位づけ基準の整備（意思決定速度向上）</a:t>
             </a:r>
             <a:endParaRPr lang="en-US" sz="1300" dirty="0"/>
           </a:p>
-          <a:p>
-            <a:pPr algn="l" indent="0" marL="0">
-              <a:lnSpc>
-                <a:spcPct val="150000"/>
-              </a:lnSpc>
-              <a:buNone/>
-            </a:pPr>
-            <a:r>
-              <a:rPr lang="en-US" sz="1300" dirty="0">
-                <a:solidFill>
-                  <a:srgbClr val="1A1A2E"/>
-                </a:solidFill>
-                <a:latin typeface="Meiryo" pitchFamily="34" charset="0"/>
-                <a:ea typeface="Meiryo" pitchFamily="34" charset="-122"/>
-                <a:cs typeface="Meiryo" pitchFamily="34" charset="-120"/>
-              </a:rPr>
-              <a:t>・優先順位づけ基準の整備（意思決定速度）</a:t>
-            </a:r>
-            <a:endParaRPr lang="en-US" sz="1300" dirty="0"/>
-          </a:p>
         </p:txBody>
       </p:sp>
       <p:sp>
         <p:nvSpPr>
-          <p:cNvPr id="26" name="Shape 24"/>
-          <p:cNvSpPr/>
-          <p:nvPr/>
-        </p:nvSpPr>
-        <p:spPr>
-          <a:xfrm>
-            <a:off x="365760" y="4572000"/>
-            <a:ext cx="8412480" cy="365760"/>
+          <p:cNvPr id="22" name="Shape 20"/>
+          <p:cNvSpPr/>
+          <p:nvPr/>
+        </p:nvSpPr>
+        <p:spPr>
+          <a:xfrm>
+            <a:off x="365760" y="4297680"/>
+            <a:ext cx="8412480" cy="502920"/>
           </a:xfrm>
           <a:prstGeom prst="roundRect">
             <a:avLst>
-              <a:gd name="adj" fmla="val 7500"/>
+              <a:gd name="adj" fmla="val 5455"/>
             </a:avLst>
           </a:prstGeom>
           <a:solidFill>
@@ -4462,14 +4509,14 @@
       </p:sp>
       <p:sp>
         <p:nvSpPr>
-          <p:cNvPr id="27" name="Text 25"/>
-          <p:cNvSpPr/>
-          <p:nvPr/>
-        </p:nvSpPr>
-        <p:spPr>
-          <a:xfrm>
-            <a:off x="502920" y="4572000"/>
-            <a:ext cx="8138160" cy="365760"/>
+          <p:cNvPr id="23" name="Text 21"/>
+          <p:cNvSpPr/>
+          <p:nvPr/>
+        </p:nvSpPr>
+        <p:spPr>
+          <a:xfrm>
+            <a:off x="502920" y="4297680"/>
+            <a:ext cx="8138160" cy="502920"/>
           </a:xfrm>
           <a:prstGeom prst="rect">
             <a:avLst/>
@@ -4799,11 +4846,11 @@
         <p:spPr>
           <a:xfrm>
             <a:off x="365760" y="1463040"/>
-            <a:ext cx="4206240" cy="1463040"/>
+            <a:ext cx="2682240" cy="2697480"/>
           </a:xfrm>
           <a:prstGeom prst="roundRect">
             <a:avLst>
-              <a:gd name="adj" fmla="val 1875"/>
+              <a:gd name="adj" fmla="val 1023"/>
             </a:avLst>
           </a:prstGeom>
           <a:solidFill>
@@ -4828,7 +4875,7 @@
         <p:spPr>
           <a:xfrm>
             <a:off x="384048" y="1463040"/>
-            <a:ext cx="4169664" cy="54864"/>
+            <a:ext cx="2645664" cy="54864"/>
           </a:xfrm>
           <a:prstGeom prst="rect">
             <a:avLst/>
@@ -4848,7 +4895,7 @@
         <p:spPr>
           <a:xfrm>
             <a:off x="502920" y="1600200"/>
-            <a:ext cx="3931920" cy="365760"/>
+            <a:ext cx="2407920" cy="365760"/>
           </a:xfrm>
           <a:prstGeom prst="rect">
             <a:avLst/>
@@ -4887,7 +4934,7 @@
         <p:spPr>
           <a:xfrm>
             <a:off x="502920" y="1965960"/>
-            <a:ext cx="3931920" cy="822960"/>
+            <a:ext cx="2407920" cy="2057400"/>
           </a:xfrm>
           <a:prstGeom prst="rect">
             <a:avLst/>
@@ -4914,30 +4961,10 @@
                 <a:ea typeface="Meiryo" pitchFamily="34" charset="-122"/>
                 <a:cs typeface="Meiryo" pitchFamily="34" charset="-120"/>
               </a:rPr>
-              <a:t>作ったものが顧客価値につながったかを検証し、</a:t>
+              <a:t>作ったものが顧客価値につながったかを検証し、次の投資判断に反映するサイクルを定着させる。リリースして終わりにせず「次にやること／やめること」を決める循環を作る。成果の方程式の"精度側"を担うKR。</a:t>
             </a:r>
             <a:endParaRPr lang="en-US" sz="1300" dirty="0"/>
           </a:p>
-          <a:p>
-            <a:pPr algn="l" indent="0" marL="0">
-              <a:lnSpc>
-                <a:spcPct val="150000"/>
-              </a:lnSpc>
-              <a:buNone/>
-            </a:pPr>
-            <a:r>
-              <a:rPr lang="en-US" sz="1300" dirty="0">
-                <a:solidFill>
-                  <a:srgbClr val="1A1A2E"/>
-                </a:solidFill>
-                <a:latin typeface="Meiryo" pitchFamily="34" charset="0"/>
-                <a:ea typeface="Meiryo" pitchFamily="34" charset="-122"/>
-                <a:cs typeface="Meiryo" pitchFamily="34" charset="-120"/>
-              </a:rPr>
-              <a:t>次の投資判断に反映するサイクルを定着させる。</a:t>
-            </a:r>
-            <a:endParaRPr lang="en-US" sz="1300" dirty="0"/>
-          </a:p>
         </p:txBody>
       </p:sp>
       <p:sp>
@@ -4948,12 +4975,12 @@
         </p:nvSpPr>
         <p:spPr>
           <a:xfrm>
-            <a:off x="4572000" y="1463040"/>
-            <a:ext cx="4206240" cy="1463040"/>
+            <a:off x="3230880" y="1463040"/>
+            <a:ext cx="2682240" cy="2697480"/>
           </a:xfrm>
           <a:prstGeom prst="roundRect">
             <a:avLst>
-              <a:gd name="adj" fmla="val 1875"/>
+              <a:gd name="adj" fmla="val 1023"/>
             </a:avLst>
           </a:prstGeom>
           <a:solidFill>
@@ -4977,8 +5004,8 @@
         </p:nvSpPr>
         <p:spPr>
           <a:xfrm>
-            <a:off x="4590288" y="1463040"/>
-            <a:ext cx="4169664" cy="54864"/>
+            <a:off x="3249168" y="1463040"/>
+            <a:ext cx="2645664" cy="54864"/>
           </a:xfrm>
           <a:prstGeom prst="rect">
             <a:avLst/>
@@ -4997,8 +5024,8 @@
         </p:nvSpPr>
         <p:spPr>
           <a:xfrm>
-            <a:off x="4709160" y="1600200"/>
-            <a:ext cx="3931920" cy="365760"/>
+            <a:off x="3368040" y="1600200"/>
+            <a:ext cx="2407920" cy="365760"/>
           </a:xfrm>
           <a:prstGeom prst="rect">
             <a:avLst/>
@@ -5022,7 +5049,7 @@
                 <a:ea typeface="Meiryo" pitchFamily="34" charset="-122"/>
                 <a:cs typeface="Meiryo" pitchFamily="34" charset="-120"/>
               </a:rPr>
-              <a:t>問題認識</a:t>
+              <a:t>年度マイルストーン</a:t>
             </a:r>
             <a:endParaRPr lang="en-US" sz="1400" dirty="0"/>
           </a:p>
@@ -5036,8 +5063,8 @@
         </p:nvSpPr>
         <p:spPr>
           <a:xfrm>
-            <a:off x="4709160" y="1965960"/>
-            <a:ext cx="3931920" cy="822960"/>
+            <a:off x="3368040" y="1965960"/>
+            <a:ext cx="2407920" cy="2057400"/>
           </a:xfrm>
           <a:prstGeom prst="rect">
             <a:avLst/>
@@ -5064,10 +5091,199 @@
                 <a:ea typeface="Meiryo" pitchFamily="34" charset="-122"/>
                 <a:cs typeface="Meiryo" pitchFamily="34" charset="-120"/>
               </a:rPr>
-              <a:t>「作る」までで終わり、検証が次サイクルに接続されない。Krakenのような依存関係が多い案件は前提が変わり手戻り化。打席数を増やすだけでは成果は出ない ── 何に打席を使うかの精度が低ければ打席を無駄にする。</a:t>
+              <a:t>FY26末：</a:t>
             </a:r>
             <a:endParaRPr lang="en-US" sz="1300" dirty="0"/>
           </a:p>
+          <a:p>
+            <a:pPr algn="l" indent="0" marL="0">
+              <a:lnSpc>
+                <a:spcPct val="150000"/>
+              </a:lnSpc>
+              <a:buNone/>
+            </a:pPr>
+            <a:r>
+              <a:rPr lang="en-US" sz="1300" dirty="0">
+                <a:solidFill>
+                  <a:srgbClr val="1A1A2E"/>
+                </a:solidFill>
+                <a:latin typeface="Meiryo" pitchFamily="34" charset="0"/>
+                <a:ea typeface="Meiryo" pitchFamily="34" charset="-122"/>
+                <a:cs typeface="Meiryo" pitchFamily="34" charset="-120"/>
+              </a:rPr>
+              <a:t>・全PBIのうち仮説・計測指標記入率 60%以上</a:t>
+            </a:r>
+            <a:endParaRPr lang="en-US" sz="1300" dirty="0"/>
+          </a:p>
+          <a:p>
+            <a:pPr algn="l" indent="0" marL="0">
+              <a:lnSpc>
+                <a:spcPct val="150000"/>
+              </a:lnSpc>
+              <a:buNone/>
+            </a:pPr>
+            <a:r>
+              <a:rPr lang="en-US" sz="1300" dirty="0">
+                <a:solidFill>
+                  <a:srgbClr val="1A1A2E"/>
+                </a:solidFill>
+                <a:latin typeface="Meiryo" pitchFamily="34" charset="0"/>
+                <a:ea typeface="Meiryo" pitchFamily="34" charset="-122"/>
+                <a:cs typeface="Meiryo" pitchFamily="34" charset="-120"/>
+              </a:rPr>
+              <a:t>　（Ready定義に組み込み）</a:t>
+            </a:r>
+            <a:endParaRPr lang="en-US" sz="1300" dirty="0"/>
+          </a:p>
+          <a:p>
+            <a:pPr algn="l" indent="0" marL="0">
+              <a:lnSpc>
+                <a:spcPct val="150000"/>
+              </a:lnSpc>
+              <a:buNone/>
+            </a:pPr>
+            <a:r>
+              <a:rPr lang="en-US" sz="1300" dirty="0">
+                <a:solidFill>
+                  <a:srgbClr val="1A1A2E"/>
+                </a:solidFill>
+                <a:latin typeface="Meiryo" pitchFamily="34" charset="0"/>
+                <a:ea typeface="Meiryo" pitchFamily="34" charset="-122"/>
+                <a:cs typeface="Meiryo" pitchFamily="34" charset="-120"/>
+              </a:rPr>
+              <a:t>・検証→次施策反映リードタイムの</a:t>
+            </a:r>
+            <a:endParaRPr lang="en-US" sz="1300" dirty="0"/>
+          </a:p>
+          <a:p>
+            <a:pPr algn="l" indent="0" marL="0">
+              <a:lnSpc>
+                <a:spcPct val="150000"/>
+              </a:lnSpc>
+              <a:buNone/>
+            </a:pPr>
+            <a:r>
+              <a:rPr lang="en-US" sz="1300" dirty="0">
+                <a:solidFill>
+                  <a:srgbClr val="1A1A2E"/>
+                </a:solidFill>
+                <a:latin typeface="Meiryo" pitchFamily="34" charset="0"/>
+                <a:ea typeface="Meiryo" pitchFamily="34" charset="-122"/>
+                <a:cs typeface="Meiryo" pitchFamily="34" charset="-120"/>
+              </a:rPr>
+              <a:t>　ベースライン計測確定</a:t>
+            </a:r>
+            <a:endParaRPr lang="en-US" sz="1300" dirty="0"/>
+          </a:p>
+          <a:p>
+            <a:pPr algn="l" indent="0" marL="0">
+              <a:lnSpc>
+                <a:spcPct val="150000"/>
+              </a:lnSpc>
+              <a:buNone/>
+            </a:pPr>
+            <a:r>
+              <a:rPr lang="en-US" sz="1300" dirty="0">
+                <a:solidFill>
+                  <a:srgbClr val="1A1A2E"/>
+                </a:solidFill>
+                <a:latin typeface="Meiryo" pitchFamily="34" charset="0"/>
+                <a:ea typeface="Meiryo" pitchFamily="34" charset="-122"/>
+                <a:cs typeface="Meiryo" pitchFamily="34" charset="-120"/>
+              </a:rPr>
+              <a:t>・1Q末までに目標設定</a:t>
+            </a:r>
+            <a:endParaRPr lang="en-US" sz="1300" dirty="0"/>
+          </a:p>
+          <a:p>
+            <a:pPr algn="l" indent="0" marL="0">
+              <a:lnSpc>
+                <a:spcPct val="150000"/>
+              </a:lnSpc>
+              <a:buNone/>
+            </a:pPr>
+            <a:endParaRPr lang="en-US" sz="1300" dirty="0"/>
+          </a:p>
+          <a:p>
+            <a:pPr algn="l" indent="0" marL="0">
+              <a:lnSpc>
+                <a:spcPct val="150000"/>
+              </a:lnSpc>
+              <a:buNone/>
+            </a:pPr>
+            <a:r>
+              <a:rPr lang="en-US" sz="1300" dirty="0">
+                <a:solidFill>
+                  <a:srgbClr val="1A1A2E"/>
+                </a:solidFill>
+                <a:latin typeface="Meiryo" pitchFamily="34" charset="0"/>
+                <a:ea typeface="Meiryo" pitchFamily="34" charset="-122"/>
+                <a:cs typeface="Meiryo" pitchFamily="34" charset="-120"/>
+              </a:rPr>
+              <a:t>FY28末：</a:t>
+            </a:r>
+            <a:endParaRPr lang="en-US" sz="1300" dirty="0"/>
+          </a:p>
+          <a:p>
+            <a:pPr algn="l" indent="0" marL="0">
+              <a:lnSpc>
+                <a:spcPct val="150000"/>
+              </a:lnSpc>
+              <a:buNone/>
+            </a:pPr>
+            <a:r>
+              <a:rPr lang="en-US" sz="1300" dirty="0">
+                <a:solidFill>
+                  <a:srgbClr val="1A1A2E"/>
+                </a:solidFill>
+                <a:latin typeface="Meiryo" pitchFamily="34" charset="0"/>
+                <a:ea typeface="Meiryo" pitchFamily="34" charset="-122"/>
+                <a:cs typeface="Meiryo" pitchFamily="34" charset="-120"/>
+              </a:rPr>
+              <a:t>・検証起因のバックログ変更 50%以上</a:t>
+            </a:r>
+            <a:endParaRPr lang="en-US" sz="1300" dirty="0"/>
+          </a:p>
+          <a:p>
+            <a:pPr algn="l" indent="0" marL="0">
+              <a:lnSpc>
+                <a:spcPct val="150000"/>
+              </a:lnSpc>
+              <a:buNone/>
+            </a:pPr>
+            <a:r>
+              <a:rPr lang="en-US" sz="1300" dirty="0">
+                <a:solidFill>
+                  <a:srgbClr val="1A1A2E"/>
+                </a:solidFill>
+                <a:latin typeface="Meiryo" pitchFamily="34" charset="0"/>
+                <a:ea typeface="Meiryo" pitchFamily="34" charset="-122"/>
+                <a:cs typeface="Meiryo" pitchFamily="34" charset="-120"/>
+              </a:rPr>
+              <a:t>・DORA High 到達</a:t>
+            </a:r>
+            <a:endParaRPr lang="en-US" sz="1300" dirty="0"/>
+          </a:p>
+          <a:p>
+            <a:pPr algn="l" indent="0" marL="0">
+              <a:lnSpc>
+                <a:spcPct val="150000"/>
+              </a:lnSpc>
+              <a:buNone/>
+            </a:pPr>
+            <a:r>
+              <a:rPr lang="en-US" sz="1300" dirty="0">
+                <a:solidFill>
+                  <a:srgbClr val="1A1A2E"/>
+                </a:solidFill>
+                <a:latin typeface="Meiryo" pitchFamily="34" charset="0"/>
+                <a:ea typeface="Meiryo" pitchFamily="34" charset="-122"/>
+                <a:cs typeface="Meiryo" pitchFamily="34" charset="-120"/>
+              </a:rPr>
+              <a:t>　（検証→次施策反映 平均1ヶ月以内）</a:t>
+            </a:r>
+            <a:endParaRPr lang="en-US" sz="1300" dirty="0"/>
+          </a:p>
         </p:txBody>
       </p:sp>
       <p:sp>
@@ -5078,12 +5294,12 @@
         </p:nvSpPr>
         <p:spPr>
           <a:xfrm>
-            <a:off x="365760" y="3017520"/>
-            <a:ext cx="4206240" cy="1463040"/>
+            <a:off x="6096000" y="1463040"/>
+            <a:ext cx="2682240" cy="2697480"/>
           </a:xfrm>
           <a:prstGeom prst="roundRect">
             <a:avLst>
-              <a:gd name="adj" fmla="val 1875"/>
+              <a:gd name="adj" fmla="val 1023"/>
             </a:avLst>
           </a:prstGeom>
           <a:solidFill>
@@ -5107,14 +5323,14 @@
         </p:nvSpPr>
         <p:spPr>
           <a:xfrm>
-            <a:off x="384048" y="3017520"/>
-            <a:ext cx="4169664" cy="54864"/>
+            <a:off x="6114288" y="1463040"/>
+            <a:ext cx="2645664" cy="54864"/>
           </a:xfrm>
           <a:prstGeom prst="rect">
             <a:avLst/>
           </a:prstGeom>
           <a:solidFill>
-            <a:srgbClr val="DC2626"/>
+            <a:srgbClr val="004098"/>
           </a:solidFill>
           <a:ln/>
         </p:spPr>
@@ -5127,8 +5343,8 @@
         </p:nvSpPr>
         <p:spPr>
           <a:xfrm>
-            <a:off x="502920" y="3154680"/>
-            <a:ext cx="3931920" cy="365760"/>
+            <a:off x="6233160" y="1600200"/>
+            <a:ext cx="2407920" cy="365760"/>
           </a:xfrm>
           <a:prstGeom prst="rect">
             <a:avLst/>
@@ -5146,13 +5362,13 @@
             <a:r>
               <a:rPr lang="en-US" sz="1400" b="1" dirty="0">
                 <a:solidFill>
-                  <a:srgbClr val="DC2626"/>
-                </a:solidFill>
-                <a:latin typeface="Meiryo" pitchFamily="34" charset="0"/>
-                <a:ea typeface="Meiryo" pitchFamily="34" charset="-122"/>
-                <a:cs typeface="Meiryo" pitchFamily="34" charset="-120"/>
-              </a:rPr>
-              <a:t>年度マイルストーン</a:t>
+                  <a:srgbClr val="004098"/>
+                </a:solidFill>
+                <a:latin typeface="Meiryo" pitchFamily="34" charset="0"/>
+                <a:ea typeface="Meiryo" pitchFamily="34" charset="-122"/>
+                <a:cs typeface="Meiryo" pitchFamily="34" charset="-120"/>
+              </a:rPr>
+              <a:t>主要施策（FY26）</a:t>
             </a:r>
             <a:endParaRPr lang="en-US" sz="1400" dirty="0"/>
           </a:p>
@@ -5166,8 +5382,8 @@
         </p:nvSpPr>
         <p:spPr>
           <a:xfrm>
-            <a:off x="502920" y="3520440"/>
-            <a:ext cx="3931920" cy="822960"/>
+            <a:off x="6233160" y="1965960"/>
+            <a:ext cx="2407920" cy="2057400"/>
           </a:xfrm>
           <a:prstGeom prst="rect">
             <a:avLst/>
@@ -5194,7 +5410,7 @@
                 <a:ea typeface="Meiryo" pitchFamily="34" charset="-122"/>
                 <a:cs typeface="Meiryo" pitchFamily="34" charset="-120"/>
               </a:rPr>
-              <a:t>FY26末：スプリントレビューに価値検証アジェンダ定着、学習ログ蓄積＋PdM月次FB稼働</a:t>
+              <a:t>・PBIフォーマットに「検証したい仮説／計測指標」を組込</a:t>
             </a:r>
             <a:endParaRPr lang="en-US" sz="1300" dirty="0"/>
           </a:p>
@@ -5214,120 +5430,10 @@
                 <a:ea typeface="Meiryo" pitchFamily="34" charset="-122"/>
                 <a:cs typeface="Meiryo" pitchFamily="34" charset="-120"/>
               </a:rPr>
-              <a:t>FY28末：検証起因のバックログ変更50%以上、DORA High到達</a:t>
+              <a:t>　仮説→結果→学び→次アクションのテンプレート化</a:t>
             </a:r>
             <a:endParaRPr lang="en-US" sz="1300" dirty="0"/>
           </a:p>
-        </p:txBody>
-      </p:sp>
-      <p:sp>
-        <p:nvSpPr>
-          <p:cNvPr id="22" name="Shape 20"/>
-          <p:cNvSpPr/>
-          <p:nvPr/>
-        </p:nvSpPr>
-        <p:spPr>
-          <a:xfrm>
-            <a:off x="4572000" y="3017520"/>
-            <a:ext cx="4206240" cy="1463040"/>
-          </a:xfrm>
-          <a:prstGeom prst="roundRect">
-            <a:avLst>
-              <a:gd name="adj" fmla="val 1875"/>
-            </a:avLst>
-          </a:prstGeom>
-          <a:solidFill>
-            <a:srgbClr val="EEF3FA"/>
-          </a:solidFill>
-          <a:ln/>
-          <a:effectLst>
-            <a:outerShdw sx="100000" sy="100000" kx="0" ky="0" algn="bl" rotWithShape="0" blurRad="50800" dist="25400" dir="8100000">
-              <a:srgbClr val="000000">
-                <a:alpha val="8000"/>
-              </a:srgbClr>
-            </a:outerShdw>
-          </a:effectLst>
-        </p:spPr>
-      </p:sp>
-      <p:sp>
-        <p:nvSpPr>
-          <p:cNvPr id="23" name="Shape 21"/>
-          <p:cNvSpPr/>
-          <p:nvPr/>
-        </p:nvSpPr>
-        <p:spPr>
-          <a:xfrm>
-            <a:off x="4590288" y="3017520"/>
-            <a:ext cx="4169664" cy="54864"/>
-          </a:xfrm>
-          <a:prstGeom prst="rect">
-            <a:avLst/>
-          </a:prstGeom>
-          <a:solidFill>
-            <a:srgbClr val="004098"/>
-          </a:solidFill>
-          <a:ln/>
-        </p:spPr>
-      </p:sp>
-      <p:sp>
-        <p:nvSpPr>
-          <p:cNvPr id="24" name="Text 22"/>
-          <p:cNvSpPr/>
-          <p:nvPr/>
-        </p:nvSpPr>
-        <p:spPr>
-          <a:xfrm>
-            <a:off x="4709160" y="3154680"/>
-            <a:ext cx="3931920" cy="365760"/>
-          </a:xfrm>
-          <a:prstGeom prst="rect">
-            <a:avLst/>
-          </a:prstGeom>
-          <a:noFill/>
-          <a:ln/>
-        </p:spPr>
-        <p:txBody>
-          <a:bodyPr wrap="square" lIns="0" tIns="0" rIns="0" bIns="0" rtlCol="0" anchor="t"/>
-          <a:lstStyle/>
-          <a:p>
-            <a:pPr algn="l" indent="0" marL="0">
-              <a:buNone/>
-            </a:pPr>
-            <a:r>
-              <a:rPr lang="en-US" sz="1400" b="1" dirty="0">
-                <a:solidFill>
-                  <a:srgbClr val="004098"/>
-                </a:solidFill>
-                <a:latin typeface="Meiryo" pitchFamily="34" charset="0"/>
-                <a:ea typeface="Meiryo" pitchFamily="34" charset="-122"/>
-                <a:cs typeface="Meiryo" pitchFamily="34" charset="-120"/>
-              </a:rPr>
-              <a:t>主要施策（FY26）</a:t>
-            </a:r>
-            <a:endParaRPr lang="en-US" sz="1400" dirty="0"/>
-          </a:p>
-        </p:txBody>
-      </p:sp>
-      <p:sp>
-        <p:nvSpPr>
-          <p:cNvPr id="25" name="Text 23"/>
-          <p:cNvSpPr/>
-          <p:nvPr/>
-        </p:nvSpPr>
-        <p:spPr>
-          <a:xfrm>
-            <a:off x="4709160" y="3520440"/>
-            <a:ext cx="3931920" cy="822960"/>
-          </a:xfrm>
-          <a:prstGeom prst="rect">
-            <a:avLst/>
-          </a:prstGeom>
-          <a:noFill/>
-          <a:ln/>
-        </p:spPr>
-        <p:txBody>
-          <a:bodyPr wrap="square" lIns="0" tIns="0" rIns="0" bIns="0" rtlCol="0" anchor="t"/>
-          <a:lstStyle/>
           <a:p>
             <a:pPr algn="l" indent="0" marL="0">
               <a:lnSpc>
@@ -5344,7 +5450,7 @@
                 <a:ea typeface="Meiryo" pitchFamily="34" charset="-122"/>
                 <a:cs typeface="Meiryo" pitchFamily="34" charset="-120"/>
               </a:rPr>
-              <a:t>・PBIフォーマットに「検証したい仮説／計測指標」を組込</a:t>
+              <a:t>・Ready定義（挑戦KR1）に仮説記入を組み込み、</a:t>
             </a:r>
             <a:endParaRPr lang="en-US" sz="1300" dirty="0"/>
           </a:p>
@@ -5364,7 +5470,7 @@
                 <a:ea typeface="Meiryo" pitchFamily="34" charset="-122"/>
                 <a:cs typeface="Meiryo" pitchFamily="34" charset="-120"/>
               </a:rPr>
-              <a:t>・開発環境にGoogleAnalytics導入、ドッグフーディング仕組化</a:t>
+              <a:t>　入口品質と学習ループを接続</a:t>
             </a:r>
             <a:endParaRPr lang="en-US" sz="1300" dirty="0"/>
           </a:p>
@@ -5384,26 +5490,46 @@
                 <a:ea typeface="Meiryo" pitchFamily="34" charset="-122"/>
                 <a:cs typeface="Meiryo" pitchFamily="34" charset="-120"/>
               </a:rPr>
-              <a:t>・スプリントレビューで価値検証アジェンダを毎回運用</a:t>
+              <a:t>・開発環境にGoogleAnalytics導入、ドッグフーディング仕組化</a:t>
             </a:r>
             <a:endParaRPr lang="en-US" sz="1300" dirty="0"/>
           </a:p>
+          <a:p>
+            <a:pPr algn="l" indent="0" marL="0">
+              <a:lnSpc>
+                <a:spcPct val="150000"/>
+              </a:lnSpc>
+              <a:buNone/>
+            </a:pPr>
+            <a:r>
+              <a:rPr lang="en-US" sz="1300" dirty="0">
+                <a:solidFill>
+                  <a:srgbClr val="1A1A2E"/>
+                </a:solidFill>
+                <a:latin typeface="Meiryo" pitchFamily="34" charset="0"/>
+                <a:ea typeface="Meiryo" pitchFamily="34" charset="-122"/>
+                <a:cs typeface="Meiryo" pitchFamily="34" charset="-120"/>
+              </a:rPr>
+              <a:t>　ログ運用設計（Q1 5月）→検証ログ運用開始（Q1 6月）</a:t>
+            </a:r>
+            <a:endParaRPr lang="en-US" sz="1300" dirty="0"/>
+          </a:p>
         </p:txBody>
       </p:sp>
       <p:sp>
         <p:nvSpPr>
-          <p:cNvPr id="26" name="Shape 24"/>
-          <p:cNvSpPr/>
-          <p:nvPr/>
-        </p:nvSpPr>
-        <p:spPr>
-          <a:xfrm>
-            <a:off x="365760" y="4572000"/>
-            <a:ext cx="8412480" cy="365760"/>
+          <p:cNvPr id="22" name="Shape 20"/>
+          <p:cNvSpPr/>
+          <p:nvPr/>
+        </p:nvSpPr>
+        <p:spPr>
+          <a:xfrm>
+            <a:off x="365760" y="4297680"/>
+            <a:ext cx="8412480" cy="502920"/>
           </a:xfrm>
           <a:prstGeom prst="roundRect">
             <a:avLst>
-              <a:gd name="adj" fmla="val 7500"/>
+              <a:gd name="adj" fmla="val 5455"/>
             </a:avLst>
           </a:prstGeom>
           <a:solidFill>
@@ -5419,14 +5545,14 @@
       </p:sp>
       <p:sp>
         <p:nvSpPr>
-          <p:cNvPr id="27" name="Text 25"/>
-          <p:cNvSpPr/>
-          <p:nvPr/>
-        </p:nvSpPr>
-        <p:spPr>
-          <a:xfrm>
-            <a:off x="502920" y="4572000"/>
-            <a:ext cx="8138160" cy="365760"/>
+          <p:cNvPr id="23" name="Text 21"/>
+          <p:cNvSpPr/>
+          <p:nvPr/>
+        </p:nvSpPr>
+        <p:spPr>
+          <a:xfrm>
+            <a:off x="502920" y="4297680"/>
+            <a:ext cx="8138160" cy="502920"/>
           </a:xfrm>
           <a:prstGeom prst="rect">
             <a:avLst/>
@@ -5453,7 +5579,7 @@
                 <a:ea typeface="Meiryo" pitchFamily="34" charset="-122"/>
                 <a:cs typeface="Meiryo" pitchFamily="34" charset="-120"/>
               </a:rPr>
-              <a:t>先行KPI（途中確認指標）：事前検証済みPBI件数　／　検証起因バックログ変更件数　／　ドッグフーディング実施回数</a:t>
+              <a:t>先行KPI（途中確認指標）：PBI仮説・計測指標記入率（全PBI分母の実施率ベース）　／　検証起因バックログ変更件数　／　ドッグフーディング実施回数</a:t>
             </a:r>
             <a:endParaRPr lang="en-US" sz="1200" dirty="0"/>
           </a:p>
@@ -5524,7 +5650,7 @@
                 <a:ea typeface="Meiryo" pitchFamily="34" charset="-122"/>
                 <a:cs typeface="Meiryo" pitchFamily="34" charset="-120"/>
               </a:rPr>
-              <a:t>DMチーム FY26 OKR  &gt;  基盤KR1／基盤KR3</a:t>
+              <a:t>DMチーム FY26 OKR  &gt;  基盤KR1 健全性＋開発環境</a:t>
             </a:r>
             <a:endParaRPr lang="en-US" sz="900" dirty="0"/>
           </a:p>
@@ -5614,7 +5740,7 @@
         <p:spPr>
           <a:xfrm>
             <a:off x="365760" y="384048"/>
-            <a:ext cx="8412480" cy="594360"/>
+            <a:ext cx="8412480" cy="384048"/>
           </a:xfrm>
           <a:prstGeom prst="rect">
             <a:avLst/>
@@ -5638,7 +5764,7 @@
                 <a:ea typeface="Meiryo" pitchFamily="34" charset="-122"/>
                 <a:cs typeface="Meiryo" pitchFamily="34" charset="-120"/>
               </a:rPr>
-              <a:t>健全性＋環境で持続性を担保し、事業貢献PDCAで外部妥当性を確認する</a:t>
+              <a:t>基盤KR1 健全性＋開発環境</a:t>
             </a:r>
             <a:endParaRPr lang="en-US" sz="1800" dirty="0"/>
           </a:p>
@@ -5646,13 +5772,52 @@
       </p:sp>
       <p:sp>
         <p:nvSpPr>
-          <p:cNvPr id="7" name="Shape 5"/>
-          <p:cNvSpPr/>
-          <p:nvPr/>
-        </p:nvSpPr>
-        <p:spPr>
-          <a:xfrm>
-            <a:off x="0" y="1051560"/>
+          <p:cNvPr id="7" name="Text 5"/>
+          <p:cNvSpPr/>
+          <p:nvPr/>
+        </p:nvSpPr>
+        <p:spPr>
+          <a:xfrm>
+            <a:off x="365760" y="749808"/>
+            <a:ext cx="8412480" cy="320040"/>
+          </a:xfrm>
+          <a:prstGeom prst="rect">
+            <a:avLst/>
+          </a:prstGeom>
+          <a:noFill/>
+          <a:ln/>
+        </p:spPr>
+        <p:txBody>
+          <a:bodyPr wrap="square" lIns="0" tIns="0" rIns="0" bIns="0" rtlCol="0" anchor="ctr"/>
+          <a:lstStyle/>
+          <a:p>
+            <a:pPr algn="l" indent="0" marL="0">
+              <a:buNone/>
+            </a:pPr>
+            <a:r>
+              <a:rPr lang="en-US" sz="1200" dirty="0">
+                <a:solidFill>
+                  <a:srgbClr val="444466"/>
+                </a:solidFill>
+                <a:latin typeface="Meiryo" pitchFamily="34" charset="0"/>
+                <a:ea typeface="Meiryo" pitchFamily="34" charset="-122"/>
+                <a:cs typeface="Meiryo" pitchFamily="34" charset="-120"/>
+              </a:rPr>
+              <a:t>─ 健全性・サブKPI・開発環境を整え、チームが走り続けられる土台を通年で担保する</a:t>
+            </a:r>
+            <a:endParaRPr lang="en-US" sz="1200" dirty="0"/>
+          </a:p>
+        </p:txBody>
+      </p:sp>
+      <p:sp>
+        <p:nvSpPr>
+          <p:cNvPr id="8" name="Shape 6"/>
+          <p:cNvSpPr/>
+          <p:nvPr/>
+        </p:nvSpPr>
+        <p:spPr>
+          <a:xfrm>
+            <a:off x="0" y="1115568"/>
             <a:ext cx="9144000" cy="9144"/>
           </a:xfrm>
           <a:prstGeom prst="rect">
@@ -5671,13 +5836,13 @@
       </p:sp>
       <p:sp>
         <p:nvSpPr>
-          <p:cNvPr id="8" name="Text 6"/>
-          <p:cNvSpPr/>
-          <p:nvPr/>
-        </p:nvSpPr>
-        <p:spPr>
-          <a:xfrm>
-            <a:off x="365760" y="1097280"/>
+          <p:cNvPr id="9" name="Text 7"/>
+          <p:cNvSpPr/>
+          <p:nvPr/>
+        </p:nvSpPr>
+        <p:spPr>
+          <a:xfrm>
+            <a:off x="365760" y="1170432"/>
             <a:ext cx="8412480" cy="274320"/>
           </a:xfrm>
           <a:prstGeom prst="rect">
@@ -5702,7 +5867,7 @@
                 <a:ea typeface="Meiryo" pitchFamily="34" charset="-122"/>
                 <a:cs typeface="Meiryo" pitchFamily="34" charset="-120"/>
               </a:rPr>
-              <a:t>だから、内向き（持続性）と外向き（事業側の信頼度）の両方を担保する</a:t>
+              <a:t>だから、速さの暴走を防ぐ安全装置（DORAサブKPI）＋走り続ける環境を通年で担保する</a:t>
             </a:r>
             <a:endParaRPr lang="en-US" sz="1200" dirty="0"/>
           </a:p>
@@ -5710,19 +5875,46 @@
       </p:sp>
       <p:sp>
         <p:nvSpPr>
-          <p:cNvPr id="9" name="Shape 7"/>
-          <p:cNvSpPr/>
-          <p:nvPr/>
-        </p:nvSpPr>
-        <p:spPr>
-          <a:xfrm>
-            <a:off x="365760" y="1508760"/>
-            <a:ext cx="4069080" cy="411480"/>
+          <p:cNvPr id="10" name="Shape 8"/>
+          <p:cNvSpPr/>
+          <p:nvPr/>
+        </p:nvSpPr>
+        <p:spPr>
+          <a:xfrm>
+            <a:off x="365760" y="1463040"/>
+            <a:ext cx="2682240" cy="2697480"/>
           </a:xfrm>
           <a:prstGeom prst="roundRect">
             <a:avLst>
-              <a:gd name="adj" fmla="val 6667"/>
+              <a:gd name="adj" fmla="val 1023"/>
             </a:avLst>
+          </a:prstGeom>
+          <a:solidFill>
+            <a:srgbClr val="EEF3FA"/>
+          </a:solidFill>
+          <a:ln/>
+          <a:effectLst>
+            <a:outerShdw sx="100000" sy="100000" kx="0" ky="0" algn="bl" rotWithShape="0" blurRad="50800" dist="25400" dir="8100000">
+              <a:srgbClr val="000000">
+                <a:alpha val="8000"/>
+              </a:srgbClr>
+            </a:outerShdw>
+          </a:effectLst>
+        </p:spPr>
+      </p:sp>
+      <p:sp>
+        <p:nvSpPr>
+          <p:cNvPr id="11" name="Shape 9"/>
+          <p:cNvSpPr/>
+          <p:nvPr/>
+        </p:nvSpPr>
+        <p:spPr>
+          <a:xfrm>
+            <a:off x="384048" y="1463040"/>
+            <a:ext cx="2645664" cy="54864"/>
+          </a:xfrm>
+          <a:prstGeom prst="rect">
+            <a:avLst/>
           </a:prstGeom>
           <a:solidFill>
             <a:srgbClr val="004098"/>
@@ -5732,14 +5924,662 @@
       </p:sp>
       <p:sp>
         <p:nvSpPr>
-          <p:cNvPr id="10" name="Text 8"/>
-          <p:cNvSpPr/>
-          <p:nvPr/>
-        </p:nvSpPr>
-        <p:spPr>
-          <a:xfrm>
-            <a:off x="365760" y="1508760"/>
-            <a:ext cx="4069080" cy="411480"/>
+          <p:cNvPr id="12" name="Text 10"/>
+          <p:cNvSpPr/>
+          <p:nvPr/>
+        </p:nvSpPr>
+        <p:spPr>
+          <a:xfrm>
+            <a:off x="502920" y="1600200"/>
+            <a:ext cx="2407920" cy="365760"/>
+          </a:xfrm>
+          <a:prstGeom prst="rect">
+            <a:avLst/>
+          </a:prstGeom>
+          <a:noFill/>
+          <a:ln/>
+        </p:spPr>
+        <p:txBody>
+          <a:bodyPr wrap="square" lIns="0" tIns="0" rIns="0" bIns="0" rtlCol="0" anchor="t"/>
+          <a:lstStyle/>
+          <a:p>
+            <a:pPr algn="l" indent="0" marL="0">
+              <a:buNone/>
+            </a:pPr>
+            <a:r>
+              <a:rPr lang="en-US" sz="1400" b="1" dirty="0">
+                <a:solidFill>
+                  <a:srgbClr val="004098"/>
+                </a:solidFill>
+                <a:latin typeface="Meiryo" pitchFamily="34" charset="0"/>
+                <a:ea typeface="Meiryo" pitchFamily="34" charset="-122"/>
+                <a:cs typeface="Meiryo" pitchFamily="34" charset="-120"/>
+              </a:rPr>
+              <a:t>狙い</a:t>
+            </a:r>
+            <a:endParaRPr lang="en-US" sz="1400" dirty="0"/>
+          </a:p>
+        </p:txBody>
+      </p:sp>
+      <p:sp>
+        <p:nvSpPr>
+          <p:cNvPr id="13" name="Text 11"/>
+          <p:cNvSpPr/>
+          <p:nvPr/>
+        </p:nvSpPr>
+        <p:spPr>
+          <a:xfrm>
+            <a:off x="502920" y="1965960"/>
+            <a:ext cx="2407920" cy="2057400"/>
+          </a:xfrm>
+          <a:prstGeom prst="rect">
+            <a:avLst/>
+          </a:prstGeom>
+          <a:noFill/>
+          <a:ln/>
+        </p:spPr>
+        <p:txBody>
+          <a:bodyPr wrap="square" lIns="0" tIns="0" rIns="0" bIns="0" rtlCol="0" anchor="t"/>
+          <a:lstStyle/>
+          <a:p>
+            <a:pPr algn="l" indent="0" marL="0">
+              <a:lnSpc>
+                <a:spcPct val="150000"/>
+              </a:lnSpc>
+              <a:buNone/>
+            </a:pPr>
+            <a:r>
+              <a:rPr lang="en-US" sz="1300" dirty="0">
+                <a:solidFill>
+                  <a:srgbClr val="1A1A2E"/>
+                </a:solidFill>
+                <a:latin typeface="Meiryo" pitchFamily="34" charset="0"/>
+                <a:ea typeface="Meiryo" pitchFamily="34" charset="-122"/>
+                <a:cs typeface="Meiryo" pitchFamily="34" charset="-120"/>
+              </a:rPr>
+              <a:t>挑戦KR1〜3が"速く届ける能力"を追うのに対し、基盤KR1はその能力を支える土台を扱う。持続可能に走り続けられる健全性と、働き方を成立させる開発環境（ITインフラ・ツール・オンボーディング）が対象。速さを追うあまりレビュー省略・属人化・恒常残業に陥らないための安全装置も兼ねる。</a:t>
+            </a:r>
+            <a:endParaRPr lang="en-US" sz="1300" dirty="0"/>
+          </a:p>
+        </p:txBody>
+      </p:sp>
+      <p:sp>
+        <p:nvSpPr>
+          <p:cNvPr id="14" name="Shape 12"/>
+          <p:cNvSpPr/>
+          <p:nvPr/>
+        </p:nvSpPr>
+        <p:spPr>
+          <a:xfrm>
+            <a:off x="3230880" y="1463040"/>
+            <a:ext cx="2682240" cy="2697480"/>
+          </a:xfrm>
+          <a:prstGeom prst="roundRect">
+            <a:avLst>
+              <a:gd name="adj" fmla="val 1023"/>
+            </a:avLst>
+          </a:prstGeom>
+          <a:solidFill>
+            <a:srgbClr val="EEF3FA"/>
+          </a:solidFill>
+          <a:ln/>
+          <a:effectLst>
+            <a:outerShdw sx="100000" sy="100000" kx="0" ky="0" algn="bl" rotWithShape="0" blurRad="50800" dist="25400" dir="8100000">
+              <a:srgbClr val="000000">
+                <a:alpha val="8000"/>
+              </a:srgbClr>
+            </a:outerShdw>
+          </a:effectLst>
+        </p:spPr>
+      </p:sp>
+      <p:sp>
+        <p:nvSpPr>
+          <p:cNvPr id="15" name="Shape 13"/>
+          <p:cNvSpPr/>
+          <p:nvPr/>
+        </p:nvSpPr>
+        <p:spPr>
+          <a:xfrm>
+            <a:off x="3249168" y="1463040"/>
+            <a:ext cx="2645664" cy="54864"/>
+          </a:xfrm>
+          <a:prstGeom prst="rect">
+            <a:avLst/>
+          </a:prstGeom>
+          <a:solidFill>
+            <a:srgbClr val="DC2626"/>
+          </a:solidFill>
+          <a:ln/>
+        </p:spPr>
+      </p:sp>
+      <p:sp>
+        <p:nvSpPr>
+          <p:cNvPr id="16" name="Text 14"/>
+          <p:cNvSpPr/>
+          <p:nvPr/>
+        </p:nvSpPr>
+        <p:spPr>
+          <a:xfrm>
+            <a:off x="3368040" y="1600200"/>
+            <a:ext cx="2407920" cy="365760"/>
+          </a:xfrm>
+          <a:prstGeom prst="rect">
+            <a:avLst/>
+          </a:prstGeom>
+          <a:noFill/>
+          <a:ln/>
+        </p:spPr>
+        <p:txBody>
+          <a:bodyPr wrap="square" lIns="0" tIns="0" rIns="0" bIns="0" rtlCol="0" anchor="t"/>
+          <a:lstStyle/>
+          <a:p>
+            <a:pPr algn="l" indent="0" marL="0">
+              <a:buNone/>
+            </a:pPr>
+            <a:r>
+              <a:rPr lang="en-US" sz="1400" b="1" dirty="0">
+                <a:solidFill>
+                  <a:srgbClr val="DC2626"/>
+                </a:solidFill>
+                <a:latin typeface="Meiryo" pitchFamily="34" charset="0"/>
+                <a:ea typeface="Meiryo" pitchFamily="34" charset="-122"/>
+                <a:cs typeface="Meiryo" pitchFamily="34" charset="-120"/>
+              </a:rPr>
+              <a:t>年度マイルストーン</a:t>
+            </a:r>
+            <a:endParaRPr lang="en-US" sz="1400" dirty="0"/>
+          </a:p>
+        </p:txBody>
+      </p:sp>
+      <p:sp>
+        <p:nvSpPr>
+          <p:cNvPr id="17" name="Text 15"/>
+          <p:cNvSpPr/>
+          <p:nvPr/>
+        </p:nvSpPr>
+        <p:spPr>
+          <a:xfrm>
+            <a:off x="3368040" y="1965960"/>
+            <a:ext cx="2407920" cy="2057400"/>
+          </a:xfrm>
+          <a:prstGeom prst="rect">
+            <a:avLst/>
+          </a:prstGeom>
+          <a:noFill/>
+          <a:ln/>
+        </p:spPr>
+        <p:txBody>
+          <a:bodyPr wrap="square" lIns="0" tIns="0" rIns="0" bIns="0" rtlCol="0" anchor="t"/>
+          <a:lstStyle/>
+          <a:p>
+            <a:pPr algn="l" indent="0" marL="0">
+              <a:lnSpc>
+                <a:spcPct val="150000"/>
+              </a:lnSpc>
+              <a:buNone/>
+            </a:pPr>
+            <a:r>
+              <a:rPr lang="en-US" sz="1300" dirty="0">
+                <a:solidFill>
+                  <a:srgbClr val="1A1A2E"/>
+                </a:solidFill>
+                <a:latin typeface="Meiryo" pitchFamily="34" charset="0"/>
+                <a:ea typeface="Meiryo" pitchFamily="34" charset="-122"/>
+                <a:cs typeface="Meiryo" pitchFamily="34" charset="-120"/>
+              </a:rPr>
+              <a:t>FY26末（通年維持）：</a:t>
+            </a:r>
+            <a:endParaRPr lang="en-US" sz="1300" dirty="0"/>
+          </a:p>
+          <a:p>
+            <a:pPr algn="l" indent="0" marL="0">
+              <a:lnSpc>
+                <a:spcPct val="150000"/>
+              </a:lnSpc>
+              <a:buNone/>
+            </a:pPr>
+            <a:r>
+              <a:rPr lang="en-US" sz="1300" dirty="0">
+                <a:solidFill>
+                  <a:srgbClr val="1A1A2E"/>
+                </a:solidFill>
+                <a:latin typeface="Meiryo" pitchFamily="34" charset="0"/>
+                <a:ea typeface="Meiryo" pitchFamily="34" charset="-122"/>
+                <a:cs typeface="Meiryo" pitchFamily="34" charset="-120"/>
+              </a:rPr>
+              <a:t>・変更失敗率 15%以下</a:t>
+            </a:r>
+            <a:endParaRPr lang="en-US" sz="1300" dirty="0"/>
+          </a:p>
+          <a:p>
+            <a:pPr algn="l" indent="0" marL="0">
+              <a:lnSpc>
+                <a:spcPct val="150000"/>
+              </a:lnSpc>
+              <a:buNone/>
+            </a:pPr>
+            <a:r>
+              <a:rPr lang="en-US" sz="1300" dirty="0">
+                <a:solidFill>
+                  <a:srgbClr val="1A1A2E"/>
+                </a:solidFill>
+                <a:latin typeface="Meiryo" pitchFamily="34" charset="0"/>
+                <a:ea typeface="Meiryo" pitchFamily="34" charset="-122"/>
+                <a:cs typeface="Meiryo" pitchFamily="34" charset="-120"/>
+              </a:rPr>
+              <a:t>　（リリースのうち障害・ロールバック・</a:t>
+            </a:r>
+            <a:endParaRPr lang="en-US" sz="1300" dirty="0"/>
+          </a:p>
+          <a:p>
+            <a:pPr algn="l" indent="0" marL="0">
+              <a:lnSpc>
+                <a:spcPct val="150000"/>
+              </a:lnSpc>
+              <a:buNone/>
+            </a:pPr>
+            <a:r>
+              <a:rPr lang="en-US" sz="1300" dirty="0">
+                <a:solidFill>
+                  <a:srgbClr val="1A1A2E"/>
+                </a:solidFill>
+                <a:latin typeface="Meiryo" pitchFamily="34" charset="0"/>
+                <a:ea typeface="Meiryo" pitchFamily="34" charset="-122"/>
+                <a:cs typeface="Meiryo" pitchFamily="34" charset="-120"/>
+              </a:rPr>
+              <a:t>　　緊急修正に至った割合）</a:t>
+            </a:r>
+            <a:endParaRPr lang="en-US" sz="1300" dirty="0"/>
+          </a:p>
+          <a:p>
+            <a:pPr algn="l" indent="0" marL="0">
+              <a:lnSpc>
+                <a:spcPct val="150000"/>
+              </a:lnSpc>
+              <a:buNone/>
+            </a:pPr>
+            <a:r>
+              <a:rPr lang="en-US" sz="1300" dirty="0">
+                <a:solidFill>
+                  <a:srgbClr val="1A1A2E"/>
+                </a:solidFill>
+                <a:latin typeface="Meiryo" pitchFamily="34" charset="0"/>
+                <a:ea typeface="Meiryo" pitchFamily="34" charset="-122"/>
+                <a:cs typeface="Meiryo" pitchFamily="34" charset="-120"/>
+              </a:rPr>
+              <a:t>・開発者満足度 SPACE軸 4.0以上</a:t>
+            </a:r>
+            <a:endParaRPr lang="en-US" sz="1300" dirty="0"/>
+          </a:p>
+          <a:p>
+            <a:pPr algn="l" indent="0" marL="0">
+              <a:lnSpc>
+                <a:spcPct val="150000"/>
+              </a:lnSpc>
+              <a:buNone/>
+            </a:pPr>
+            <a:r>
+              <a:rPr lang="en-US" sz="1300" dirty="0">
+                <a:solidFill>
+                  <a:srgbClr val="1A1A2E"/>
+                </a:solidFill>
+                <a:latin typeface="Meiryo" pitchFamily="34" charset="0"/>
+                <a:ea typeface="Meiryo" pitchFamily="34" charset="-122"/>
+                <a:cs typeface="Meiryo" pitchFamily="34" charset="-120"/>
+              </a:rPr>
+              <a:t>　（5段階、月次サーベイで維持）</a:t>
+            </a:r>
+            <a:endParaRPr lang="en-US" sz="1300" dirty="0"/>
+          </a:p>
+          <a:p>
+            <a:pPr algn="l" indent="0" marL="0">
+              <a:lnSpc>
+                <a:spcPct val="150000"/>
+              </a:lnSpc>
+              <a:buNone/>
+            </a:pPr>
+            <a:r>
+              <a:rPr lang="en-US" sz="1300" dirty="0">
+                <a:solidFill>
+                  <a:srgbClr val="1A1A2E"/>
+                </a:solidFill>
+                <a:latin typeface="Meiryo" pitchFamily="34" charset="0"/>
+                <a:ea typeface="Meiryo" pitchFamily="34" charset="-122"/>
+                <a:cs typeface="Meiryo" pitchFamily="34" charset="-120"/>
+              </a:rPr>
+              <a:t>・ITインフラ継続稼働</a:t>
+            </a:r>
+            <a:endParaRPr lang="en-US" sz="1300" dirty="0"/>
+          </a:p>
+          <a:p>
+            <a:pPr algn="l" indent="0" marL="0">
+              <a:lnSpc>
+                <a:spcPct val="150000"/>
+              </a:lnSpc>
+              <a:buNone/>
+            </a:pPr>
+            <a:r>
+              <a:rPr lang="en-US" sz="1300" dirty="0">
+                <a:solidFill>
+                  <a:srgbClr val="1A1A2E"/>
+                </a:solidFill>
+                <a:latin typeface="Meiryo" pitchFamily="34" charset="0"/>
+                <a:ea typeface="Meiryo" pitchFamily="34" charset="-122"/>
+                <a:cs typeface="Meiryo" pitchFamily="34" charset="-120"/>
+              </a:rPr>
+              <a:t>・開発ツール棚卸しの定常化</a:t>
+            </a:r>
+            <a:endParaRPr lang="en-US" sz="1300" dirty="0"/>
+          </a:p>
+        </p:txBody>
+      </p:sp>
+      <p:sp>
+        <p:nvSpPr>
+          <p:cNvPr id="18" name="Shape 16"/>
+          <p:cNvSpPr/>
+          <p:nvPr/>
+        </p:nvSpPr>
+        <p:spPr>
+          <a:xfrm>
+            <a:off x="6096000" y="1463040"/>
+            <a:ext cx="2682240" cy="2697480"/>
+          </a:xfrm>
+          <a:prstGeom prst="roundRect">
+            <a:avLst>
+              <a:gd name="adj" fmla="val 1023"/>
+            </a:avLst>
+          </a:prstGeom>
+          <a:solidFill>
+            <a:srgbClr val="EEF3FA"/>
+          </a:solidFill>
+          <a:ln/>
+          <a:effectLst>
+            <a:outerShdw sx="100000" sy="100000" kx="0" ky="0" algn="bl" rotWithShape="0" blurRad="50800" dist="25400" dir="8100000">
+              <a:srgbClr val="000000">
+                <a:alpha val="8000"/>
+              </a:srgbClr>
+            </a:outerShdw>
+          </a:effectLst>
+        </p:spPr>
+      </p:sp>
+      <p:sp>
+        <p:nvSpPr>
+          <p:cNvPr id="19" name="Shape 17"/>
+          <p:cNvSpPr/>
+          <p:nvPr/>
+        </p:nvSpPr>
+        <p:spPr>
+          <a:xfrm>
+            <a:off x="6114288" y="1463040"/>
+            <a:ext cx="2645664" cy="54864"/>
+          </a:xfrm>
+          <a:prstGeom prst="rect">
+            <a:avLst/>
+          </a:prstGeom>
+          <a:solidFill>
+            <a:srgbClr val="004098"/>
+          </a:solidFill>
+          <a:ln/>
+        </p:spPr>
+      </p:sp>
+      <p:sp>
+        <p:nvSpPr>
+          <p:cNvPr id="20" name="Text 18"/>
+          <p:cNvSpPr/>
+          <p:nvPr/>
+        </p:nvSpPr>
+        <p:spPr>
+          <a:xfrm>
+            <a:off x="6233160" y="1600200"/>
+            <a:ext cx="2407920" cy="365760"/>
+          </a:xfrm>
+          <a:prstGeom prst="rect">
+            <a:avLst/>
+          </a:prstGeom>
+          <a:noFill/>
+          <a:ln/>
+        </p:spPr>
+        <p:txBody>
+          <a:bodyPr wrap="square" lIns="0" tIns="0" rIns="0" bIns="0" rtlCol="0" anchor="t"/>
+          <a:lstStyle/>
+          <a:p>
+            <a:pPr algn="l" indent="0" marL="0">
+              <a:buNone/>
+            </a:pPr>
+            <a:r>
+              <a:rPr lang="en-US" sz="1400" b="1" dirty="0">
+                <a:solidFill>
+                  <a:srgbClr val="004098"/>
+                </a:solidFill>
+                <a:latin typeface="Meiryo" pitchFamily="34" charset="0"/>
+                <a:ea typeface="Meiryo" pitchFamily="34" charset="-122"/>
+                <a:cs typeface="Meiryo" pitchFamily="34" charset="-120"/>
+              </a:rPr>
+              <a:t>主要施策（FY26）</a:t>
+            </a:r>
+            <a:endParaRPr lang="en-US" sz="1400" dirty="0"/>
+          </a:p>
+        </p:txBody>
+      </p:sp>
+      <p:sp>
+        <p:nvSpPr>
+          <p:cNvPr id="21" name="Text 19"/>
+          <p:cNvSpPr/>
+          <p:nvPr/>
+        </p:nvSpPr>
+        <p:spPr>
+          <a:xfrm>
+            <a:off x="6233160" y="1965960"/>
+            <a:ext cx="2407920" cy="2057400"/>
+          </a:xfrm>
+          <a:prstGeom prst="rect">
+            <a:avLst/>
+          </a:prstGeom>
+          <a:noFill/>
+          <a:ln/>
+        </p:spPr>
+        <p:txBody>
+          <a:bodyPr wrap="square" lIns="0" tIns="0" rIns="0" bIns="0" rtlCol="0" anchor="t"/>
+          <a:lstStyle/>
+          <a:p>
+            <a:pPr algn="l" indent="0" marL="0">
+              <a:lnSpc>
+                <a:spcPct val="150000"/>
+              </a:lnSpc>
+              <a:buNone/>
+            </a:pPr>
+            <a:r>
+              <a:rPr lang="en-US" sz="1300" dirty="0">
+                <a:solidFill>
+                  <a:srgbClr val="1A1A2E"/>
+                </a:solidFill>
+                <a:latin typeface="Meiryo" pitchFamily="34" charset="0"/>
+                <a:ea typeface="Meiryo" pitchFamily="34" charset="-122"/>
+                <a:cs typeface="Meiryo" pitchFamily="34" charset="-120"/>
+              </a:rPr>
+              <a:t>・サブKPI計測基盤の整備</a:t>
+            </a:r>
+            <a:endParaRPr lang="en-US" sz="1300" dirty="0"/>
+          </a:p>
+          <a:p>
+            <a:pPr algn="l" indent="0" marL="0">
+              <a:lnSpc>
+                <a:spcPct val="150000"/>
+              </a:lnSpc>
+              <a:buNone/>
+            </a:pPr>
+            <a:r>
+              <a:rPr lang="en-US" sz="1300" dirty="0">
+                <a:solidFill>
+                  <a:srgbClr val="1A1A2E"/>
+                </a:solidFill>
+                <a:latin typeface="Meiryo" pitchFamily="34" charset="0"/>
+                <a:ea typeface="Meiryo" pitchFamily="34" charset="-122"/>
+                <a:cs typeface="Meiryo" pitchFamily="34" charset="-120"/>
+              </a:rPr>
+              <a:t>　変更失敗率の自動集計／</a:t>
+            </a:r>
+            <a:endParaRPr lang="en-US" sz="1300" dirty="0"/>
+          </a:p>
+          <a:p>
+            <a:pPr algn="l" indent="0" marL="0">
+              <a:lnSpc>
+                <a:spcPct val="150000"/>
+              </a:lnSpc>
+              <a:buNone/>
+            </a:pPr>
+            <a:r>
+              <a:rPr lang="en-US" sz="1300" dirty="0">
+                <a:solidFill>
+                  <a:srgbClr val="1A1A2E"/>
+                </a:solidFill>
+                <a:latin typeface="Meiryo" pitchFamily="34" charset="0"/>
+                <a:ea typeface="Meiryo" pitchFamily="34" charset="-122"/>
+                <a:cs typeface="Meiryo" pitchFamily="34" charset="-120"/>
+              </a:rPr>
+              <a:t>　開発者満足度SPACE軸の月次サーベイ運用</a:t>
+            </a:r>
+            <a:endParaRPr lang="en-US" sz="1300" dirty="0"/>
+          </a:p>
+          <a:p>
+            <a:pPr algn="l" indent="0" marL="0">
+              <a:lnSpc>
+                <a:spcPct val="150000"/>
+              </a:lnSpc>
+              <a:buNone/>
+            </a:pPr>
+            <a:r>
+              <a:rPr lang="en-US" sz="1300" dirty="0">
+                <a:solidFill>
+                  <a:srgbClr val="1A1A2E"/>
+                </a:solidFill>
+                <a:latin typeface="Meiryo" pitchFamily="34" charset="0"/>
+                <a:ea typeface="Meiryo" pitchFamily="34" charset="-122"/>
+                <a:cs typeface="Meiryo" pitchFamily="34" charset="-120"/>
+              </a:rPr>
+              <a:t>・月次1on1（負荷・モチベーション・キャリア）</a:t>
+            </a:r>
+            <a:endParaRPr lang="en-US" sz="1300" dirty="0"/>
+          </a:p>
+          <a:p>
+            <a:pPr algn="l" indent="0" marL="0">
+              <a:lnSpc>
+                <a:spcPct val="150000"/>
+              </a:lnSpc>
+              <a:buNone/>
+            </a:pPr>
+            <a:r>
+              <a:rPr lang="en-US" sz="1300" dirty="0">
+                <a:solidFill>
+                  <a:srgbClr val="1A1A2E"/>
+                </a:solidFill>
+                <a:latin typeface="Meiryo" pitchFamily="34" charset="0"/>
+                <a:ea typeface="Meiryo" pitchFamily="34" charset="-122"/>
+                <a:cs typeface="Meiryo" pitchFamily="34" charset="-120"/>
+              </a:rPr>
+              <a:t>・レトロ自己評価による健全性スコア記録</a:t>
+            </a:r>
+            <a:endParaRPr lang="en-US" sz="1300" dirty="0"/>
+          </a:p>
+          <a:p>
+            <a:pPr algn="l" indent="0" marL="0">
+              <a:lnSpc>
+                <a:spcPct val="150000"/>
+              </a:lnSpc>
+              <a:buNone/>
+            </a:pPr>
+            <a:r>
+              <a:rPr lang="en-US" sz="1300" dirty="0">
+                <a:solidFill>
+                  <a:srgbClr val="1A1A2E"/>
+                </a:solidFill>
+                <a:latin typeface="Meiryo" pitchFamily="34" charset="0"/>
+                <a:ea typeface="Meiryo" pitchFamily="34" charset="-122"/>
+                <a:cs typeface="Meiryo" pitchFamily="34" charset="-120"/>
+              </a:rPr>
+              <a:t>・AVD／EDRの可用性維持</a:t>
+            </a:r>
+            <a:endParaRPr lang="en-US" sz="1300" dirty="0"/>
+          </a:p>
+          <a:p>
+            <a:pPr algn="l" indent="0" marL="0">
+              <a:lnSpc>
+                <a:spcPct val="150000"/>
+              </a:lnSpc>
+              <a:buNone/>
+            </a:pPr>
+            <a:r>
+              <a:rPr lang="en-US" sz="1300" dirty="0">
+                <a:solidFill>
+                  <a:srgbClr val="1A1A2E"/>
+                </a:solidFill>
+                <a:latin typeface="Meiryo" pitchFamily="34" charset="0"/>
+                <a:ea typeface="Meiryo" pitchFamily="34" charset="-122"/>
+                <a:cs typeface="Meiryo" pitchFamily="34" charset="-120"/>
+              </a:rPr>
+              <a:t>・新規参画者オンボーディング</a:t>
+            </a:r>
+            <a:endParaRPr lang="en-US" sz="1300" dirty="0"/>
+          </a:p>
+          <a:p>
+            <a:pPr algn="l" indent="0" marL="0">
+              <a:lnSpc>
+                <a:spcPct val="150000"/>
+              </a:lnSpc>
+              <a:buNone/>
+            </a:pPr>
+            <a:r>
+              <a:rPr lang="en-US" sz="1300" dirty="0">
+                <a:solidFill>
+                  <a:srgbClr val="1A1A2E"/>
+                </a:solidFill>
+                <a:latin typeface="Meiryo" pitchFamily="34" charset="0"/>
+                <a:ea typeface="Meiryo" pitchFamily="34" charset="-122"/>
+                <a:cs typeface="Meiryo" pitchFamily="34" charset="-120"/>
+              </a:rPr>
+              <a:t>　（Duke ID／権限／立ち上げ支援）の標準化</a:t>
+            </a:r>
+            <a:endParaRPr lang="en-US" sz="1300" dirty="0"/>
+          </a:p>
+        </p:txBody>
+      </p:sp>
+      <p:sp>
+        <p:nvSpPr>
+          <p:cNvPr id="22" name="Shape 20"/>
+          <p:cNvSpPr/>
+          <p:nvPr/>
+        </p:nvSpPr>
+        <p:spPr>
+          <a:xfrm>
+            <a:off x="365760" y="4297680"/>
+            <a:ext cx="8412480" cy="502920"/>
+          </a:xfrm>
+          <a:prstGeom prst="roundRect">
+            <a:avLst>
+              <a:gd name="adj" fmla="val 5455"/>
+            </a:avLst>
+          </a:prstGeom>
+          <a:solidFill>
+            <a:srgbClr val="F0FDF4"/>
+          </a:solidFill>
+          <a:ln w="12700">
+            <a:solidFill>
+              <a:srgbClr val="059669"/>
+            </a:solidFill>
+            <a:prstDash val="solid"/>
+          </a:ln>
+        </p:spPr>
+      </p:sp>
+      <p:sp>
+        <p:nvSpPr>
+          <p:cNvPr id="23" name="Text 21"/>
+          <p:cNvSpPr/>
+          <p:nvPr/>
+        </p:nvSpPr>
+        <p:spPr>
+          <a:xfrm>
+            <a:off x="502920" y="4297680"/>
+            <a:ext cx="8138160" cy="502920"/>
           </a:xfrm>
           <a:prstGeom prst="rect">
             <a:avLst/>
@@ -5751,67 +6591,6 @@
           <a:bodyPr wrap="square" lIns="0" tIns="0" rIns="0" bIns="0" rtlCol="0" anchor="ctr"/>
           <a:lstStyle/>
           <a:p>
-            <a:pPr algn="ctr" indent="0" marL="0">
-              <a:buNone/>
-            </a:pPr>
-            <a:r>
-              <a:rPr lang="en-US" sz="1300" b="1" dirty="0">
-                <a:solidFill>
-                  <a:srgbClr val="FFFFFF"/>
-                </a:solidFill>
-                <a:latin typeface="Meiryo" pitchFamily="34" charset="0"/>
-                <a:ea typeface="Meiryo" pitchFamily="34" charset="-122"/>
-                <a:cs typeface="Meiryo" pitchFamily="34" charset="-120"/>
-              </a:rPr>
-              <a:t>基盤KR1 健全性＋開発環境</a:t>
-            </a:r>
-            <a:endParaRPr lang="en-US" sz="1300" dirty="0"/>
-          </a:p>
-        </p:txBody>
-      </p:sp>
-      <p:sp>
-        <p:nvSpPr>
-          <p:cNvPr id="11" name="Shape 9"/>
-          <p:cNvSpPr/>
-          <p:nvPr/>
-        </p:nvSpPr>
-        <p:spPr>
-          <a:xfrm>
-            <a:off x="365760" y="1965960"/>
-            <a:ext cx="4069080" cy="2880360"/>
-          </a:xfrm>
-          <a:prstGeom prst="roundRect">
-            <a:avLst>
-              <a:gd name="adj" fmla="val 952"/>
-            </a:avLst>
-          </a:prstGeom>
-          <a:solidFill>
-            <a:srgbClr val="EEF3FA"/>
-          </a:solidFill>
-          <a:ln/>
-        </p:spPr>
-      </p:sp>
-      <p:sp>
-        <p:nvSpPr>
-          <p:cNvPr id="12" name="Text 10"/>
-          <p:cNvSpPr/>
-          <p:nvPr/>
-        </p:nvSpPr>
-        <p:spPr>
-          <a:xfrm>
-            <a:off x="548640" y="2057400"/>
-            <a:ext cx="3703320" cy="2697480"/>
-          </a:xfrm>
-          <a:prstGeom prst="rect">
-            <a:avLst/>
-          </a:prstGeom>
-          <a:noFill/>
-          <a:ln/>
-        </p:spPr>
-        <p:txBody>
-          <a:bodyPr wrap="square" lIns="0" tIns="0" rIns="0" bIns="0" rtlCol="0" anchor="t"/>
-          <a:lstStyle/>
-          <a:p>
             <a:pPr algn="l" indent="0" marL="0">
               <a:lnSpc>
                 <a:spcPct val="140000"/>
@@ -5819,516 +6598,17 @@
               <a:buNone/>
             </a:pPr>
             <a:r>
-              <a:rPr lang="en-US" sz="1000" dirty="0">
-                <a:solidFill>
-                  <a:srgbClr val="1A1A2E"/>
-                </a:solidFill>
-                <a:latin typeface="Meiryo" pitchFamily="34" charset="0"/>
-                <a:ea typeface="Meiryo" pitchFamily="34" charset="-122"/>
-                <a:cs typeface="Meiryo" pitchFamily="34" charset="-120"/>
-              </a:rPr>
-              <a:t>─ 健全性・サブKPI・開発環境を整え、チームが走り続けられる土台を通年で担保する</a:t>
-            </a:r>
-            <a:endParaRPr lang="en-US" sz="1000" dirty="0"/>
-          </a:p>
-          <a:p>
-            <a:pPr algn="l" indent="0" marL="0">
-              <a:lnSpc>
-                <a:spcPct val="140000"/>
-              </a:lnSpc>
-              <a:buNone/>
-            </a:pPr>
-            <a:endParaRPr lang="en-US" sz="1000" dirty="0"/>
-          </a:p>
-          <a:p>
-            <a:pPr algn="l" indent="0" marL="0">
-              <a:lnSpc>
-                <a:spcPct val="140000"/>
-              </a:lnSpc>
-              <a:buNone/>
-            </a:pPr>
-            <a:r>
-              <a:rPr lang="en-US" sz="1000" dirty="0">
-                <a:solidFill>
-                  <a:srgbClr val="1A1A2E"/>
-                </a:solidFill>
-                <a:latin typeface="Meiryo" pitchFamily="34" charset="0"/>
-                <a:ea typeface="Meiryo" pitchFamily="34" charset="-122"/>
-                <a:cs typeface="Meiryo" pitchFamily="34" charset="-120"/>
-              </a:rPr>
-              <a:t>FY26末（通年維持）：</a:t>
-            </a:r>
-            <a:endParaRPr lang="en-US" sz="1000" dirty="0"/>
-          </a:p>
-          <a:p>
-            <a:pPr algn="l" indent="0" marL="0">
-              <a:lnSpc>
-                <a:spcPct val="140000"/>
-              </a:lnSpc>
-              <a:buNone/>
-            </a:pPr>
-            <a:r>
-              <a:rPr lang="en-US" sz="1000" dirty="0">
-                <a:solidFill>
-                  <a:srgbClr val="1A1A2E"/>
-                </a:solidFill>
-                <a:latin typeface="Meiryo" pitchFamily="34" charset="0"/>
-                <a:ea typeface="Meiryo" pitchFamily="34" charset="-122"/>
-                <a:cs typeface="Meiryo" pitchFamily="34" charset="-120"/>
-              </a:rPr>
-              <a:t>・変更失敗率 15%以下</a:t>
-            </a:r>
-            <a:endParaRPr lang="en-US" sz="1000" dirty="0"/>
-          </a:p>
-          <a:p>
-            <a:pPr algn="l" indent="0" marL="0">
-              <a:lnSpc>
-                <a:spcPct val="140000"/>
-              </a:lnSpc>
-              <a:buNone/>
-            </a:pPr>
-            <a:r>
-              <a:rPr lang="en-US" sz="1000" dirty="0">
-                <a:solidFill>
-                  <a:srgbClr val="1A1A2E"/>
-                </a:solidFill>
-                <a:latin typeface="Meiryo" pitchFamily="34" charset="0"/>
-                <a:ea typeface="Meiryo" pitchFamily="34" charset="-122"/>
-                <a:cs typeface="Meiryo" pitchFamily="34" charset="-120"/>
-              </a:rPr>
-              <a:t>・開発者満足度 SPACE軸 4.0以上（月次）</a:t>
-            </a:r>
-            <a:endParaRPr lang="en-US" sz="1000" dirty="0"/>
-          </a:p>
-          <a:p>
-            <a:pPr algn="l" indent="0" marL="0">
-              <a:lnSpc>
-                <a:spcPct val="140000"/>
-              </a:lnSpc>
-              <a:buNone/>
-            </a:pPr>
-            <a:r>
-              <a:rPr lang="en-US" sz="1000" dirty="0">
-                <a:solidFill>
-                  <a:srgbClr val="1A1A2E"/>
-                </a:solidFill>
-                <a:latin typeface="Meiryo" pitchFamily="34" charset="0"/>
-                <a:ea typeface="Meiryo" pitchFamily="34" charset="-122"/>
-                <a:cs typeface="Meiryo" pitchFamily="34" charset="-120"/>
-              </a:rPr>
-              <a:t>・ITインフラ継続稼働＋ツール棚卸し定常化</a:t>
-            </a:r>
-            <a:endParaRPr lang="en-US" sz="1000" dirty="0"/>
-          </a:p>
-          <a:p>
-            <a:pPr algn="l" indent="0" marL="0">
-              <a:lnSpc>
-                <a:spcPct val="140000"/>
-              </a:lnSpc>
-              <a:buNone/>
-            </a:pPr>
-            <a:endParaRPr lang="en-US" sz="1000" dirty="0"/>
-          </a:p>
-          <a:p>
-            <a:pPr algn="l" indent="0" marL="0">
-              <a:lnSpc>
-                <a:spcPct val="140000"/>
-              </a:lnSpc>
-              <a:buNone/>
-            </a:pPr>
-            <a:r>
-              <a:rPr lang="en-US" sz="1000" dirty="0">
-                <a:solidFill>
-                  <a:srgbClr val="1A1A2E"/>
-                </a:solidFill>
-                <a:latin typeface="Meiryo" pitchFamily="34" charset="0"/>
-                <a:ea typeface="Meiryo" pitchFamily="34" charset="-122"/>
-                <a:cs typeface="Meiryo" pitchFamily="34" charset="-120"/>
-              </a:rPr>
-              <a:t>主要施策：</a:t>
-            </a:r>
-            <a:endParaRPr lang="en-US" sz="1000" dirty="0"/>
-          </a:p>
-          <a:p>
-            <a:pPr algn="l" indent="0" marL="0">
-              <a:lnSpc>
-                <a:spcPct val="140000"/>
-              </a:lnSpc>
-              <a:buNone/>
-            </a:pPr>
-            <a:r>
-              <a:rPr lang="en-US" sz="1000" dirty="0">
-                <a:solidFill>
-                  <a:srgbClr val="1A1A2E"/>
-                </a:solidFill>
-                <a:latin typeface="Meiryo" pitchFamily="34" charset="0"/>
-                <a:ea typeface="Meiryo" pitchFamily="34" charset="-122"/>
-                <a:cs typeface="Meiryo" pitchFamily="34" charset="-120"/>
-              </a:rPr>
-              <a:t>・サブKPI計測基盤整備（変更失敗率自動集計／SPACE月次）</a:t>
-            </a:r>
-            <a:endParaRPr lang="en-US" sz="1000" dirty="0"/>
-          </a:p>
-          <a:p>
-            <a:pPr algn="l" indent="0" marL="0">
-              <a:lnSpc>
-                <a:spcPct val="140000"/>
-              </a:lnSpc>
-              <a:buNone/>
-            </a:pPr>
-            <a:r>
-              <a:rPr lang="en-US" sz="1000" dirty="0">
-                <a:solidFill>
-                  <a:srgbClr val="1A1A2E"/>
-                </a:solidFill>
-                <a:latin typeface="Meiryo" pitchFamily="34" charset="0"/>
-                <a:ea typeface="Meiryo" pitchFamily="34" charset="-122"/>
-                <a:cs typeface="Meiryo" pitchFamily="34" charset="-120"/>
-              </a:rPr>
-              <a:t>・月次1on1・健全性スコア・AVD/EDR運用</a:t>
-            </a:r>
-            <a:endParaRPr lang="en-US" sz="1000" dirty="0"/>
-          </a:p>
-          <a:p>
-            <a:pPr algn="l" indent="0" marL="0">
-              <a:lnSpc>
-                <a:spcPct val="140000"/>
-              </a:lnSpc>
-              <a:buNone/>
-            </a:pPr>
-            <a:endParaRPr lang="en-US" sz="1000" dirty="0"/>
-          </a:p>
-          <a:p>
-            <a:pPr algn="l" indent="0" marL="0">
-              <a:lnSpc>
-                <a:spcPct val="140000"/>
-              </a:lnSpc>
-              <a:buNone/>
-            </a:pPr>
-            <a:r>
-              <a:rPr lang="en-US" sz="1000" dirty="0">
-                <a:solidFill>
-                  <a:srgbClr val="1A1A2E"/>
-                </a:solidFill>
-                <a:latin typeface="Meiryo" pitchFamily="34" charset="0"/>
-                <a:ea typeface="Meiryo" pitchFamily="34" charset="-122"/>
-                <a:cs typeface="Meiryo" pitchFamily="34" charset="-120"/>
-              </a:rPr>
-              <a:t>先行KPI：月次1on1実施率／月次サーベイ回答率</a:t>
-            </a:r>
-            <a:endParaRPr lang="en-US" sz="1000" dirty="0"/>
-          </a:p>
-        </p:txBody>
-      </p:sp>
-      <p:sp>
-        <p:nvSpPr>
-          <p:cNvPr id="13" name="Shape 11"/>
-          <p:cNvSpPr/>
-          <p:nvPr/>
-        </p:nvSpPr>
-        <p:spPr>
-          <a:xfrm>
-            <a:off x="4709160" y="1508760"/>
-            <a:ext cx="4069080" cy="411480"/>
-          </a:xfrm>
-          <a:prstGeom prst="roundRect">
-            <a:avLst>
-              <a:gd name="adj" fmla="val 6667"/>
-            </a:avLst>
-          </a:prstGeom>
-          <a:solidFill>
-            <a:srgbClr val="004098"/>
-          </a:solidFill>
-          <a:ln/>
-        </p:spPr>
-      </p:sp>
-      <p:sp>
-        <p:nvSpPr>
-          <p:cNvPr id="14" name="Text 12"/>
-          <p:cNvSpPr/>
-          <p:nvPr/>
-        </p:nvSpPr>
-        <p:spPr>
-          <a:xfrm>
-            <a:off x="4709160" y="1508760"/>
-            <a:ext cx="4069080" cy="411480"/>
-          </a:xfrm>
-          <a:prstGeom prst="rect">
-            <a:avLst/>
-          </a:prstGeom>
-          <a:noFill/>
-          <a:ln/>
-        </p:spPr>
-        <p:txBody>
-          <a:bodyPr wrap="square" lIns="0" tIns="0" rIns="0" bIns="0" rtlCol="0" anchor="ctr"/>
-          <a:lstStyle/>
-          <a:p>
-            <a:pPr algn="ctr" indent="0" marL="0">
-              <a:buNone/>
-            </a:pPr>
-            <a:r>
-              <a:rPr lang="en-US" sz="1300" b="1" dirty="0">
-                <a:solidFill>
-                  <a:srgbClr val="FFFFFF"/>
-                </a:solidFill>
-                <a:latin typeface="Meiryo" pitchFamily="34" charset="0"/>
-                <a:ea typeface="Meiryo" pitchFamily="34" charset="-122"/>
-                <a:cs typeface="Meiryo" pitchFamily="34" charset="-120"/>
-              </a:rPr>
-              <a:t>基盤KR3 事業貢献PDCA</a:t>
-            </a:r>
-            <a:endParaRPr lang="en-US" sz="1300" dirty="0"/>
-          </a:p>
-        </p:txBody>
-      </p:sp>
-      <p:sp>
-        <p:nvSpPr>
-          <p:cNvPr id="15" name="Shape 13"/>
-          <p:cNvSpPr/>
-          <p:nvPr/>
-        </p:nvSpPr>
-        <p:spPr>
-          <a:xfrm>
-            <a:off x="4709160" y="1965960"/>
-            <a:ext cx="4069080" cy="2880360"/>
-          </a:xfrm>
-          <a:prstGeom prst="roundRect">
-            <a:avLst>
-              <a:gd name="adj" fmla="val 952"/>
-            </a:avLst>
-          </a:prstGeom>
-          <a:solidFill>
-            <a:srgbClr val="EEF3FA"/>
-          </a:solidFill>
-          <a:ln/>
-        </p:spPr>
-      </p:sp>
-      <p:sp>
-        <p:nvSpPr>
-          <p:cNvPr id="16" name="Text 14"/>
-          <p:cNvSpPr/>
-          <p:nvPr/>
-        </p:nvSpPr>
-        <p:spPr>
-          <a:xfrm>
-            <a:off x="4892040" y="2057400"/>
-            <a:ext cx="3703320" cy="2697480"/>
-          </a:xfrm>
-          <a:prstGeom prst="rect">
-            <a:avLst/>
-          </a:prstGeom>
-          <a:noFill/>
-          <a:ln/>
-        </p:spPr>
-        <p:txBody>
-          <a:bodyPr wrap="square" lIns="0" tIns="0" rIns="0" bIns="0" rtlCol="0" anchor="t"/>
-          <a:lstStyle/>
-          <a:p>
-            <a:pPr algn="l" indent="0" marL="0">
-              <a:lnSpc>
-                <a:spcPct val="140000"/>
-              </a:lnSpc>
-              <a:buNone/>
-            </a:pPr>
-            <a:r>
-              <a:rPr lang="en-US" sz="1000" dirty="0">
-                <a:solidFill>
-                  <a:srgbClr val="1A1A2E"/>
-                </a:solidFill>
-                <a:latin typeface="Meiryo" pitchFamily="34" charset="0"/>
-                <a:ea typeface="Meiryo" pitchFamily="34" charset="-122"/>
-                <a:cs typeface="Meiryo" pitchFamily="34" charset="-120"/>
-              </a:rPr>
-              <a:t>─ 事業側との四半期相互検証で、配置メンバーの事業貢献に相互納得を形成し外部妥当性を担保する</a:t>
-            </a:r>
-            <a:endParaRPr lang="en-US" sz="1000" dirty="0"/>
-          </a:p>
-          <a:p>
-            <a:pPr algn="l" indent="0" marL="0">
-              <a:lnSpc>
-                <a:spcPct val="140000"/>
-              </a:lnSpc>
-              <a:buNone/>
-            </a:pPr>
-            <a:endParaRPr lang="en-US" sz="1000" dirty="0"/>
-          </a:p>
-          <a:p>
-            <a:pPr algn="l" indent="0" marL="0">
-              <a:lnSpc>
-                <a:spcPct val="140000"/>
-              </a:lnSpc>
-              <a:buNone/>
-            </a:pPr>
-            <a:r>
-              <a:rPr lang="en-US" sz="1000" dirty="0">
-                <a:solidFill>
-                  <a:srgbClr val="1A1A2E"/>
-                </a:solidFill>
-                <a:latin typeface="Meiryo" pitchFamily="34" charset="0"/>
-                <a:ea typeface="Meiryo" pitchFamily="34" charset="-122"/>
-                <a:cs typeface="Meiryo" pitchFamily="34" charset="-120"/>
-              </a:rPr>
-              <a:t>責任構造：</a:t>
-            </a:r>
-            <a:endParaRPr lang="en-US" sz="1000" dirty="0"/>
-          </a:p>
-          <a:p>
-            <a:pPr algn="l" indent="0" marL="0">
-              <a:lnSpc>
-                <a:spcPct val="140000"/>
-              </a:lnSpc>
-              <a:buNone/>
-            </a:pPr>
-            <a:r>
-              <a:rPr lang="en-US" sz="1000" dirty="0">
-                <a:solidFill>
-                  <a:srgbClr val="1A1A2E"/>
-                </a:solidFill>
-                <a:latin typeface="Meiryo" pitchFamily="34" charset="0"/>
-                <a:ea typeface="Meiryo" pitchFamily="34" charset="-122"/>
-                <a:cs typeface="Meiryo" pitchFamily="34" charset="-120"/>
-              </a:rPr>
-              <a:t>・3者共同責任（片山TL・檜垣TL・杉崎TL）</a:t>
-            </a:r>
-            <a:endParaRPr lang="en-US" sz="1000" dirty="0"/>
-          </a:p>
-          <a:p>
-            <a:pPr algn="l" indent="0" marL="0">
-              <a:lnSpc>
-                <a:spcPct val="140000"/>
-              </a:lnSpc>
-              <a:buNone/>
-            </a:pPr>
-            <a:r>
-              <a:rPr lang="en-US" sz="1000" dirty="0">
-                <a:solidFill>
-                  <a:srgbClr val="1A1A2E"/>
-                </a:solidFill>
-                <a:latin typeface="Meiryo" pitchFamily="34" charset="0"/>
-                <a:ea typeface="Meiryo" pitchFamily="34" charset="-122"/>
-                <a:cs typeface="Meiryo" pitchFamily="34" charset="-120"/>
-              </a:rPr>
-              <a:t>・FY26 Q1中に詳細KPI整合確定（DPG KR⑦直接受け）</a:t>
-            </a:r>
-            <a:endParaRPr lang="en-US" sz="1000" dirty="0"/>
-          </a:p>
-          <a:p>
-            <a:pPr algn="l" indent="0" marL="0">
-              <a:lnSpc>
-                <a:spcPct val="140000"/>
-              </a:lnSpc>
-              <a:buNone/>
-            </a:pPr>
-            <a:endParaRPr lang="en-US" sz="1000" dirty="0"/>
-          </a:p>
-          <a:p>
-            <a:pPr algn="l" indent="0" marL="0">
-              <a:lnSpc>
-                <a:spcPct val="140000"/>
-              </a:lnSpc>
-              <a:buNone/>
-            </a:pPr>
-            <a:r>
-              <a:rPr lang="en-US" sz="1000" dirty="0">
-                <a:solidFill>
-                  <a:srgbClr val="1A1A2E"/>
-                </a:solidFill>
-                <a:latin typeface="Meiryo" pitchFamily="34" charset="0"/>
-                <a:ea typeface="Meiryo" pitchFamily="34" charset="-122"/>
-                <a:cs typeface="Meiryo" pitchFamily="34" charset="-120"/>
-              </a:rPr>
-              <a:t>主要施策：</a:t>
-            </a:r>
-            <a:endParaRPr lang="en-US" sz="1000" dirty="0"/>
-          </a:p>
-          <a:p>
-            <a:pPr algn="l" indent="0" marL="0">
-              <a:lnSpc>
-                <a:spcPct val="140000"/>
-              </a:lnSpc>
-              <a:buNone/>
-            </a:pPr>
-            <a:r>
-              <a:rPr lang="en-US" sz="1000" dirty="0">
-                <a:solidFill>
-                  <a:srgbClr val="1A1A2E"/>
-                </a:solidFill>
-                <a:latin typeface="Meiryo" pitchFamily="34" charset="0"/>
-                <a:ea typeface="Meiryo" pitchFamily="34" charset="-122"/>
-                <a:cs typeface="Meiryo" pitchFamily="34" charset="-120"/>
-              </a:rPr>
-              <a:t>・1Q・2Q・3Q末に事業側（toC各部）へアンケート／面談</a:t>
-            </a:r>
-            <a:endParaRPr lang="en-US" sz="1000" dirty="0"/>
-          </a:p>
-          <a:p>
-            <a:pPr algn="l" indent="0" marL="0">
-              <a:lnSpc>
-                <a:spcPct val="140000"/>
-              </a:lnSpc>
-              <a:buNone/>
-            </a:pPr>
-            <a:r>
-              <a:rPr lang="en-US" sz="1000" dirty="0">
-                <a:solidFill>
-                  <a:srgbClr val="1A1A2E"/>
-                </a:solidFill>
-                <a:latin typeface="Meiryo" pitchFamily="34" charset="0"/>
-                <a:ea typeface="Meiryo" pitchFamily="34" charset="-122"/>
-                <a:cs typeface="Meiryo" pitchFamily="34" charset="-120"/>
-              </a:rPr>
-              <a:t>・振り返りと次Qアクション策定</a:t>
-            </a:r>
-            <a:endParaRPr lang="en-US" sz="1000" dirty="0"/>
-          </a:p>
-          <a:p>
-            <a:pPr algn="l" indent="0" marL="0">
-              <a:lnSpc>
-                <a:spcPct val="140000"/>
-              </a:lnSpc>
-              <a:buNone/>
-            </a:pPr>
-            <a:r>
-              <a:rPr lang="en-US" sz="1000" dirty="0">
-                <a:solidFill>
-                  <a:srgbClr val="1A1A2E"/>
-                </a:solidFill>
-                <a:latin typeface="Meiryo" pitchFamily="34" charset="0"/>
-                <a:ea typeface="Meiryo" pitchFamily="34" charset="-122"/>
-                <a:cs typeface="Meiryo" pitchFamily="34" charset="-120"/>
-              </a:rPr>
-              <a:t>・配置メンバーの事業貢献状況を四半期で可視化</a:t>
-            </a:r>
-            <a:endParaRPr lang="en-US" sz="1000" dirty="0"/>
-          </a:p>
-          <a:p>
-            <a:pPr algn="l" indent="0" marL="0">
-              <a:lnSpc>
-                <a:spcPct val="140000"/>
-              </a:lnSpc>
-              <a:buNone/>
-            </a:pPr>
-            <a:endParaRPr lang="en-US" sz="1000" dirty="0"/>
-          </a:p>
-          <a:p>
-            <a:pPr algn="l" indent="0" marL="0">
-              <a:lnSpc>
-                <a:spcPct val="140000"/>
-              </a:lnSpc>
-              <a:buNone/>
-            </a:pPr>
-            <a:r>
-              <a:rPr lang="en-US" sz="1000" dirty="0">
-                <a:solidFill>
-                  <a:srgbClr val="1A1A2E"/>
-                </a:solidFill>
-                <a:latin typeface="Meiryo" pitchFamily="34" charset="0"/>
-                <a:ea typeface="Meiryo" pitchFamily="34" charset="-122"/>
-                <a:cs typeface="Meiryo" pitchFamily="34" charset="-120"/>
-              </a:rPr>
-              <a:t>先行KPI：四半期振り返り実施率／アンケート・面談カバー率</a:t>
-            </a:r>
-            <a:endParaRPr lang="en-US" sz="1000" dirty="0"/>
+              <a:rPr lang="en-US" sz="1200" dirty="0">
+                <a:solidFill>
+                  <a:srgbClr val="065F46"/>
+                </a:solidFill>
+                <a:latin typeface="Meiryo" pitchFamily="34" charset="0"/>
+                <a:ea typeface="Meiryo" pitchFamily="34" charset="-122"/>
+                <a:cs typeface="Meiryo" pitchFamily="34" charset="-120"/>
+              </a:rPr>
+              <a:t>先行KPI（途中確認指標）：月次1on1実施率（全メンバー／対象期間内）　／　月次サーベイ回答率</a:t>
+            </a:r>
+            <a:endParaRPr lang="en-US" sz="1200" dirty="0"/>
           </a:p>
         </p:txBody>
       </p:sp>
@@ -6614,7 +6894,7 @@
                 <a:ea typeface="Meiryo" pitchFamily="34" charset="-122"/>
                 <a:cs typeface="Meiryo" pitchFamily="34" charset="-120"/>
               </a:rPr>
-              <a:t>だから、FY27以降に息切れしない組織能力をFY26末に作る</a:t>
+              <a:t>だから、FY27以降に息切れしない組織能力を、プロセス・人・基盤の3層でFY26末に作る</a:t>
             </a:r>
             <a:endParaRPr lang="en-US" sz="1200" dirty="0"/>
           </a:p>
@@ -6629,19 +6909,669 @@
         <p:spPr>
           <a:xfrm>
             <a:off x="365760" y="1463040"/>
-            <a:ext cx="2682240" cy="2103120"/>
+            <a:ext cx="2682240" cy="2697480"/>
           </a:xfrm>
           <a:prstGeom prst="roundRect">
             <a:avLst>
-              <a:gd name="adj" fmla="val 1304"/>
+              <a:gd name="adj" fmla="val 1023"/>
             </a:avLst>
           </a:prstGeom>
           <a:solidFill>
             <a:srgbClr val="EEF3FA"/>
           </a:solidFill>
-          <a:ln w="19050">
+          <a:ln/>
+          <a:effectLst>
+            <a:outerShdw sx="100000" sy="100000" kx="0" ky="0" algn="bl" rotWithShape="0" blurRad="50800" dist="25400" dir="8100000">
+              <a:srgbClr val="000000">
+                <a:alpha val="8000"/>
+              </a:srgbClr>
+            </a:outerShdw>
+          </a:effectLst>
+        </p:spPr>
+      </p:sp>
+      <p:sp>
+        <p:nvSpPr>
+          <p:cNvPr id="11" name="Shape 9"/>
+          <p:cNvSpPr/>
+          <p:nvPr/>
+        </p:nvSpPr>
+        <p:spPr>
+          <a:xfrm>
+            <a:off x="384048" y="1463040"/>
+            <a:ext cx="2645664" cy="54864"/>
+          </a:xfrm>
+          <a:prstGeom prst="rect">
+            <a:avLst/>
+          </a:prstGeom>
+          <a:solidFill>
+            <a:srgbClr val="004098"/>
+          </a:solidFill>
+          <a:ln/>
+        </p:spPr>
+      </p:sp>
+      <p:sp>
+        <p:nvSpPr>
+          <p:cNvPr id="12" name="Text 10"/>
+          <p:cNvSpPr/>
+          <p:nvPr/>
+        </p:nvSpPr>
+        <p:spPr>
+          <a:xfrm>
+            <a:off x="502920" y="1600200"/>
+            <a:ext cx="2407920" cy="365760"/>
+          </a:xfrm>
+          <a:prstGeom prst="rect">
+            <a:avLst/>
+          </a:prstGeom>
+          <a:noFill/>
+          <a:ln/>
+        </p:spPr>
+        <p:txBody>
+          <a:bodyPr wrap="square" lIns="0" tIns="0" rIns="0" bIns="0" rtlCol="0" anchor="t"/>
+          <a:lstStyle/>
+          <a:p>
+            <a:pPr algn="l" indent="0" marL="0">
+              <a:buNone/>
+            </a:pPr>
+            <a:r>
+              <a:rPr lang="en-US" sz="1400" b="1" dirty="0">
+                <a:solidFill>
+                  <a:srgbClr val="004098"/>
+                </a:solidFill>
+                <a:latin typeface="Meiryo" pitchFamily="34" charset="0"/>
+                <a:ea typeface="Meiryo" pitchFamily="34" charset="-122"/>
+                <a:cs typeface="Meiryo" pitchFamily="34" charset="-120"/>
+              </a:rPr>
+              <a:t>狙い</a:t>
+            </a:r>
+            <a:endParaRPr lang="en-US" sz="1400" dirty="0"/>
+          </a:p>
+        </p:txBody>
+      </p:sp>
+      <p:sp>
+        <p:nvSpPr>
+          <p:cNvPr id="13" name="Text 11"/>
+          <p:cNvSpPr/>
+          <p:nvPr/>
+        </p:nvSpPr>
+        <p:spPr>
+          <a:xfrm>
+            <a:off x="502920" y="1965960"/>
+            <a:ext cx="2407920" cy="2057400"/>
+          </a:xfrm>
+          <a:prstGeom prst="rect">
+            <a:avLst/>
+          </a:prstGeom>
+          <a:noFill/>
+          <a:ln/>
+        </p:spPr>
+        <p:txBody>
+          <a:bodyPr wrap="square" lIns="0" tIns="0" rIns="0" bIns="0" rtlCol="0" anchor="t"/>
+          <a:lstStyle/>
+          <a:p>
+            <a:pPr algn="l" indent="0" marL="0">
+              <a:lnSpc>
+                <a:spcPct val="150000"/>
+              </a:lnSpc>
+              <a:buNone/>
+            </a:pPr>
+            <a:r>
+              <a:rPr lang="en-US" sz="1300" dirty="0">
+                <a:solidFill>
+                  <a:srgbClr val="1A1A2E"/>
+                </a:solidFill>
+                <a:latin typeface="Meiryo" pitchFamily="34" charset="0"/>
+                <a:ea typeface="Meiryo" pitchFamily="34" charset="-122"/>
+                <a:cs typeface="Meiryo" pitchFamily="34" charset="-120"/>
+              </a:rPr>
+              <a:t>単年度の運用効率化ではなく、中長期的にデリバリー組織そのものを強くするKR。ベテランの暗黙知依存から抜け出し、FY27〜28にDORA Highレベル到達できる組織状態をFY26末時点で作る。</a:t>
+            </a:r>
+            <a:endParaRPr lang="en-US" sz="1300" dirty="0"/>
+          </a:p>
+        </p:txBody>
+      </p:sp>
+      <p:sp>
+        <p:nvSpPr>
+          <p:cNvPr id="14" name="Shape 12"/>
+          <p:cNvSpPr/>
+          <p:nvPr/>
+        </p:nvSpPr>
+        <p:spPr>
+          <a:xfrm>
+            <a:off x="3230880" y="1463040"/>
+            <a:ext cx="2682240" cy="2697480"/>
+          </a:xfrm>
+          <a:prstGeom prst="roundRect">
+            <a:avLst>
+              <a:gd name="adj" fmla="val 1023"/>
+            </a:avLst>
+          </a:prstGeom>
+          <a:solidFill>
+            <a:srgbClr val="EEF3FA"/>
+          </a:solidFill>
+          <a:ln/>
+          <a:effectLst>
+            <a:outerShdw sx="100000" sy="100000" kx="0" ky="0" algn="bl" rotWithShape="0" blurRad="50800" dist="25400" dir="8100000">
+              <a:srgbClr val="000000">
+                <a:alpha val="8000"/>
+              </a:srgbClr>
+            </a:outerShdw>
+          </a:effectLst>
+        </p:spPr>
+      </p:sp>
+      <p:sp>
+        <p:nvSpPr>
+          <p:cNvPr id="15" name="Shape 13"/>
+          <p:cNvSpPr/>
+          <p:nvPr/>
+        </p:nvSpPr>
+        <p:spPr>
+          <a:xfrm>
+            <a:off x="3249168" y="1463040"/>
+            <a:ext cx="2645664" cy="54864"/>
+          </a:xfrm>
+          <a:prstGeom prst="rect">
+            <a:avLst/>
+          </a:prstGeom>
+          <a:solidFill>
+            <a:srgbClr val="DC2626"/>
+          </a:solidFill>
+          <a:ln/>
+        </p:spPr>
+      </p:sp>
+      <p:sp>
+        <p:nvSpPr>
+          <p:cNvPr id="16" name="Text 14"/>
+          <p:cNvSpPr/>
+          <p:nvPr/>
+        </p:nvSpPr>
+        <p:spPr>
+          <a:xfrm>
+            <a:off x="3368040" y="1600200"/>
+            <a:ext cx="2407920" cy="365760"/>
+          </a:xfrm>
+          <a:prstGeom prst="rect">
+            <a:avLst/>
+          </a:prstGeom>
+          <a:noFill/>
+          <a:ln/>
+        </p:spPr>
+        <p:txBody>
+          <a:bodyPr wrap="square" lIns="0" tIns="0" rIns="0" bIns="0" rtlCol="0" anchor="t"/>
+          <a:lstStyle/>
+          <a:p>
+            <a:pPr algn="l" indent="0" marL="0">
+              <a:buNone/>
+            </a:pPr>
+            <a:r>
+              <a:rPr lang="en-US" sz="1400" b="1" dirty="0">
+                <a:solidFill>
+                  <a:srgbClr val="DC2626"/>
+                </a:solidFill>
+                <a:latin typeface="Meiryo" pitchFamily="34" charset="0"/>
+                <a:ea typeface="Meiryo" pitchFamily="34" charset="-122"/>
+                <a:cs typeface="Meiryo" pitchFamily="34" charset="-120"/>
+              </a:rPr>
+              <a:t>年度マイルストーン</a:t>
+            </a:r>
+            <a:endParaRPr lang="en-US" sz="1400" dirty="0"/>
+          </a:p>
+        </p:txBody>
+      </p:sp>
+      <p:sp>
+        <p:nvSpPr>
+          <p:cNvPr id="17" name="Text 15"/>
+          <p:cNvSpPr/>
+          <p:nvPr/>
+        </p:nvSpPr>
+        <p:spPr>
+          <a:xfrm>
+            <a:off x="3368040" y="1965960"/>
+            <a:ext cx="2407920" cy="2057400"/>
+          </a:xfrm>
+          <a:prstGeom prst="rect">
+            <a:avLst/>
+          </a:prstGeom>
+          <a:noFill/>
+          <a:ln/>
+        </p:spPr>
+        <p:txBody>
+          <a:bodyPr wrap="square" lIns="0" tIns="0" rIns="0" bIns="0" rtlCol="0" anchor="t"/>
+          <a:lstStyle/>
+          <a:p>
+            <a:pPr algn="l" indent="0" marL="0">
+              <a:lnSpc>
+                <a:spcPct val="150000"/>
+              </a:lnSpc>
+              <a:buNone/>
+            </a:pPr>
+            <a:r>
+              <a:rPr lang="en-US" sz="1300" dirty="0">
+                <a:solidFill>
+                  <a:srgbClr val="1A1A2E"/>
+                </a:solidFill>
+                <a:latin typeface="Meiryo" pitchFamily="34" charset="0"/>
+                <a:ea typeface="Meiryo" pitchFamily="34" charset="-122"/>
+                <a:cs typeface="Meiryo" pitchFamily="34" charset="-120"/>
+              </a:rPr>
+              <a:t>FY26末：</a:t>
+            </a:r>
+            <a:endParaRPr lang="en-US" sz="1300" dirty="0"/>
+          </a:p>
+          <a:p>
+            <a:pPr algn="l" indent="0" marL="0">
+              <a:lnSpc>
+                <a:spcPct val="150000"/>
+              </a:lnSpc>
+              <a:buNone/>
+            </a:pPr>
+            <a:r>
+              <a:rPr lang="en-US" sz="1300" dirty="0">
+                <a:solidFill>
+                  <a:srgbClr val="1A1A2E"/>
+                </a:solidFill>
+                <a:latin typeface="Meiryo" pitchFamily="34" charset="0"/>
+                <a:ea typeface="Meiryo" pitchFamily="34" charset="-122"/>
+                <a:cs typeface="Meiryo" pitchFamily="34" charset="-120"/>
+              </a:rPr>
+              <a:t>・プロセス標準化が全チーム適用</a:t>
+            </a:r>
+            <a:endParaRPr lang="en-US" sz="1300" dirty="0"/>
+          </a:p>
+          <a:p>
+            <a:pPr algn="l" indent="0" marL="0">
+              <a:lnSpc>
+                <a:spcPct val="150000"/>
+              </a:lnSpc>
+              <a:buNone/>
+            </a:pPr>
+            <a:r>
+              <a:rPr lang="en-US" sz="1300" dirty="0">
+                <a:solidFill>
+                  <a:srgbClr val="1A1A2E"/>
+                </a:solidFill>
+                <a:latin typeface="Meiryo" pitchFamily="34" charset="0"/>
+                <a:ea typeface="Meiryo" pitchFamily="34" charset="-122"/>
+                <a:cs typeface="Meiryo" pitchFamily="34" charset="-120"/>
+              </a:rPr>
+              <a:t>・計測基盤が全チーム稼働</a:t>
+            </a:r>
+            <a:endParaRPr lang="en-US" sz="1300" dirty="0"/>
+          </a:p>
+          <a:p>
+            <a:pPr algn="l" indent="0" marL="0">
+              <a:lnSpc>
+                <a:spcPct val="150000"/>
+              </a:lnSpc>
+              <a:buNone/>
+            </a:pPr>
+            <a:r>
+              <a:rPr lang="en-US" sz="1300" dirty="0">
+                <a:solidFill>
+                  <a:srgbClr val="1A1A2E"/>
+                </a:solidFill>
+                <a:latin typeface="Meiryo" pitchFamily="34" charset="0"/>
+                <a:ea typeface="Meiryo" pitchFamily="34" charset="-122"/>
+                <a:cs typeface="Meiryo" pitchFamily="34" charset="-120"/>
+              </a:rPr>
+              <a:t>　（DPG KR②アプローチ①達成）</a:t>
+            </a:r>
+            <a:endParaRPr lang="en-US" sz="1300" dirty="0"/>
+          </a:p>
+          <a:p>
+            <a:pPr algn="l" indent="0" marL="0">
+              <a:lnSpc>
+                <a:spcPct val="150000"/>
+              </a:lnSpc>
+              <a:buNone/>
+            </a:pPr>
+            <a:r>
+              <a:rPr lang="en-US" sz="1300" dirty="0">
+                <a:solidFill>
+                  <a:srgbClr val="1A1A2E"/>
+                </a:solidFill>
+                <a:latin typeface="Meiryo" pitchFamily="34" charset="0"/>
+                <a:ea typeface="Meiryo" pitchFamily="34" charset="-122"/>
+                <a:cs typeface="Meiryo" pitchFamily="34" charset="-120"/>
+              </a:rPr>
+              <a:t>・inet費用削減見立て完了</a:t>
+            </a:r>
+            <a:endParaRPr lang="en-US" sz="1300" dirty="0"/>
+          </a:p>
+          <a:p>
+            <a:pPr algn="l" indent="0" marL="0">
+              <a:lnSpc>
+                <a:spcPct val="150000"/>
+              </a:lnSpc>
+              <a:buNone/>
+            </a:pPr>
+            <a:r>
+              <a:rPr lang="en-US" sz="1300" dirty="0">
+                <a:solidFill>
+                  <a:srgbClr val="1A1A2E"/>
+                </a:solidFill>
+                <a:latin typeface="Meiryo" pitchFamily="34" charset="0"/>
+                <a:ea typeface="Meiryo" pitchFamily="34" charset="-122"/>
+                <a:cs typeface="Meiryo" pitchFamily="34" charset="-120"/>
+              </a:rPr>
+              <a:t>　（DPG KR⑥貢献）</a:t>
+            </a:r>
+            <a:endParaRPr lang="en-US" sz="1300" dirty="0"/>
+          </a:p>
+          <a:p>
+            <a:pPr algn="l" indent="0" marL="0">
+              <a:lnSpc>
+                <a:spcPct val="150000"/>
+              </a:lnSpc>
+              <a:buNone/>
+            </a:pPr>
+            <a:r>
+              <a:rPr lang="en-US" sz="1300" dirty="0">
+                <a:solidFill>
+                  <a:srgbClr val="1A1A2E"/>
+                </a:solidFill>
+                <a:latin typeface="Meiryo" pitchFamily="34" charset="0"/>
+                <a:ea typeface="Meiryo" pitchFamily="34" charset="-122"/>
+                <a:cs typeface="Meiryo" pitchFamily="34" charset="-120"/>
+              </a:rPr>
+              <a:t>・KARTE→Braze機能可否判断完了</a:t>
+            </a:r>
+            <a:endParaRPr lang="en-US" sz="1300" dirty="0"/>
+          </a:p>
+          <a:p>
+            <a:pPr algn="l" indent="0" marL="0">
+              <a:lnSpc>
+                <a:spcPct val="150000"/>
+              </a:lnSpc>
+              <a:buNone/>
+            </a:pPr>
+            <a:r>
+              <a:rPr lang="en-US" sz="1300" dirty="0">
+                <a:solidFill>
+                  <a:srgbClr val="1A1A2E"/>
+                </a:solidFill>
+                <a:latin typeface="Meiryo" pitchFamily="34" charset="0"/>
+                <a:ea typeface="Meiryo" pitchFamily="34" charset="-122"/>
+                <a:cs typeface="Meiryo" pitchFamily="34" charset="-120"/>
+              </a:rPr>
+              <a:t>・デリバリーマネージャー（DM）採用完了</a:t>
+            </a:r>
+            <a:endParaRPr lang="en-US" sz="1300" dirty="0"/>
+          </a:p>
+        </p:txBody>
+      </p:sp>
+      <p:sp>
+        <p:nvSpPr>
+          <p:cNvPr id="18" name="Shape 16"/>
+          <p:cNvSpPr/>
+          <p:nvPr/>
+        </p:nvSpPr>
+        <p:spPr>
+          <a:xfrm>
+            <a:off x="6096000" y="1463040"/>
+            <a:ext cx="2682240" cy="2697480"/>
+          </a:xfrm>
+          <a:prstGeom prst="roundRect">
+            <a:avLst>
+              <a:gd name="adj" fmla="val 1023"/>
+            </a:avLst>
+          </a:prstGeom>
+          <a:solidFill>
+            <a:srgbClr val="EEF3FA"/>
+          </a:solidFill>
+          <a:ln/>
+          <a:effectLst>
+            <a:outerShdw sx="100000" sy="100000" kx="0" ky="0" algn="bl" rotWithShape="0" blurRad="50800" dist="25400" dir="8100000">
+              <a:srgbClr val="000000">
+                <a:alpha val="8000"/>
+              </a:srgbClr>
+            </a:outerShdw>
+          </a:effectLst>
+        </p:spPr>
+      </p:sp>
+      <p:sp>
+        <p:nvSpPr>
+          <p:cNvPr id="19" name="Shape 17"/>
+          <p:cNvSpPr/>
+          <p:nvPr/>
+        </p:nvSpPr>
+        <p:spPr>
+          <a:xfrm>
+            <a:off x="6114288" y="1463040"/>
+            <a:ext cx="2645664" cy="54864"/>
+          </a:xfrm>
+          <a:prstGeom prst="rect">
+            <a:avLst/>
+          </a:prstGeom>
+          <a:solidFill>
+            <a:srgbClr val="004098"/>
+          </a:solidFill>
+          <a:ln/>
+        </p:spPr>
+      </p:sp>
+      <p:sp>
+        <p:nvSpPr>
+          <p:cNvPr id="20" name="Text 18"/>
+          <p:cNvSpPr/>
+          <p:nvPr/>
+        </p:nvSpPr>
+        <p:spPr>
+          <a:xfrm>
+            <a:off x="6233160" y="1600200"/>
+            <a:ext cx="2407920" cy="365760"/>
+          </a:xfrm>
+          <a:prstGeom prst="rect">
+            <a:avLst/>
+          </a:prstGeom>
+          <a:noFill/>
+          <a:ln/>
+        </p:spPr>
+        <p:txBody>
+          <a:bodyPr wrap="square" lIns="0" tIns="0" rIns="0" bIns="0" rtlCol="0" anchor="t"/>
+          <a:lstStyle/>
+          <a:p>
+            <a:pPr algn="l" indent="0" marL="0">
+              <a:buNone/>
+            </a:pPr>
+            <a:r>
+              <a:rPr lang="en-US" sz="1400" b="1" dirty="0">
+                <a:solidFill>
+                  <a:srgbClr val="004098"/>
+                </a:solidFill>
+                <a:latin typeface="Meiryo" pitchFamily="34" charset="0"/>
+                <a:ea typeface="Meiryo" pitchFamily="34" charset="-122"/>
+                <a:cs typeface="Meiryo" pitchFamily="34" charset="-120"/>
+              </a:rPr>
+              <a:t>主要施策（FY26）</a:t>
+            </a:r>
+            <a:endParaRPr lang="en-US" sz="1400" dirty="0"/>
+          </a:p>
+        </p:txBody>
+      </p:sp>
+      <p:sp>
+        <p:nvSpPr>
+          <p:cNvPr id="21" name="Text 19"/>
+          <p:cNvSpPr/>
+          <p:nvPr/>
+        </p:nvSpPr>
+        <p:spPr>
+          <a:xfrm>
+            <a:off x="6233160" y="1965960"/>
+            <a:ext cx="2407920" cy="2057400"/>
+          </a:xfrm>
+          <a:prstGeom prst="rect">
+            <a:avLst/>
+          </a:prstGeom>
+          <a:noFill/>
+          <a:ln/>
+        </p:spPr>
+        <p:txBody>
+          <a:bodyPr wrap="square" lIns="0" tIns="0" rIns="0" bIns="0" rtlCol="0" anchor="t"/>
+          <a:lstStyle/>
+          <a:p>
+            <a:pPr algn="l" indent="0" marL="0">
+              <a:lnSpc>
+                <a:spcPct val="150000"/>
+              </a:lnSpc>
+              <a:buNone/>
+            </a:pPr>
+            <a:r>
+              <a:rPr lang="en-US" sz="1300" dirty="0">
+                <a:solidFill>
+                  <a:srgbClr val="1A1A2E"/>
+                </a:solidFill>
+                <a:latin typeface="Meiryo" pitchFamily="34" charset="0"/>
+                <a:ea typeface="Meiryo" pitchFamily="34" charset="-122"/>
+                <a:cs typeface="Meiryo" pitchFamily="34" charset="-120"/>
+              </a:rPr>
+              <a:t>・プロセス標準化の全チーム適用</a:t>
+            </a:r>
+            <a:endParaRPr lang="en-US" sz="1300" dirty="0"/>
+          </a:p>
+          <a:p>
+            <a:pPr algn="l" indent="0" marL="0">
+              <a:lnSpc>
+                <a:spcPct val="150000"/>
+              </a:lnSpc>
+              <a:buNone/>
+            </a:pPr>
+            <a:r>
+              <a:rPr lang="en-US" sz="1300" dirty="0">
+                <a:solidFill>
+                  <a:srgbClr val="1A1A2E"/>
+                </a:solidFill>
+                <a:latin typeface="Meiryo" pitchFamily="34" charset="0"/>
+                <a:ea typeface="Meiryo" pitchFamily="34" charset="-122"/>
+                <a:cs typeface="Meiryo" pitchFamily="34" charset="-120"/>
+              </a:rPr>
+              <a:t>　（ふりかえり質向上・スクラム型化・Ready定義）</a:t>
+            </a:r>
+            <a:endParaRPr lang="en-US" sz="1300" dirty="0"/>
+          </a:p>
+          <a:p>
+            <a:pPr algn="l" indent="0" marL="0">
+              <a:lnSpc>
+                <a:spcPct val="150000"/>
+              </a:lnSpc>
+              <a:buNone/>
+            </a:pPr>
+            <a:r>
+              <a:rPr lang="en-US" sz="1300" dirty="0">
+                <a:solidFill>
+                  <a:srgbClr val="1A1A2E"/>
+                </a:solidFill>
+                <a:latin typeface="Meiryo" pitchFamily="34" charset="0"/>
+                <a:ea typeface="Meiryo" pitchFamily="34" charset="-122"/>
+                <a:cs typeface="Meiryo" pitchFamily="34" charset="-120"/>
+              </a:rPr>
+              <a:t>・計測基盤の整備（Q1完了目標）</a:t>
+            </a:r>
+            <a:endParaRPr lang="en-US" sz="1300" dirty="0"/>
+          </a:p>
+          <a:p>
+            <a:pPr algn="l" indent="0" marL="0">
+              <a:lnSpc>
+                <a:spcPct val="150000"/>
+              </a:lnSpc>
+              <a:buNone/>
+            </a:pPr>
+            <a:r>
+              <a:rPr lang="en-US" sz="1300" dirty="0">
+                <a:solidFill>
+                  <a:srgbClr val="1A1A2E"/>
+                </a:solidFill>
+                <a:latin typeface="Meiryo" pitchFamily="34" charset="0"/>
+                <a:ea typeface="Meiryo" pitchFamily="34" charset="-122"/>
+                <a:cs typeface="Meiryo" pitchFamily="34" charset="-120"/>
+              </a:rPr>
+              <a:t>　Notion→Github計測ログ→ベースライン計測</a:t>
+            </a:r>
+            <a:endParaRPr lang="en-US" sz="1300" dirty="0"/>
+          </a:p>
+          <a:p>
+            <a:pPr algn="l" indent="0" marL="0">
+              <a:lnSpc>
+                <a:spcPct val="150000"/>
+              </a:lnSpc>
+              <a:buNone/>
+            </a:pPr>
+            <a:r>
+              <a:rPr lang="en-US" sz="1300" dirty="0">
+                <a:solidFill>
+                  <a:srgbClr val="1A1A2E"/>
+                </a:solidFill>
+                <a:latin typeface="Meiryo" pitchFamily="34" charset="0"/>
+                <a:ea typeface="Meiryo" pitchFamily="34" charset="-122"/>
+                <a:cs typeface="Meiryo" pitchFamily="34" charset="-120"/>
+              </a:rPr>
+              <a:t>・inet発注最適化で費用削減見立て（DPG KR⑥）</a:t>
+            </a:r>
+            <a:endParaRPr lang="en-US" sz="1300" dirty="0"/>
+          </a:p>
+          <a:p>
+            <a:pPr algn="l" indent="0" marL="0">
+              <a:lnSpc>
+                <a:spcPct val="150000"/>
+              </a:lnSpc>
+              <a:buNone/>
+            </a:pPr>
+            <a:r>
+              <a:rPr lang="en-US" sz="1300" dirty="0">
+                <a:solidFill>
+                  <a:srgbClr val="1A1A2E"/>
+                </a:solidFill>
+                <a:latin typeface="Meiryo" pitchFamily="34" charset="0"/>
+                <a:ea typeface="Meiryo" pitchFamily="34" charset="-122"/>
+                <a:cs typeface="Meiryo" pitchFamily="34" charset="-120"/>
+              </a:rPr>
+              <a:t>・KARTE→Braze機能可否検証</a:t>
+            </a:r>
+            <a:endParaRPr lang="en-US" sz="1300" dirty="0"/>
+          </a:p>
+          <a:p>
+            <a:pPr algn="l" indent="0" marL="0">
+              <a:lnSpc>
+                <a:spcPct val="150000"/>
+              </a:lnSpc>
+              <a:buNone/>
+            </a:pPr>
+            <a:r>
+              <a:rPr lang="en-US" sz="1300" dirty="0">
+                <a:solidFill>
+                  <a:srgbClr val="1A1A2E"/>
+                </a:solidFill>
+                <a:latin typeface="Meiryo" pitchFamily="34" charset="0"/>
+                <a:ea typeface="Meiryo" pitchFamily="34" charset="-122"/>
+                <a:cs typeface="Meiryo" pitchFamily="34" charset="-120"/>
+              </a:rPr>
+              <a:t>・DM採用完了（人面の専任担い手確立）</a:t>
+            </a:r>
+            <a:endParaRPr lang="en-US" sz="1300" dirty="0"/>
+          </a:p>
+        </p:txBody>
+      </p:sp>
+      <p:sp>
+        <p:nvSpPr>
+          <p:cNvPr id="22" name="Shape 20"/>
+          <p:cNvSpPr/>
+          <p:nvPr/>
+        </p:nvSpPr>
+        <p:spPr>
+          <a:xfrm>
+            <a:off x="365760" y="4297680"/>
+            <a:ext cx="8412480" cy="502920"/>
+          </a:xfrm>
+          <a:prstGeom prst="roundRect">
+            <a:avLst>
+              <a:gd name="adj" fmla="val 5455"/>
+            </a:avLst>
+          </a:prstGeom>
+          <a:solidFill>
+            <a:srgbClr val="F0FDF4"/>
+          </a:solidFill>
+          <a:ln w="12700">
             <a:solidFill>
-              <a:srgbClr val="004098"/>
+              <a:srgbClr val="059669"/>
             </a:solidFill>
             <a:prstDash val="solid"/>
           </a:ln>
@@ -6649,398 +7579,14 @@
       </p:sp>
       <p:sp>
         <p:nvSpPr>
-          <p:cNvPr id="11" name="Shape 9"/>
-          <p:cNvSpPr/>
-          <p:nvPr/>
-        </p:nvSpPr>
-        <p:spPr>
-          <a:xfrm>
-            <a:off x="384048" y="1463040"/>
-            <a:ext cx="2645664" cy="54864"/>
-          </a:xfrm>
-          <a:prstGeom prst="rect">
-            <a:avLst/>
-          </a:prstGeom>
-          <a:solidFill>
-            <a:srgbClr val="004098"/>
-          </a:solidFill>
-          <a:ln/>
-        </p:spPr>
-      </p:sp>
-      <p:sp>
-        <p:nvSpPr>
-          <p:cNvPr id="12" name="Text 10"/>
-          <p:cNvSpPr/>
-          <p:nvPr/>
-        </p:nvSpPr>
-        <p:spPr>
-          <a:xfrm>
-            <a:off x="502920" y="1600200"/>
-            <a:ext cx="2407920" cy="365760"/>
-          </a:xfrm>
-          <a:prstGeom prst="rect">
-            <a:avLst/>
-          </a:prstGeom>
-          <a:noFill/>
-          <a:ln/>
-        </p:spPr>
-        <p:txBody>
-          <a:bodyPr wrap="square" lIns="0" tIns="0" rIns="0" bIns="0" rtlCol="0" anchor="t"/>
-          <a:lstStyle/>
-          <a:p>
-            <a:pPr algn="l" indent="0" marL="0">
-              <a:buNone/>
-            </a:pPr>
-            <a:r>
-              <a:rPr lang="en-US" sz="1600" b="1" dirty="0">
-                <a:solidFill>
-                  <a:srgbClr val="004098"/>
-                </a:solidFill>
-                <a:latin typeface="Meiryo" pitchFamily="34" charset="0"/>
-                <a:ea typeface="Meiryo" pitchFamily="34" charset="-122"/>
-                <a:cs typeface="Meiryo" pitchFamily="34" charset="-120"/>
-              </a:rPr>
-              <a:t>①  プロセス</a:t>
-            </a:r>
-            <a:endParaRPr lang="en-US" sz="1600" dirty="0"/>
-          </a:p>
-        </p:txBody>
-      </p:sp>
-      <p:sp>
-        <p:nvSpPr>
-          <p:cNvPr id="13" name="Text 11"/>
-          <p:cNvSpPr/>
-          <p:nvPr/>
-        </p:nvSpPr>
-        <p:spPr>
-          <a:xfrm>
-            <a:off x="502920" y="2011680"/>
-            <a:ext cx="2407920" cy="1463040"/>
-          </a:xfrm>
-          <a:prstGeom prst="rect">
-            <a:avLst/>
-          </a:prstGeom>
-          <a:noFill/>
-          <a:ln/>
-        </p:spPr>
-        <p:txBody>
-          <a:bodyPr wrap="square" lIns="0" tIns="0" rIns="0" bIns="0" rtlCol="0" anchor="t"/>
-          <a:lstStyle/>
-          <a:p>
-            <a:pPr algn="l" indent="0" marL="0">
-              <a:lnSpc>
-                <a:spcPct val="150000"/>
-              </a:lnSpc>
-              <a:buNone/>
-            </a:pPr>
-            <a:r>
-              <a:rPr lang="en-US" sz="1200" dirty="0">
-                <a:solidFill>
-                  <a:srgbClr val="1A1A2E"/>
-                </a:solidFill>
-                <a:latin typeface="Meiryo" pitchFamily="34" charset="0"/>
-                <a:ea typeface="Meiryo" pitchFamily="34" charset="-122"/>
-                <a:cs typeface="Meiryo" pitchFamily="34" charset="-120"/>
-              </a:rPr>
-              <a:t>ふりかえり質向上／スクラム型化／Ready定義運用を全チーム適用。ベテラン暗黙知を言語化。</a:t>
-            </a:r>
-            <a:endParaRPr lang="en-US" sz="1200" dirty="0"/>
-          </a:p>
-        </p:txBody>
-      </p:sp>
-      <p:sp>
-        <p:nvSpPr>
-          <p:cNvPr id="14" name="Shape 12"/>
-          <p:cNvSpPr/>
-          <p:nvPr/>
-        </p:nvSpPr>
-        <p:spPr>
-          <a:xfrm>
-            <a:off x="3230880" y="1463040"/>
-            <a:ext cx="2682240" cy="2103120"/>
-          </a:xfrm>
-          <a:prstGeom prst="roundRect">
-            <a:avLst>
-              <a:gd name="adj" fmla="val 1304"/>
-            </a:avLst>
-          </a:prstGeom>
-          <a:solidFill>
-            <a:srgbClr val="EEF3FA"/>
-          </a:solidFill>
-          <a:ln w="19050">
-            <a:solidFill>
-              <a:srgbClr val="004098"/>
-            </a:solidFill>
-            <a:prstDash val="solid"/>
-          </a:ln>
-        </p:spPr>
-      </p:sp>
-      <p:sp>
-        <p:nvSpPr>
-          <p:cNvPr id="15" name="Shape 13"/>
-          <p:cNvSpPr/>
-          <p:nvPr/>
-        </p:nvSpPr>
-        <p:spPr>
-          <a:xfrm>
-            <a:off x="3249168" y="1463040"/>
-            <a:ext cx="2645664" cy="54864"/>
-          </a:xfrm>
-          <a:prstGeom prst="rect">
-            <a:avLst/>
-          </a:prstGeom>
-          <a:solidFill>
-            <a:srgbClr val="004098"/>
-          </a:solidFill>
-          <a:ln/>
-        </p:spPr>
-      </p:sp>
-      <p:sp>
-        <p:nvSpPr>
-          <p:cNvPr id="16" name="Text 14"/>
-          <p:cNvSpPr/>
-          <p:nvPr/>
-        </p:nvSpPr>
-        <p:spPr>
-          <a:xfrm>
-            <a:off x="3368040" y="1600200"/>
-            <a:ext cx="2407920" cy="365760"/>
-          </a:xfrm>
-          <a:prstGeom prst="rect">
-            <a:avLst/>
-          </a:prstGeom>
-          <a:noFill/>
-          <a:ln/>
-        </p:spPr>
-        <p:txBody>
-          <a:bodyPr wrap="square" lIns="0" tIns="0" rIns="0" bIns="0" rtlCol="0" anchor="t"/>
-          <a:lstStyle/>
-          <a:p>
-            <a:pPr algn="l" indent="0" marL="0">
-              <a:buNone/>
-            </a:pPr>
-            <a:r>
-              <a:rPr lang="en-US" sz="1600" b="1" dirty="0">
-                <a:solidFill>
-                  <a:srgbClr val="004098"/>
-                </a:solidFill>
-                <a:latin typeface="Meiryo" pitchFamily="34" charset="0"/>
-                <a:ea typeface="Meiryo" pitchFamily="34" charset="-122"/>
-                <a:cs typeface="Meiryo" pitchFamily="34" charset="-120"/>
-              </a:rPr>
-              <a:t>②  人</a:t>
-            </a:r>
-            <a:endParaRPr lang="en-US" sz="1600" dirty="0"/>
-          </a:p>
-        </p:txBody>
-      </p:sp>
-      <p:sp>
-        <p:nvSpPr>
-          <p:cNvPr id="17" name="Text 15"/>
-          <p:cNvSpPr/>
-          <p:nvPr/>
-        </p:nvSpPr>
-        <p:spPr>
-          <a:xfrm>
-            <a:off x="3368040" y="2011680"/>
-            <a:ext cx="2407920" cy="1463040"/>
-          </a:xfrm>
-          <a:prstGeom prst="rect">
-            <a:avLst/>
-          </a:prstGeom>
-          <a:noFill/>
-          <a:ln/>
-        </p:spPr>
-        <p:txBody>
-          <a:bodyPr wrap="square" lIns="0" tIns="0" rIns="0" bIns="0" rtlCol="0" anchor="t"/>
-          <a:lstStyle/>
-          <a:p>
-            <a:pPr algn="l" indent="0" marL="0">
-              <a:lnSpc>
-                <a:spcPct val="150000"/>
-              </a:lnSpc>
-              <a:buNone/>
-            </a:pPr>
-            <a:r>
-              <a:rPr lang="en-US" sz="1200" dirty="0">
-                <a:solidFill>
-                  <a:srgbClr val="1A1A2E"/>
-                </a:solidFill>
-                <a:latin typeface="Meiryo" pitchFamily="34" charset="0"/>
-                <a:ea typeface="Meiryo" pitchFamily="34" charset="-122"/>
-                <a:cs typeface="Meiryo" pitchFamily="34" charset="-120"/>
-              </a:rPr>
-              <a:t>デリバリーマネージャー採用完了＋次世代リーダー（SM／PO候補）育成。1on1・キャリア設計の専任化。</a:t>
-            </a:r>
-            <a:endParaRPr lang="en-US" sz="1200" dirty="0"/>
-          </a:p>
-        </p:txBody>
-      </p:sp>
-      <p:sp>
-        <p:nvSpPr>
-          <p:cNvPr id="18" name="Shape 16"/>
-          <p:cNvSpPr/>
-          <p:nvPr/>
-        </p:nvSpPr>
-        <p:spPr>
-          <a:xfrm>
-            <a:off x="6096000" y="1463040"/>
-            <a:ext cx="2682240" cy="2103120"/>
-          </a:xfrm>
-          <a:prstGeom prst="roundRect">
-            <a:avLst>
-              <a:gd name="adj" fmla="val 1304"/>
-            </a:avLst>
-          </a:prstGeom>
-          <a:solidFill>
-            <a:srgbClr val="EEF3FA"/>
-          </a:solidFill>
-          <a:ln w="19050">
-            <a:solidFill>
-              <a:srgbClr val="004098"/>
-            </a:solidFill>
-            <a:prstDash val="solid"/>
-          </a:ln>
-        </p:spPr>
-      </p:sp>
-      <p:sp>
-        <p:nvSpPr>
-          <p:cNvPr id="19" name="Shape 17"/>
-          <p:cNvSpPr/>
-          <p:nvPr/>
-        </p:nvSpPr>
-        <p:spPr>
-          <a:xfrm>
-            <a:off x="6114288" y="1463040"/>
-            <a:ext cx="2645664" cy="54864"/>
-          </a:xfrm>
-          <a:prstGeom prst="rect">
-            <a:avLst/>
-          </a:prstGeom>
-          <a:solidFill>
-            <a:srgbClr val="004098"/>
-          </a:solidFill>
-          <a:ln/>
-        </p:spPr>
-      </p:sp>
-      <p:sp>
-        <p:nvSpPr>
-          <p:cNvPr id="20" name="Text 18"/>
-          <p:cNvSpPr/>
-          <p:nvPr/>
-        </p:nvSpPr>
-        <p:spPr>
-          <a:xfrm>
-            <a:off x="6233160" y="1600200"/>
-            <a:ext cx="2407920" cy="365760"/>
-          </a:xfrm>
-          <a:prstGeom prst="rect">
-            <a:avLst/>
-          </a:prstGeom>
-          <a:noFill/>
-          <a:ln/>
-        </p:spPr>
-        <p:txBody>
-          <a:bodyPr wrap="square" lIns="0" tIns="0" rIns="0" bIns="0" rtlCol="0" anchor="t"/>
-          <a:lstStyle/>
-          <a:p>
-            <a:pPr algn="l" indent="0" marL="0">
-              <a:buNone/>
-            </a:pPr>
-            <a:r>
-              <a:rPr lang="en-US" sz="1600" b="1" dirty="0">
-                <a:solidFill>
-                  <a:srgbClr val="004098"/>
-                </a:solidFill>
-                <a:latin typeface="Meiryo" pitchFamily="34" charset="0"/>
-                <a:ea typeface="Meiryo" pitchFamily="34" charset="-122"/>
-                <a:cs typeface="Meiryo" pitchFamily="34" charset="-120"/>
-              </a:rPr>
-              <a:t>③  基盤</a:t>
-            </a:r>
-            <a:endParaRPr lang="en-US" sz="1600" dirty="0"/>
-          </a:p>
-        </p:txBody>
-      </p:sp>
-      <p:sp>
-        <p:nvSpPr>
-          <p:cNvPr id="21" name="Text 19"/>
-          <p:cNvSpPr/>
-          <p:nvPr/>
-        </p:nvSpPr>
-        <p:spPr>
-          <a:xfrm>
-            <a:off x="6233160" y="2011680"/>
-            <a:ext cx="2407920" cy="1463040"/>
-          </a:xfrm>
-          <a:prstGeom prst="rect">
-            <a:avLst/>
-          </a:prstGeom>
-          <a:noFill/>
-          <a:ln/>
-        </p:spPr>
-        <p:txBody>
-          <a:bodyPr wrap="square" lIns="0" tIns="0" rIns="0" bIns="0" rtlCol="0" anchor="t"/>
-          <a:lstStyle/>
-          <a:p>
-            <a:pPr algn="l" indent="0" marL="0">
-              <a:lnSpc>
-                <a:spcPct val="150000"/>
-              </a:lnSpc>
-              <a:buNone/>
-            </a:pPr>
-            <a:r>
-              <a:rPr lang="en-US" sz="1200" dirty="0">
-                <a:solidFill>
-                  <a:srgbClr val="1A1A2E"/>
-                </a:solidFill>
-                <a:latin typeface="Meiryo" pitchFamily="34" charset="0"/>
-                <a:ea typeface="Meiryo" pitchFamily="34" charset="-122"/>
-                <a:cs typeface="Meiryo" pitchFamily="34" charset="-120"/>
-              </a:rPr>
-              <a:t>計測基盤全チーム稼働（DPG KR②アプローチ①）／inet発注最適化で費用削減見立て（DPG KR⑥）／KARTE→Braze可否判断完了。</a:t>
-            </a:r>
-            <a:endParaRPr lang="en-US" sz="1200" dirty="0"/>
-          </a:p>
-        </p:txBody>
-      </p:sp>
-      <p:sp>
-        <p:nvSpPr>
-          <p:cNvPr id="22" name="Shape 20"/>
-          <p:cNvSpPr/>
-          <p:nvPr/>
-        </p:nvSpPr>
-        <p:spPr>
-          <a:xfrm>
-            <a:off x="365760" y="3749040"/>
-            <a:ext cx="8412480" cy="1097280"/>
-          </a:xfrm>
-          <a:prstGeom prst="roundRect">
-            <a:avLst>
-              <a:gd name="adj" fmla="val 2500"/>
-            </a:avLst>
-          </a:prstGeom>
-          <a:solidFill>
-            <a:srgbClr val="EEF3FA"/>
-          </a:solidFill>
-          <a:ln w="12700">
-            <a:solidFill>
-              <a:srgbClr val="004098"/>
-            </a:solidFill>
-            <a:prstDash val="solid"/>
-          </a:ln>
-        </p:spPr>
-      </p:sp>
-      <p:sp>
-        <p:nvSpPr>
           <p:cNvPr id="23" name="Text 21"/>
           <p:cNvSpPr/>
           <p:nvPr/>
         </p:nvSpPr>
         <p:spPr>
           <a:xfrm>
-            <a:off x="502920" y="3749040"/>
-            <a:ext cx="8138160" cy="1097280"/>
+            <a:off x="502920" y="4297680"/>
+            <a:ext cx="8138160" cy="502920"/>
           </a:xfrm>
           <a:prstGeom prst="rect">
             <a:avLst/>
@@ -7061,13 +7607,13 @@
             <a:r>
               <a:rPr lang="en-US" sz="1200" dirty="0">
                 <a:solidFill>
-                  <a:srgbClr val="004098"/>
-                </a:solidFill>
-                <a:latin typeface="Meiryo" pitchFamily="34" charset="0"/>
-                <a:ea typeface="Meiryo" pitchFamily="34" charset="-122"/>
-                <a:cs typeface="Meiryo" pitchFamily="34" charset="-120"/>
-              </a:rPr>
-              <a:t>FY26末達成目標：①プロセス標準化全チーム適用  ②計測基盤全チーム稼働  ③inet費用削減見立て完了  ④KARTE→Braze機能可否判断完了  ⑤DM採用完了</a:t>
+                  <a:srgbClr val="065F46"/>
+                </a:solidFill>
+                <a:latin typeface="Meiryo" pitchFamily="34" charset="0"/>
+                <a:ea typeface="Meiryo" pitchFamily="34" charset="-122"/>
+                <a:cs typeface="Meiryo" pitchFamily="34" charset="-120"/>
+              </a:rPr>
+              <a:t>先行KPI（途中確認指標）：プロセス標準化の適用チーム率　／　DM採用パイプライン進捗（候補者面談数・内定数）　／　計測ダッシュボード稼働チーム数　／　inet費用削減見立て（対26年度比%）　／　KARTE機能検証完了率</a:t>
             </a:r>
             <a:endParaRPr lang="en-US" sz="1200" dirty="0"/>
           </a:p>
@@ -7138,7 +7684,7 @@
                 <a:ea typeface="Meiryo" pitchFamily="34" charset="-122"/>
                 <a:cs typeface="Meiryo" pitchFamily="34" charset="-120"/>
               </a:rPr>
-              <a:t>DMチーム FY26 OKR  &gt;  KR間連動</a:t>
+              <a:t>DMチーム FY26 OKR  &gt;  基盤KR3 事業貢献PDCA</a:t>
             </a:r>
             <a:endParaRPr lang="en-US" sz="900" dirty="0"/>
           </a:p>
@@ -7228,7 +7774,7 @@
         <p:spPr>
           <a:xfrm>
             <a:off x="365760" y="384048"/>
-            <a:ext cx="8412480" cy="594360"/>
+            <a:ext cx="8412480" cy="384048"/>
           </a:xfrm>
           <a:prstGeom prst="rect">
             <a:avLst/>
@@ -7252,7 +7798,7 @@
                 <a:ea typeface="Meiryo" pitchFamily="34" charset="-122"/>
                 <a:cs typeface="Meiryo" pitchFamily="34" charset="-120"/>
               </a:rPr>
-              <a:t>挑戦3KRが循環し、基盤3KRが支える ── 6KRで成果の方程式を回す</a:t>
+              <a:t>基盤KR3 事業貢献PDCA</a:t>
             </a:r>
             <a:endParaRPr lang="en-US" sz="1800" dirty="0"/>
           </a:p>
@@ -7260,13 +7806,52 @@
       </p:sp>
       <p:sp>
         <p:nvSpPr>
-          <p:cNvPr id="7" name="Shape 5"/>
-          <p:cNvSpPr/>
-          <p:nvPr/>
-        </p:nvSpPr>
-        <p:spPr>
-          <a:xfrm>
-            <a:off x="0" y="1051560"/>
+          <p:cNvPr id="7" name="Text 5"/>
+          <p:cNvSpPr/>
+          <p:nvPr/>
+        </p:nvSpPr>
+        <p:spPr>
+          <a:xfrm>
+            <a:off x="365760" y="749808"/>
+            <a:ext cx="8412480" cy="320040"/>
+          </a:xfrm>
+          <a:prstGeom prst="rect">
+            <a:avLst/>
+          </a:prstGeom>
+          <a:noFill/>
+          <a:ln/>
+        </p:spPr>
+        <p:txBody>
+          <a:bodyPr wrap="square" lIns="0" tIns="0" rIns="0" bIns="0" rtlCol="0" anchor="ctr"/>
+          <a:lstStyle/>
+          <a:p>
+            <a:pPr algn="l" indent="0" marL="0">
+              <a:buNone/>
+            </a:pPr>
+            <a:r>
+              <a:rPr lang="en-US" sz="1200" dirty="0">
+                <a:solidFill>
+                  <a:srgbClr val="444466"/>
+                </a:solidFill>
+                <a:latin typeface="Meiryo" pitchFamily="34" charset="0"/>
+                <a:ea typeface="Meiryo" pitchFamily="34" charset="-122"/>
+                <a:cs typeface="Meiryo" pitchFamily="34" charset="-120"/>
+              </a:rPr>
+              <a:t>─ 事業側との四半期相互検証で、配置メンバーの事業貢献に相互納得を形成し外部妥当性を担保する</a:t>
+            </a:r>
+            <a:endParaRPr lang="en-US" sz="1200" dirty="0"/>
+          </a:p>
+        </p:txBody>
+      </p:sp>
+      <p:sp>
+        <p:nvSpPr>
+          <p:cNvPr id="8" name="Shape 6"/>
+          <p:cNvSpPr/>
+          <p:nvPr/>
+        </p:nvSpPr>
+        <p:spPr>
+          <a:xfrm>
+            <a:off x="0" y="1115568"/>
             <a:ext cx="9144000" cy="9144"/>
           </a:xfrm>
           <a:prstGeom prst="rect">
@@ -7285,13 +7870,13 @@
       </p:sp>
       <p:sp>
         <p:nvSpPr>
-          <p:cNvPr id="8" name="Text 6"/>
-          <p:cNvSpPr/>
-          <p:nvPr/>
-        </p:nvSpPr>
-        <p:spPr>
-          <a:xfrm>
-            <a:off x="365760" y="1097280"/>
+          <p:cNvPr id="9" name="Text 7"/>
+          <p:cNvSpPr/>
+          <p:nvPr/>
+        </p:nvSpPr>
+        <p:spPr>
+          <a:xfrm>
+            <a:off x="365760" y="1170432"/>
             <a:ext cx="8412480" cy="274320"/>
           </a:xfrm>
           <a:prstGeom prst="rect">
@@ -7316,7 +7901,7 @@
                 <a:ea typeface="Meiryo" pitchFamily="34" charset="-122"/>
                 <a:cs typeface="Meiryo" pitchFamily="34" charset="-120"/>
               </a:rPr>
-              <a:t>だから、6KRは一体で動く設計。どれか1本だけ追っても成果は出ない</a:t>
+              <a:t>だから、他5KRが内向きなのに対し、基盤KR3だけが事業側から見た信頼度（外部妥当性）を担保する</a:t>
             </a:r>
             <a:endParaRPr lang="en-US" sz="1200" dirty="0"/>
           </a:p>
@@ -7324,26 +7909,665 @@
       </p:sp>
       <p:sp>
         <p:nvSpPr>
-          <p:cNvPr id="9" name="Shape 7"/>
-          <p:cNvSpPr/>
-          <p:nvPr/>
-        </p:nvSpPr>
-        <p:spPr>
-          <a:xfrm>
-            <a:off x="685800" y="1554480"/>
-            <a:ext cx="2286000" cy="777240"/>
+          <p:cNvPr id="10" name="Shape 8"/>
+          <p:cNvSpPr/>
+          <p:nvPr/>
+        </p:nvSpPr>
+        <p:spPr>
+          <a:xfrm>
+            <a:off x="365760" y="1463040"/>
+            <a:ext cx="2682240" cy="2697480"/>
           </a:xfrm>
           <a:prstGeom prst="roundRect">
             <a:avLst>
-              <a:gd name="adj" fmla="val 3529"/>
+              <a:gd name="adj" fmla="val 1023"/>
             </a:avLst>
           </a:prstGeom>
           <a:solidFill>
             <a:srgbClr val="EEF3FA"/>
           </a:solidFill>
-          <a:ln w="19050">
+          <a:ln/>
+          <a:effectLst>
+            <a:outerShdw sx="100000" sy="100000" kx="0" ky="0" algn="bl" rotWithShape="0" blurRad="50800" dist="25400" dir="8100000">
+              <a:srgbClr val="000000">
+                <a:alpha val="8000"/>
+              </a:srgbClr>
+            </a:outerShdw>
+          </a:effectLst>
+        </p:spPr>
+      </p:sp>
+      <p:sp>
+        <p:nvSpPr>
+          <p:cNvPr id="11" name="Shape 9"/>
+          <p:cNvSpPr/>
+          <p:nvPr/>
+        </p:nvSpPr>
+        <p:spPr>
+          <a:xfrm>
+            <a:off x="384048" y="1463040"/>
+            <a:ext cx="2645664" cy="54864"/>
+          </a:xfrm>
+          <a:prstGeom prst="rect">
+            <a:avLst/>
+          </a:prstGeom>
+          <a:solidFill>
+            <a:srgbClr val="004098"/>
+          </a:solidFill>
+          <a:ln/>
+        </p:spPr>
+      </p:sp>
+      <p:sp>
+        <p:nvSpPr>
+          <p:cNvPr id="12" name="Text 10"/>
+          <p:cNvSpPr/>
+          <p:nvPr/>
+        </p:nvSpPr>
+        <p:spPr>
+          <a:xfrm>
+            <a:off x="502920" y="1600200"/>
+            <a:ext cx="2407920" cy="365760"/>
+          </a:xfrm>
+          <a:prstGeom prst="rect">
+            <a:avLst/>
+          </a:prstGeom>
+          <a:noFill/>
+          <a:ln/>
+        </p:spPr>
+        <p:txBody>
+          <a:bodyPr wrap="square" lIns="0" tIns="0" rIns="0" bIns="0" rtlCol="0" anchor="t"/>
+          <a:lstStyle/>
+          <a:p>
+            <a:pPr algn="l" indent="0" marL="0">
+              <a:buNone/>
+            </a:pPr>
+            <a:r>
+              <a:rPr lang="en-US" sz="1400" b="1" dirty="0">
+                <a:solidFill>
+                  <a:srgbClr val="004098"/>
+                </a:solidFill>
+                <a:latin typeface="Meiryo" pitchFamily="34" charset="0"/>
+                <a:ea typeface="Meiryo" pitchFamily="34" charset="-122"/>
+                <a:cs typeface="Meiryo" pitchFamily="34" charset="-120"/>
+              </a:rPr>
+              <a:t>狙い</a:t>
+            </a:r>
+            <a:endParaRPr lang="en-US" sz="1400" dirty="0"/>
+          </a:p>
+        </p:txBody>
+      </p:sp>
+      <p:sp>
+        <p:nvSpPr>
+          <p:cNvPr id="13" name="Text 11"/>
+          <p:cNvSpPr/>
+          <p:nvPr/>
+        </p:nvSpPr>
+        <p:spPr>
+          <a:xfrm>
+            <a:off x="502920" y="1965960"/>
+            <a:ext cx="2407920" cy="2057400"/>
+          </a:xfrm>
+          <a:prstGeom prst="rect">
+            <a:avLst/>
+          </a:prstGeom>
+          <a:noFill/>
+          <a:ln/>
+        </p:spPr>
+        <p:txBody>
+          <a:bodyPr wrap="square" lIns="0" tIns="0" rIns="0" bIns="0" rtlCol="0" anchor="t"/>
+          <a:lstStyle/>
+          <a:p>
+            <a:pPr algn="l" indent="0" marL="0">
+              <a:lnSpc>
+                <a:spcPct val="150000"/>
+              </a:lnSpc>
+              <a:buNone/>
+            </a:pPr>
+            <a:r>
+              <a:rPr lang="en-US" sz="1300" dirty="0">
+                <a:solidFill>
+                  <a:srgbClr val="1A1A2E"/>
+                </a:solidFill>
+                <a:latin typeface="Meiryo" pitchFamily="34" charset="0"/>
+                <a:ea typeface="Meiryo" pitchFamily="34" charset="-122"/>
+                <a:cs typeface="Meiryo" pitchFamily="34" charset="-120"/>
+              </a:rPr>
+              <a:t>挑戦KR1〜3と基盤KR1/2はすべて内向きKR（デリバリー機能の内側）。基盤KR3だけが事業側から見た信頼度を扱う唯一の外向きKR。デリバリーラインの成果が本当に事業価値になっているかを、事業側（toC各部）との四半期振り返りで相互検証する。※DPG KR⑦直接受け／3者共同責任（片山TL・檜垣TL・杉崎TL）</a:t>
+            </a:r>
+            <a:endParaRPr lang="en-US" sz="1300" dirty="0"/>
+          </a:p>
+        </p:txBody>
+      </p:sp>
+      <p:sp>
+        <p:nvSpPr>
+          <p:cNvPr id="14" name="Shape 12"/>
+          <p:cNvSpPr/>
+          <p:nvPr/>
+        </p:nvSpPr>
+        <p:spPr>
+          <a:xfrm>
+            <a:off x="3230880" y="1463040"/>
+            <a:ext cx="2682240" cy="2697480"/>
+          </a:xfrm>
+          <a:prstGeom prst="roundRect">
+            <a:avLst>
+              <a:gd name="adj" fmla="val 1023"/>
+            </a:avLst>
+          </a:prstGeom>
+          <a:solidFill>
+            <a:srgbClr val="EEF3FA"/>
+          </a:solidFill>
+          <a:ln/>
+          <a:effectLst>
+            <a:outerShdw sx="100000" sy="100000" kx="0" ky="0" algn="bl" rotWithShape="0" blurRad="50800" dist="25400" dir="8100000">
+              <a:srgbClr val="000000">
+                <a:alpha val="8000"/>
+              </a:srgbClr>
+            </a:outerShdw>
+          </a:effectLst>
+        </p:spPr>
+      </p:sp>
+      <p:sp>
+        <p:nvSpPr>
+          <p:cNvPr id="15" name="Shape 13"/>
+          <p:cNvSpPr/>
+          <p:nvPr/>
+        </p:nvSpPr>
+        <p:spPr>
+          <a:xfrm>
+            <a:off x="3249168" y="1463040"/>
+            <a:ext cx="2645664" cy="54864"/>
+          </a:xfrm>
+          <a:prstGeom prst="rect">
+            <a:avLst/>
+          </a:prstGeom>
+          <a:solidFill>
+            <a:srgbClr val="DC2626"/>
+          </a:solidFill>
+          <a:ln/>
+        </p:spPr>
+      </p:sp>
+      <p:sp>
+        <p:nvSpPr>
+          <p:cNvPr id="16" name="Text 14"/>
+          <p:cNvSpPr/>
+          <p:nvPr/>
+        </p:nvSpPr>
+        <p:spPr>
+          <a:xfrm>
+            <a:off x="3368040" y="1600200"/>
+            <a:ext cx="2407920" cy="365760"/>
+          </a:xfrm>
+          <a:prstGeom prst="rect">
+            <a:avLst/>
+          </a:prstGeom>
+          <a:noFill/>
+          <a:ln/>
+        </p:spPr>
+        <p:txBody>
+          <a:bodyPr wrap="square" lIns="0" tIns="0" rIns="0" bIns="0" rtlCol="0" anchor="t"/>
+          <a:lstStyle/>
+          <a:p>
+            <a:pPr algn="l" indent="0" marL="0">
+              <a:buNone/>
+            </a:pPr>
+            <a:r>
+              <a:rPr lang="en-US" sz="1400" b="1" dirty="0">
+                <a:solidFill>
+                  <a:srgbClr val="DC2626"/>
+                </a:solidFill>
+                <a:latin typeface="Meiryo" pitchFamily="34" charset="0"/>
+                <a:ea typeface="Meiryo" pitchFamily="34" charset="-122"/>
+                <a:cs typeface="Meiryo" pitchFamily="34" charset="-120"/>
+              </a:rPr>
+              <a:t>年度マイルストーン</a:t>
+            </a:r>
+            <a:endParaRPr lang="en-US" sz="1400" dirty="0"/>
+          </a:p>
+        </p:txBody>
+      </p:sp>
+      <p:sp>
+        <p:nvSpPr>
+          <p:cNvPr id="17" name="Text 15"/>
+          <p:cNvSpPr/>
+          <p:nvPr/>
+        </p:nvSpPr>
+        <p:spPr>
+          <a:xfrm>
+            <a:off x="3368040" y="1965960"/>
+            <a:ext cx="2407920" cy="2057400"/>
+          </a:xfrm>
+          <a:prstGeom prst="rect">
+            <a:avLst/>
+          </a:prstGeom>
+          <a:noFill/>
+          <a:ln/>
+        </p:spPr>
+        <p:txBody>
+          <a:bodyPr wrap="square" lIns="0" tIns="0" rIns="0" bIns="0" rtlCol="0" anchor="t"/>
+          <a:lstStyle/>
+          <a:p>
+            <a:pPr algn="l" indent="0" marL="0">
+              <a:lnSpc>
+                <a:spcPct val="150000"/>
+              </a:lnSpc>
+              <a:buNone/>
+            </a:pPr>
+            <a:r>
+              <a:rPr lang="en-US" sz="1300" dirty="0">
+                <a:solidFill>
+                  <a:srgbClr val="1A1A2E"/>
+                </a:solidFill>
+                <a:latin typeface="Meiryo" pitchFamily="34" charset="0"/>
+                <a:ea typeface="Meiryo" pitchFamily="34" charset="-122"/>
+                <a:cs typeface="Meiryo" pitchFamily="34" charset="-120"/>
+              </a:rPr>
+              <a:t>FY26末：</a:t>
+            </a:r>
+            <a:endParaRPr lang="en-US" sz="1300" dirty="0"/>
+          </a:p>
+          <a:p>
+            <a:pPr algn="l" indent="0" marL="0">
+              <a:lnSpc>
+                <a:spcPct val="150000"/>
+              </a:lnSpc>
+              <a:buNone/>
+            </a:pPr>
+            <a:r>
+              <a:rPr lang="en-US" sz="1300" dirty="0">
+                <a:solidFill>
+                  <a:srgbClr val="1A1A2E"/>
+                </a:solidFill>
+                <a:latin typeface="Meiryo" pitchFamily="34" charset="0"/>
+                <a:ea typeface="Meiryo" pitchFamily="34" charset="-122"/>
+                <a:cs typeface="Meiryo" pitchFamily="34" charset="-120"/>
+              </a:rPr>
+              <a:t>・配置メンバーの事業貢献について、</a:t>
+            </a:r>
+            <a:endParaRPr lang="en-US" sz="1300" dirty="0"/>
+          </a:p>
+          <a:p>
+            <a:pPr algn="l" indent="0" marL="0">
+              <a:lnSpc>
+                <a:spcPct val="150000"/>
+              </a:lnSpc>
+              <a:buNone/>
+            </a:pPr>
+            <a:r>
+              <a:rPr lang="en-US" sz="1300" dirty="0">
+                <a:solidFill>
+                  <a:srgbClr val="1A1A2E"/>
+                </a:solidFill>
+                <a:latin typeface="Meiryo" pitchFamily="34" charset="0"/>
+                <a:ea typeface="Meiryo" pitchFamily="34" charset="-122"/>
+                <a:cs typeface="Meiryo" pitchFamily="34" charset="-120"/>
+              </a:rPr>
+              <a:t>　事業側（toC各部）との四半期振り返りで</a:t>
+            </a:r>
+            <a:endParaRPr lang="en-US" sz="1300" dirty="0"/>
+          </a:p>
+          <a:p>
+            <a:pPr algn="l" indent="0" marL="0">
+              <a:lnSpc>
+                <a:spcPct val="150000"/>
+              </a:lnSpc>
+              <a:buNone/>
+            </a:pPr>
+            <a:r>
+              <a:rPr lang="en-US" sz="1300" dirty="0">
+                <a:solidFill>
+                  <a:srgbClr val="1A1A2E"/>
+                </a:solidFill>
+                <a:latin typeface="Meiryo" pitchFamily="34" charset="0"/>
+                <a:ea typeface="Meiryo" pitchFamily="34" charset="-122"/>
+                <a:cs typeface="Meiryo" pitchFamily="34" charset="-120"/>
+              </a:rPr>
+              <a:t>　相互納得が形成されている状態</a:t>
+            </a:r>
+            <a:endParaRPr lang="en-US" sz="1300" dirty="0"/>
+          </a:p>
+          <a:p>
+            <a:pPr algn="l" indent="0" marL="0">
+              <a:lnSpc>
+                <a:spcPct val="150000"/>
+              </a:lnSpc>
+              <a:buNone/>
+            </a:pPr>
+            <a:endParaRPr lang="en-US" sz="1300" dirty="0"/>
+          </a:p>
+          <a:p>
+            <a:pPr algn="l" indent="0" marL="0">
+              <a:lnSpc>
+                <a:spcPct val="150000"/>
+              </a:lnSpc>
+              <a:buNone/>
+            </a:pPr>
+            <a:r>
+              <a:rPr lang="en-US" sz="1300" dirty="0">
+                <a:solidFill>
+                  <a:srgbClr val="1A1A2E"/>
+                </a:solidFill>
+                <a:latin typeface="Meiryo" pitchFamily="34" charset="0"/>
+                <a:ea typeface="Meiryo" pitchFamily="34" charset="-122"/>
+                <a:cs typeface="Meiryo" pitchFamily="34" charset="-120"/>
+              </a:rPr>
+              <a:t>FY26 Q1中：</a:t>
+            </a:r>
+            <a:endParaRPr lang="en-US" sz="1300" dirty="0"/>
+          </a:p>
+          <a:p>
+            <a:pPr algn="l" indent="0" marL="0">
+              <a:lnSpc>
+                <a:spcPct val="150000"/>
+              </a:lnSpc>
+              <a:buNone/>
+            </a:pPr>
+            <a:r>
+              <a:rPr lang="en-US" sz="1300" dirty="0">
+                <a:solidFill>
+                  <a:srgbClr val="1A1A2E"/>
+                </a:solidFill>
+                <a:latin typeface="Meiryo" pitchFamily="34" charset="0"/>
+                <a:ea typeface="Meiryo" pitchFamily="34" charset="-122"/>
+                <a:cs typeface="Meiryo" pitchFamily="34" charset="-120"/>
+              </a:rPr>
+              <a:t>・3者（片山TL・檜垣TL・杉崎TL）で</a:t>
+            </a:r>
+            <a:endParaRPr lang="en-US" sz="1300" dirty="0"/>
+          </a:p>
+          <a:p>
+            <a:pPr algn="l" indent="0" marL="0">
+              <a:lnSpc>
+                <a:spcPct val="150000"/>
+              </a:lnSpc>
+              <a:buNone/>
+            </a:pPr>
+            <a:r>
+              <a:rPr lang="en-US" sz="1300" dirty="0">
+                <a:solidFill>
+                  <a:srgbClr val="1A1A2E"/>
+                </a:solidFill>
+                <a:latin typeface="Meiryo" pitchFamily="34" charset="0"/>
+                <a:ea typeface="Meiryo" pitchFamily="34" charset="-122"/>
+                <a:cs typeface="Meiryo" pitchFamily="34" charset="-120"/>
+              </a:rPr>
+              <a:t>　詳細KPI整合を確定</a:t>
+            </a:r>
+            <a:endParaRPr lang="en-US" sz="1300" dirty="0"/>
+          </a:p>
+        </p:txBody>
+      </p:sp>
+      <p:sp>
+        <p:nvSpPr>
+          <p:cNvPr id="18" name="Shape 16"/>
+          <p:cNvSpPr/>
+          <p:nvPr/>
+        </p:nvSpPr>
+        <p:spPr>
+          <a:xfrm>
+            <a:off x="6096000" y="1463040"/>
+            <a:ext cx="2682240" cy="2697480"/>
+          </a:xfrm>
+          <a:prstGeom prst="roundRect">
+            <a:avLst>
+              <a:gd name="adj" fmla="val 1023"/>
+            </a:avLst>
+          </a:prstGeom>
+          <a:solidFill>
+            <a:srgbClr val="EEF3FA"/>
+          </a:solidFill>
+          <a:ln/>
+          <a:effectLst>
+            <a:outerShdw sx="100000" sy="100000" kx="0" ky="0" algn="bl" rotWithShape="0" blurRad="50800" dist="25400" dir="8100000">
+              <a:srgbClr val="000000">
+                <a:alpha val="8000"/>
+              </a:srgbClr>
+            </a:outerShdw>
+          </a:effectLst>
+        </p:spPr>
+      </p:sp>
+      <p:sp>
+        <p:nvSpPr>
+          <p:cNvPr id="19" name="Shape 17"/>
+          <p:cNvSpPr/>
+          <p:nvPr/>
+        </p:nvSpPr>
+        <p:spPr>
+          <a:xfrm>
+            <a:off x="6114288" y="1463040"/>
+            <a:ext cx="2645664" cy="54864"/>
+          </a:xfrm>
+          <a:prstGeom prst="rect">
+            <a:avLst/>
+          </a:prstGeom>
+          <a:solidFill>
+            <a:srgbClr val="004098"/>
+          </a:solidFill>
+          <a:ln/>
+        </p:spPr>
+      </p:sp>
+      <p:sp>
+        <p:nvSpPr>
+          <p:cNvPr id="20" name="Text 18"/>
+          <p:cNvSpPr/>
+          <p:nvPr/>
+        </p:nvSpPr>
+        <p:spPr>
+          <a:xfrm>
+            <a:off x="6233160" y="1600200"/>
+            <a:ext cx="2407920" cy="365760"/>
+          </a:xfrm>
+          <a:prstGeom prst="rect">
+            <a:avLst/>
+          </a:prstGeom>
+          <a:noFill/>
+          <a:ln/>
+        </p:spPr>
+        <p:txBody>
+          <a:bodyPr wrap="square" lIns="0" tIns="0" rIns="0" bIns="0" rtlCol="0" anchor="t"/>
+          <a:lstStyle/>
+          <a:p>
+            <a:pPr algn="l" indent="0" marL="0">
+              <a:buNone/>
+            </a:pPr>
+            <a:r>
+              <a:rPr lang="en-US" sz="1400" b="1" dirty="0">
+                <a:solidFill>
+                  <a:srgbClr val="004098"/>
+                </a:solidFill>
+                <a:latin typeface="Meiryo" pitchFamily="34" charset="0"/>
+                <a:ea typeface="Meiryo" pitchFamily="34" charset="-122"/>
+                <a:cs typeface="Meiryo" pitchFamily="34" charset="-120"/>
+              </a:rPr>
+              <a:t>主要施策（FY26）</a:t>
+            </a:r>
+            <a:endParaRPr lang="en-US" sz="1400" dirty="0"/>
+          </a:p>
+        </p:txBody>
+      </p:sp>
+      <p:sp>
+        <p:nvSpPr>
+          <p:cNvPr id="21" name="Text 19"/>
+          <p:cNvSpPr/>
+          <p:nvPr/>
+        </p:nvSpPr>
+        <p:spPr>
+          <a:xfrm>
+            <a:off x="6233160" y="1965960"/>
+            <a:ext cx="2407920" cy="2057400"/>
+          </a:xfrm>
+          <a:prstGeom prst="rect">
+            <a:avLst/>
+          </a:prstGeom>
+          <a:noFill/>
+          <a:ln/>
+        </p:spPr>
+        <p:txBody>
+          <a:bodyPr wrap="square" lIns="0" tIns="0" rIns="0" bIns="0" rtlCol="0" anchor="t"/>
+          <a:lstStyle/>
+          <a:p>
+            <a:pPr algn="l" indent="0" marL="0">
+              <a:lnSpc>
+                <a:spcPct val="150000"/>
+              </a:lnSpc>
+              <a:buNone/>
+            </a:pPr>
+            <a:r>
+              <a:rPr lang="en-US" sz="1300" dirty="0">
+                <a:solidFill>
+                  <a:srgbClr val="1A1A2E"/>
+                </a:solidFill>
+                <a:latin typeface="Meiryo" pitchFamily="34" charset="0"/>
+                <a:ea typeface="Meiryo" pitchFamily="34" charset="-122"/>
+                <a:cs typeface="Meiryo" pitchFamily="34" charset="-120"/>
+              </a:rPr>
+              <a:t>・1Q・2Q・3Q末に事業側（toC各部）へ</a:t>
+            </a:r>
+            <a:endParaRPr lang="en-US" sz="1300" dirty="0"/>
+          </a:p>
+          <a:p>
+            <a:pPr algn="l" indent="0" marL="0">
+              <a:lnSpc>
+                <a:spcPct val="150000"/>
+              </a:lnSpc>
+              <a:buNone/>
+            </a:pPr>
+            <a:r>
+              <a:rPr lang="en-US" sz="1300" dirty="0">
+                <a:solidFill>
+                  <a:srgbClr val="1A1A2E"/>
+                </a:solidFill>
+                <a:latin typeface="Meiryo" pitchFamily="34" charset="0"/>
+                <a:ea typeface="Meiryo" pitchFamily="34" charset="-122"/>
+                <a:cs typeface="Meiryo" pitchFamily="34" charset="-120"/>
+              </a:rPr>
+              <a:t>　アンケート／面談を実施</a:t>
+            </a:r>
+            <a:endParaRPr lang="en-US" sz="1300" dirty="0"/>
+          </a:p>
+          <a:p>
+            <a:pPr algn="l" indent="0" marL="0">
+              <a:lnSpc>
+                <a:spcPct val="150000"/>
+              </a:lnSpc>
+              <a:buNone/>
+            </a:pPr>
+            <a:r>
+              <a:rPr lang="en-US" sz="1300" dirty="0">
+                <a:solidFill>
+                  <a:srgbClr val="1A1A2E"/>
+                </a:solidFill>
+                <a:latin typeface="Meiryo" pitchFamily="34" charset="0"/>
+                <a:ea typeface="Meiryo" pitchFamily="34" charset="-122"/>
+                <a:cs typeface="Meiryo" pitchFamily="34" charset="-120"/>
+              </a:rPr>
+              <a:t>・振り返りと次Qアクションプランを策定</a:t>
+            </a:r>
+            <a:endParaRPr lang="en-US" sz="1300" dirty="0"/>
+          </a:p>
+          <a:p>
+            <a:pPr algn="l" indent="0" marL="0">
+              <a:lnSpc>
+                <a:spcPct val="150000"/>
+              </a:lnSpc>
+              <a:buNone/>
+            </a:pPr>
+            <a:r>
+              <a:rPr lang="en-US" sz="1300" dirty="0">
+                <a:solidFill>
+                  <a:srgbClr val="1A1A2E"/>
+                </a:solidFill>
+                <a:latin typeface="Meiryo" pitchFamily="34" charset="0"/>
+                <a:ea typeface="Meiryo" pitchFamily="34" charset="-122"/>
+                <a:cs typeface="Meiryo" pitchFamily="34" charset="-120"/>
+              </a:rPr>
+              <a:t>・配置メンバーの事業貢献状況を</a:t>
+            </a:r>
+            <a:endParaRPr lang="en-US" sz="1300" dirty="0"/>
+          </a:p>
+          <a:p>
+            <a:pPr algn="l" indent="0" marL="0">
+              <a:lnSpc>
+                <a:spcPct val="150000"/>
+              </a:lnSpc>
+              <a:buNone/>
+            </a:pPr>
+            <a:r>
+              <a:rPr lang="en-US" sz="1300" dirty="0">
+                <a:solidFill>
+                  <a:srgbClr val="1A1A2E"/>
+                </a:solidFill>
+                <a:latin typeface="Meiryo" pitchFamily="34" charset="0"/>
+                <a:ea typeface="Meiryo" pitchFamily="34" charset="-122"/>
+                <a:cs typeface="Meiryo" pitchFamily="34" charset="-120"/>
+              </a:rPr>
+              <a:t>　四半期ごとに見える化</a:t>
+            </a:r>
+            <a:endParaRPr lang="en-US" sz="1300" dirty="0"/>
+          </a:p>
+          <a:p>
+            <a:pPr algn="l" indent="0" marL="0">
+              <a:lnSpc>
+                <a:spcPct val="150000"/>
+              </a:lnSpc>
+              <a:buNone/>
+            </a:pPr>
+            <a:r>
+              <a:rPr lang="en-US" sz="1300" dirty="0">
+                <a:solidFill>
+                  <a:srgbClr val="1A1A2E"/>
+                </a:solidFill>
+                <a:latin typeface="Meiryo" pitchFamily="34" charset="0"/>
+                <a:ea typeface="Meiryo" pitchFamily="34" charset="-122"/>
+                <a:cs typeface="Meiryo" pitchFamily="34" charset="-120"/>
+              </a:rPr>
+              <a:t>・3者共同運営の仕組みを設計</a:t>
+            </a:r>
+            <a:endParaRPr lang="en-US" sz="1300" dirty="0"/>
+          </a:p>
+          <a:p>
+            <a:pPr algn="l" indent="0" marL="0">
+              <a:lnSpc>
+                <a:spcPct val="150000"/>
+              </a:lnSpc>
+              <a:buNone/>
+            </a:pPr>
+            <a:r>
+              <a:rPr lang="en-US" sz="1300" dirty="0">
+                <a:solidFill>
+                  <a:srgbClr val="1A1A2E"/>
+                </a:solidFill>
+                <a:latin typeface="Meiryo" pitchFamily="34" charset="0"/>
+                <a:ea typeface="Meiryo" pitchFamily="34" charset="-122"/>
+                <a:cs typeface="Meiryo" pitchFamily="34" charset="-120"/>
+              </a:rPr>
+              <a:t>・詳細KPIをQ1中に3者で確定</a:t>
+            </a:r>
+            <a:endParaRPr lang="en-US" sz="1300" dirty="0"/>
+          </a:p>
+        </p:txBody>
+      </p:sp>
+      <p:sp>
+        <p:nvSpPr>
+          <p:cNvPr id="22" name="Shape 20"/>
+          <p:cNvSpPr/>
+          <p:nvPr/>
+        </p:nvSpPr>
+        <p:spPr>
+          <a:xfrm>
+            <a:off x="365760" y="4297680"/>
+            <a:ext cx="8412480" cy="502920"/>
+          </a:xfrm>
+          <a:prstGeom prst="roundRect">
+            <a:avLst>
+              <a:gd name="adj" fmla="val 5455"/>
+            </a:avLst>
+          </a:prstGeom>
+          <a:solidFill>
+            <a:srgbClr val="F0FDF4"/>
+          </a:solidFill>
+          <a:ln w="12700">
             <a:solidFill>
-              <a:srgbClr val="004098"/>
+              <a:srgbClr val="059669"/>
             </a:solidFill>
             <a:prstDash val="solid"/>
           </a:ln>
@@ -7351,14 +8575,14 @@
       </p:sp>
       <p:sp>
         <p:nvSpPr>
-          <p:cNvPr id="10" name="Text 8"/>
-          <p:cNvSpPr/>
-          <p:nvPr/>
-        </p:nvSpPr>
-        <p:spPr>
-          <a:xfrm>
-            <a:off x="685800" y="1554480"/>
-            <a:ext cx="2286000" cy="777240"/>
+          <p:cNvPr id="23" name="Text 21"/>
+          <p:cNvSpPr/>
+          <p:nvPr/>
+        </p:nvSpPr>
+        <p:spPr>
+          <a:xfrm>
+            <a:off x="502920" y="4297680"/>
+            <a:ext cx="8138160" cy="502920"/>
           </a:xfrm>
           <a:prstGeom prst="rect">
             <a:avLst/>
@@ -7370,659 +8594,22 @@
           <a:bodyPr wrap="square" lIns="0" tIns="0" rIns="0" bIns="0" rtlCol="0" anchor="ctr"/>
           <a:lstStyle/>
           <a:p>
-            <a:pPr algn="ctr" indent="0" marL="0">
-              <a:buNone/>
-            </a:pPr>
-            <a:r>
-              <a:rPr lang="en-US" sz="1300" b="1" dirty="0">
-                <a:solidFill>
-                  <a:srgbClr val="004098"/>
-                </a:solidFill>
-                <a:latin typeface="Meiryo" pitchFamily="34" charset="0"/>
-                <a:ea typeface="Meiryo" pitchFamily="34" charset="-122"/>
-                <a:cs typeface="Meiryo" pitchFamily="34" charset="-120"/>
-              </a:rPr>
-              <a:t>挑戦KR1
-</a:t>
-            </a:r>
-            <a:pPr algn="ctr" indent="0" marL="0">
+            <a:pPr algn="l" indent="0" marL="0">
+              <a:lnSpc>
+                <a:spcPct val="140000"/>
+              </a:lnSpc>
               <a:buNone/>
             </a:pPr>
             <a:r>
               <a:rPr lang="en-US" sz="1200" dirty="0">
                 <a:solidFill>
-                  <a:srgbClr val="1A1A2E"/>
-                </a:solidFill>
-                <a:latin typeface="Meiryo" pitchFamily="34" charset="0"/>
-                <a:ea typeface="Meiryo" pitchFamily="34" charset="-122"/>
-                <a:cs typeface="Meiryo" pitchFamily="34" charset="-120"/>
-              </a:rPr>
-              <a:t>入口品質</a:t>
-            </a:r>
-            <a:endParaRPr lang="en-US" sz="1300" dirty="0"/>
-          </a:p>
-        </p:txBody>
-      </p:sp>
-      <p:sp>
-        <p:nvSpPr>
-          <p:cNvPr id="11" name="Text 9"/>
-          <p:cNvSpPr/>
-          <p:nvPr/>
-        </p:nvSpPr>
-        <p:spPr>
-          <a:xfrm>
-            <a:off x="3017520" y="1787652"/>
-            <a:ext cx="502920" cy="310896"/>
-          </a:xfrm>
-          <a:prstGeom prst="rect">
-            <a:avLst/>
-          </a:prstGeom>
-          <a:noFill/>
-          <a:ln/>
-        </p:spPr>
-        <p:txBody>
-          <a:bodyPr wrap="square" lIns="0" tIns="0" rIns="0" bIns="0" rtlCol="0" anchor="ctr"/>
-          <a:lstStyle/>
-          <a:p>
-            <a:pPr algn="ctr" indent="0" marL="0">
-              <a:buNone/>
-            </a:pPr>
-            <a:r>
-              <a:rPr lang="en-US" sz="2000" dirty="0">
-                <a:solidFill>
-                  <a:srgbClr val="DC2626"/>
-                </a:solidFill>
-                <a:latin typeface="Arial" pitchFamily="34" charset="0"/>
-                <a:ea typeface="Arial" pitchFamily="34" charset="-122"/>
-                <a:cs typeface="Arial" pitchFamily="34" charset="-120"/>
-              </a:rPr>
-              <a:t>▶</a:t>
-            </a:r>
-            <a:endParaRPr lang="en-US" sz="2000" dirty="0"/>
-          </a:p>
-        </p:txBody>
-      </p:sp>
-      <p:sp>
-        <p:nvSpPr>
-          <p:cNvPr id="12" name="Shape 10"/>
-          <p:cNvSpPr/>
-          <p:nvPr/>
-        </p:nvSpPr>
-        <p:spPr>
-          <a:xfrm>
-            <a:off x="3566160" y="1554480"/>
-            <a:ext cx="2286000" cy="777240"/>
-          </a:xfrm>
-          <a:prstGeom prst="roundRect">
-            <a:avLst>
-              <a:gd name="adj" fmla="val 3529"/>
-            </a:avLst>
-          </a:prstGeom>
-          <a:solidFill>
-            <a:srgbClr val="EEF3FA"/>
-          </a:solidFill>
-          <a:ln w="19050">
-            <a:solidFill>
-              <a:srgbClr val="004098"/>
-            </a:solidFill>
-            <a:prstDash val="solid"/>
-          </a:ln>
-        </p:spPr>
-      </p:sp>
-      <p:sp>
-        <p:nvSpPr>
-          <p:cNvPr id="13" name="Text 11"/>
-          <p:cNvSpPr/>
-          <p:nvPr/>
-        </p:nvSpPr>
-        <p:spPr>
-          <a:xfrm>
-            <a:off x="3566160" y="1554480"/>
-            <a:ext cx="2286000" cy="777240"/>
-          </a:xfrm>
-          <a:prstGeom prst="rect">
-            <a:avLst/>
-          </a:prstGeom>
-          <a:noFill/>
-          <a:ln/>
-        </p:spPr>
-        <p:txBody>
-          <a:bodyPr wrap="square" lIns="0" tIns="0" rIns="0" bIns="0" rtlCol="0" anchor="ctr"/>
-          <a:lstStyle/>
-          <a:p>
-            <a:pPr algn="ctr" indent="0" marL="0">
-              <a:buNone/>
-            </a:pPr>
-            <a:r>
-              <a:rPr lang="en-US" sz="1300" b="1" dirty="0">
-                <a:solidFill>
-                  <a:srgbClr val="004098"/>
-                </a:solidFill>
-                <a:latin typeface="Meiryo" pitchFamily="34" charset="0"/>
-                <a:ea typeface="Meiryo" pitchFamily="34" charset="-122"/>
-                <a:cs typeface="Meiryo" pitchFamily="34" charset="-120"/>
-              </a:rPr>
-              <a:t>挑戦KR2
-</a:t>
-            </a:r>
-            <a:pPr algn="ctr" indent="0" marL="0">
-              <a:buNone/>
-            </a:pPr>
-            <a:r>
-              <a:rPr lang="en-US" sz="1200" dirty="0">
-                <a:solidFill>
-                  <a:srgbClr val="1A1A2E"/>
-                </a:solidFill>
-                <a:latin typeface="Meiryo" pitchFamily="34" charset="0"/>
-                <a:ea typeface="Meiryo" pitchFamily="34" charset="-122"/>
-                <a:cs typeface="Meiryo" pitchFamily="34" charset="-120"/>
-              </a:rPr>
-              <a:t>フロー効率</a:t>
-            </a:r>
-            <a:endParaRPr lang="en-US" sz="1300" dirty="0"/>
-          </a:p>
-        </p:txBody>
-      </p:sp>
-      <p:sp>
-        <p:nvSpPr>
-          <p:cNvPr id="14" name="Text 12"/>
-          <p:cNvSpPr/>
-          <p:nvPr/>
-        </p:nvSpPr>
-        <p:spPr>
-          <a:xfrm>
-            <a:off x="5897880" y="1787652"/>
-            <a:ext cx="502920" cy="310896"/>
-          </a:xfrm>
-          <a:prstGeom prst="rect">
-            <a:avLst/>
-          </a:prstGeom>
-          <a:noFill/>
-          <a:ln/>
-        </p:spPr>
-        <p:txBody>
-          <a:bodyPr wrap="square" lIns="0" tIns="0" rIns="0" bIns="0" rtlCol="0" anchor="ctr"/>
-          <a:lstStyle/>
-          <a:p>
-            <a:pPr algn="ctr" indent="0" marL="0">
-              <a:buNone/>
-            </a:pPr>
-            <a:r>
-              <a:rPr lang="en-US" sz="2000" dirty="0">
-                <a:solidFill>
-                  <a:srgbClr val="DC2626"/>
-                </a:solidFill>
-                <a:latin typeface="Arial" pitchFamily="34" charset="0"/>
-                <a:ea typeface="Arial" pitchFamily="34" charset="-122"/>
-                <a:cs typeface="Arial" pitchFamily="34" charset="-120"/>
-              </a:rPr>
-              <a:t>▶</a:t>
-            </a:r>
-            <a:endParaRPr lang="en-US" sz="2000" dirty="0"/>
-          </a:p>
-        </p:txBody>
-      </p:sp>
-      <p:sp>
-        <p:nvSpPr>
-          <p:cNvPr id="15" name="Shape 13"/>
-          <p:cNvSpPr/>
-          <p:nvPr/>
-        </p:nvSpPr>
-        <p:spPr>
-          <a:xfrm>
-            <a:off x="6446520" y="1554480"/>
-            <a:ext cx="2286000" cy="777240"/>
-          </a:xfrm>
-          <a:prstGeom prst="roundRect">
-            <a:avLst>
-              <a:gd name="adj" fmla="val 3529"/>
-            </a:avLst>
-          </a:prstGeom>
-          <a:solidFill>
-            <a:srgbClr val="EEF3FA"/>
-          </a:solidFill>
-          <a:ln w="19050">
-            <a:solidFill>
-              <a:srgbClr val="004098"/>
-            </a:solidFill>
-            <a:prstDash val="solid"/>
-          </a:ln>
-        </p:spPr>
-      </p:sp>
-      <p:sp>
-        <p:nvSpPr>
-          <p:cNvPr id="16" name="Text 14"/>
-          <p:cNvSpPr/>
-          <p:nvPr/>
-        </p:nvSpPr>
-        <p:spPr>
-          <a:xfrm>
-            <a:off x="6446520" y="1554480"/>
-            <a:ext cx="2286000" cy="777240"/>
-          </a:xfrm>
-          <a:prstGeom prst="rect">
-            <a:avLst/>
-          </a:prstGeom>
-          <a:noFill/>
-          <a:ln/>
-        </p:spPr>
-        <p:txBody>
-          <a:bodyPr wrap="square" lIns="0" tIns="0" rIns="0" bIns="0" rtlCol="0" anchor="ctr"/>
-          <a:lstStyle/>
-          <a:p>
-            <a:pPr algn="ctr" indent="0" marL="0">
-              <a:buNone/>
-            </a:pPr>
-            <a:r>
-              <a:rPr lang="en-US" sz="1300" b="1" dirty="0">
-                <a:solidFill>
-                  <a:srgbClr val="004098"/>
-                </a:solidFill>
-                <a:latin typeface="Meiryo" pitchFamily="34" charset="0"/>
-                <a:ea typeface="Meiryo" pitchFamily="34" charset="-122"/>
-                <a:cs typeface="Meiryo" pitchFamily="34" charset="-120"/>
-              </a:rPr>
-              <a:t>挑戦KR3
-</a:t>
-            </a:r>
-            <a:pPr algn="ctr" indent="0" marL="0">
-              <a:buNone/>
-            </a:pPr>
-            <a:r>
-              <a:rPr lang="en-US" sz="1200" dirty="0">
-                <a:solidFill>
-                  <a:srgbClr val="1A1A2E"/>
-                </a:solidFill>
-                <a:latin typeface="Meiryo" pitchFamily="34" charset="0"/>
-                <a:ea typeface="Meiryo" pitchFamily="34" charset="-122"/>
-                <a:cs typeface="Meiryo" pitchFamily="34" charset="-120"/>
-              </a:rPr>
-              <a:t>学習ループ</a:t>
-            </a:r>
-            <a:endParaRPr lang="en-US" sz="1300" dirty="0"/>
-          </a:p>
-        </p:txBody>
-      </p:sp>
-      <p:sp>
-        <p:nvSpPr>
-          <p:cNvPr id="17" name="Text 15"/>
-          <p:cNvSpPr/>
-          <p:nvPr/>
-        </p:nvSpPr>
-        <p:spPr>
-          <a:xfrm>
-            <a:off x="685800" y="2423160"/>
-            <a:ext cx="8046720" cy="274320"/>
-          </a:xfrm>
-          <a:prstGeom prst="rect">
-            <a:avLst/>
-          </a:prstGeom>
-          <a:noFill/>
-          <a:ln/>
-        </p:spPr>
-        <p:txBody>
-          <a:bodyPr wrap="square" lIns="0" tIns="0" rIns="0" bIns="0" rtlCol="0" anchor="ctr"/>
-          <a:lstStyle/>
-          <a:p>
-            <a:pPr algn="ctr" indent="0" marL="0">
-              <a:buNone/>
-            </a:pPr>
-            <a:r>
-              <a:rPr lang="en-US" sz="1100" i="1" dirty="0">
-                <a:solidFill>
-                  <a:srgbClr val="DC2626"/>
-                </a:solidFill>
-                <a:latin typeface="Meiryo" pitchFamily="34" charset="0"/>
-                <a:ea typeface="Meiryo" pitchFamily="34" charset="-122"/>
-                <a:cs typeface="Meiryo" pitchFamily="34" charset="-120"/>
-              </a:rPr>
-              <a:t>◀ 学びが仮説精度を高める（KR3 → KR1）</a:t>
-            </a:r>
-            <a:endParaRPr lang="en-US" sz="1100" dirty="0"/>
-          </a:p>
-        </p:txBody>
-      </p:sp>
-      <p:sp>
-        <p:nvSpPr>
-          <p:cNvPr id="18" name="Shape 16"/>
-          <p:cNvSpPr/>
-          <p:nvPr/>
-        </p:nvSpPr>
-        <p:spPr>
-          <a:xfrm>
-            <a:off x="365760" y="2880360"/>
-            <a:ext cx="8412480" cy="10973"/>
-          </a:xfrm>
-          <a:prstGeom prst="rect">
-            <a:avLst/>
-          </a:prstGeom>
-          <a:solidFill>
-            <a:srgbClr val="CADCFC"/>
-          </a:solidFill>
-          <a:ln w="12700">
-            <a:solidFill>
-              <a:srgbClr val="CADCFC"/>
-            </a:solidFill>
-            <a:prstDash val="solid"/>
-          </a:ln>
-        </p:spPr>
-      </p:sp>
-      <p:sp>
-        <p:nvSpPr>
-          <p:cNvPr id="19" name="Text 17"/>
-          <p:cNvSpPr/>
-          <p:nvPr/>
-        </p:nvSpPr>
-        <p:spPr>
-          <a:xfrm>
-            <a:off x="365760" y="2926080"/>
-            <a:ext cx="8412480" cy="274320"/>
-          </a:xfrm>
-          <a:prstGeom prst="rect">
-            <a:avLst/>
-          </a:prstGeom>
-          <a:noFill/>
-          <a:ln/>
-        </p:spPr>
-        <p:txBody>
-          <a:bodyPr wrap="square" lIns="0" tIns="0" rIns="0" bIns="0" rtlCol="0" anchor="ctr"/>
-          <a:lstStyle/>
-          <a:p>
-            <a:pPr algn="ctr" indent="0" marL="0">
-              <a:buNone/>
-            </a:pPr>
-            <a:r>
-              <a:rPr lang="en-US" sz="1100" b="1" dirty="0">
-                <a:solidFill>
-                  <a:srgbClr val="444466"/>
-                </a:solidFill>
-                <a:latin typeface="Meiryo" pitchFamily="34" charset="0"/>
-                <a:ea typeface="Meiryo" pitchFamily="34" charset="-122"/>
-                <a:cs typeface="Meiryo" pitchFamily="34" charset="-120"/>
-              </a:rPr>
-              <a:t>── 挑戦3KR すべての前提・支え（基盤3KR）──</a:t>
-            </a:r>
-            <a:endParaRPr lang="en-US" sz="1100" dirty="0"/>
-          </a:p>
-        </p:txBody>
-      </p:sp>
-      <p:sp>
-        <p:nvSpPr>
-          <p:cNvPr id="20" name="Shape 18"/>
-          <p:cNvSpPr/>
-          <p:nvPr/>
-        </p:nvSpPr>
-        <p:spPr>
-          <a:xfrm>
-            <a:off x="365760" y="3246120"/>
-            <a:ext cx="8412480" cy="457200"/>
-          </a:xfrm>
-          <a:prstGeom prst="roundRect">
-            <a:avLst>
-              <a:gd name="adj" fmla="val 6000"/>
-            </a:avLst>
-          </a:prstGeom>
-          <a:solidFill>
-            <a:srgbClr val="F8FAFC"/>
-          </a:solidFill>
-          <a:ln w="12700">
-            <a:solidFill>
-              <a:srgbClr val="444466"/>
-            </a:solidFill>
-            <a:prstDash val="solid"/>
-          </a:ln>
-        </p:spPr>
-      </p:sp>
-      <p:sp>
-        <p:nvSpPr>
-          <p:cNvPr id="21" name="Text 19"/>
-          <p:cNvSpPr/>
-          <p:nvPr/>
-        </p:nvSpPr>
-        <p:spPr>
-          <a:xfrm>
-            <a:off x="502920" y="3246120"/>
-            <a:ext cx="8138160" cy="457200"/>
-          </a:xfrm>
-          <a:prstGeom prst="rect">
-            <a:avLst/>
-          </a:prstGeom>
-          <a:noFill/>
-          <a:ln/>
-        </p:spPr>
-        <p:txBody>
-          <a:bodyPr wrap="square" lIns="0" tIns="0" rIns="0" bIns="0" rtlCol="0" anchor="ctr"/>
-          <a:lstStyle/>
-          <a:p>
-            <a:pPr algn="l" indent="0" marL="0">
-              <a:buNone/>
-            </a:pPr>
-            <a:r>
-              <a:rPr lang="en-US" sz="1200" b="1" dirty="0">
-                <a:solidFill>
-                  <a:srgbClr val="004098"/>
-                </a:solidFill>
-                <a:latin typeface="Meiryo" pitchFamily="34" charset="0"/>
-                <a:ea typeface="Meiryo" pitchFamily="34" charset="-122"/>
-                <a:cs typeface="Meiryo" pitchFamily="34" charset="-120"/>
-              </a:rPr>
-              <a:t>基盤KR1 健全性＋開発環境</a:t>
-            </a:r>
-            <a:pPr algn="l" indent="0" marL="0">
-              <a:buNone/>
-            </a:pPr>
-            <a:r>
-              <a:rPr lang="en-US" sz="1100" dirty="0">
-                <a:solidFill>
-                  <a:srgbClr val="444466"/>
-                </a:solidFill>
-                <a:latin typeface="Meiryo" pitchFamily="34" charset="0"/>
-                <a:ea typeface="Meiryo" pitchFamily="34" charset="-122"/>
-                <a:cs typeface="Meiryo" pitchFamily="34" charset="-120"/>
-              </a:rPr>
-              <a:t>  —  </a:t>
-            </a:r>
-            <a:pPr algn="l" indent="0" marL="0">
-              <a:buNone/>
-            </a:pPr>
-            <a:r>
-              <a:rPr lang="en-US" sz="1100" dirty="0">
-                <a:solidFill>
-                  <a:srgbClr val="1A1A2E"/>
-                </a:solidFill>
-                <a:latin typeface="Meiryo" pitchFamily="34" charset="0"/>
-                <a:ea typeface="Meiryo" pitchFamily="34" charset="-122"/>
-                <a:cs typeface="Meiryo" pitchFamily="34" charset="-120"/>
-              </a:rPr>
-              <a:t>前提条件＋安全装置（守る／ムリ）</a:t>
-            </a:r>
-            <a:endParaRPr lang="en-US" sz="1200" dirty="0"/>
-          </a:p>
-        </p:txBody>
-      </p:sp>
-      <p:sp>
-        <p:nvSpPr>
-          <p:cNvPr id="22" name="Shape 20"/>
-          <p:cNvSpPr/>
-          <p:nvPr/>
-        </p:nvSpPr>
-        <p:spPr>
-          <a:xfrm>
-            <a:off x="365760" y="3813048"/>
-            <a:ext cx="8412480" cy="457200"/>
-          </a:xfrm>
-          <a:prstGeom prst="roundRect">
-            <a:avLst>
-              <a:gd name="adj" fmla="val 6000"/>
-            </a:avLst>
-          </a:prstGeom>
-          <a:solidFill>
-            <a:srgbClr val="F8FAFC"/>
-          </a:solidFill>
-          <a:ln w="12700">
-            <a:solidFill>
-              <a:srgbClr val="444466"/>
-            </a:solidFill>
-            <a:prstDash val="solid"/>
-          </a:ln>
-        </p:spPr>
-      </p:sp>
-      <p:sp>
-        <p:nvSpPr>
-          <p:cNvPr id="23" name="Text 21"/>
-          <p:cNvSpPr/>
-          <p:nvPr/>
-        </p:nvSpPr>
-        <p:spPr>
-          <a:xfrm>
-            <a:off x="502920" y="3813048"/>
-            <a:ext cx="8138160" cy="457200"/>
-          </a:xfrm>
-          <a:prstGeom prst="rect">
-            <a:avLst/>
-          </a:prstGeom>
-          <a:noFill/>
-          <a:ln/>
-        </p:spPr>
-        <p:txBody>
-          <a:bodyPr wrap="square" lIns="0" tIns="0" rIns="0" bIns="0" rtlCol="0" anchor="ctr"/>
-          <a:lstStyle/>
-          <a:p>
-            <a:pPr algn="l" indent="0" marL="0">
-              <a:buNone/>
-            </a:pPr>
-            <a:r>
-              <a:rPr lang="en-US" sz="1200" b="1" dirty="0">
-                <a:solidFill>
-                  <a:srgbClr val="004098"/>
-                </a:solidFill>
-                <a:latin typeface="Meiryo" pitchFamily="34" charset="0"/>
-                <a:ea typeface="Meiryo" pitchFamily="34" charset="-122"/>
-                <a:cs typeface="Meiryo" pitchFamily="34" charset="-120"/>
-              </a:rPr>
-              <a:t>基盤KR2 能力の多面的強化</a:t>
-            </a:r>
-            <a:pPr algn="l" indent="0" marL="0">
-              <a:buNone/>
-            </a:pPr>
-            <a:r>
-              <a:rPr lang="en-US" sz="1100" dirty="0">
-                <a:solidFill>
-                  <a:srgbClr val="444466"/>
-                </a:solidFill>
-                <a:latin typeface="Meiryo" pitchFamily="34" charset="0"/>
-                <a:ea typeface="Meiryo" pitchFamily="34" charset="-122"/>
-                <a:cs typeface="Meiryo" pitchFamily="34" charset="-120"/>
-              </a:rPr>
-              <a:t>  —  </a:t>
-            </a:r>
-            <a:pPr algn="l" indent="0" marL="0">
-              <a:buNone/>
-            </a:pPr>
-            <a:r>
-              <a:rPr lang="en-US" sz="1100" dirty="0">
-                <a:solidFill>
-                  <a:srgbClr val="1A1A2E"/>
-                </a:solidFill>
-                <a:latin typeface="Meiryo" pitchFamily="34" charset="0"/>
-                <a:ea typeface="Meiryo" pitchFamily="34" charset="-122"/>
-                <a:cs typeface="Meiryo" pitchFamily="34" charset="-120"/>
-              </a:rPr>
-              <a:t>中長期持続性（強くする／ムラ）</a:t>
-            </a:r>
-            <a:endParaRPr lang="en-US" sz="1200" dirty="0"/>
-          </a:p>
-        </p:txBody>
-      </p:sp>
-      <p:sp>
-        <p:nvSpPr>
-          <p:cNvPr id="24" name="Shape 22"/>
-          <p:cNvSpPr/>
-          <p:nvPr/>
-        </p:nvSpPr>
-        <p:spPr>
-          <a:xfrm>
-            <a:off x="365760" y="4379976"/>
-            <a:ext cx="8412480" cy="457200"/>
-          </a:xfrm>
-          <a:prstGeom prst="roundRect">
-            <a:avLst>
-              <a:gd name="adj" fmla="val 6000"/>
-            </a:avLst>
-          </a:prstGeom>
-          <a:solidFill>
-            <a:srgbClr val="F8FAFC"/>
-          </a:solidFill>
-          <a:ln w="12700">
-            <a:solidFill>
-              <a:srgbClr val="444466"/>
-            </a:solidFill>
-            <a:prstDash val="solid"/>
-          </a:ln>
-        </p:spPr>
-      </p:sp>
-      <p:sp>
-        <p:nvSpPr>
-          <p:cNvPr id="25" name="Text 23"/>
-          <p:cNvSpPr/>
-          <p:nvPr/>
-        </p:nvSpPr>
-        <p:spPr>
-          <a:xfrm>
-            <a:off x="502920" y="4379976"/>
-            <a:ext cx="8138160" cy="457200"/>
-          </a:xfrm>
-          <a:prstGeom prst="rect">
-            <a:avLst/>
-          </a:prstGeom>
-          <a:noFill/>
-          <a:ln/>
-        </p:spPr>
-        <p:txBody>
-          <a:bodyPr wrap="square" lIns="0" tIns="0" rIns="0" bIns="0" rtlCol="0" anchor="ctr"/>
-          <a:lstStyle/>
-          <a:p>
-            <a:pPr algn="l" indent="0" marL="0">
-              <a:buNone/>
-            </a:pPr>
-            <a:r>
-              <a:rPr lang="en-US" sz="1200" b="1" dirty="0">
-                <a:solidFill>
-                  <a:srgbClr val="004098"/>
-                </a:solidFill>
-                <a:latin typeface="Meiryo" pitchFamily="34" charset="0"/>
-                <a:ea typeface="Meiryo" pitchFamily="34" charset="-122"/>
-                <a:cs typeface="Meiryo" pitchFamily="34" charset="-120"/>
-              </a:rPr>
-              <a:t>基盤KR3 事業貢献PDCA</a:t>
-            </a:r>
-            <a:pPr algn="l" indent="0" marL="0">
-              <a:buNone/>
-            </a:pPr>
-            <a:r>
-              <a:rPr lang="en-US" sz="1100" dirty="0">
-                <a:solidFill>
-                  <a:srgbClr val="444466"/>
-                </a:solidFill>
-                <a:latin typeface="Meiryo" pitchFamily="34" charset="0"/>
-                <a:ea typeface="Meiryo" pitchFamily="34" charset="-122"/>
-                <a:cs typeface="Meiryo" pitchFamily="34" charset="-120"/>
-              </a:rPr>
-              <a:t>  —  </a:t>
-            </a:r>
-            <a:pPr algn="l" indent="0" marL="0">
-              <a:buNone/>
-            </a:pPr>
-            <a:r>
-              <a:rPr lang="en-US" sz="1100" dirty="0">
-                <a:solidFill>
-                  <a:srgbClr val="1A1A2E"/>
-                </a:solidFill>
-                <a:latin typeface="Meiryo" pitchFamily="34" charset="0"/>
-                <a:ea typeface="Meiryo" pitchFamily="34" charset="-122"/>
-                <a:cs typeface="Meiryo" pitchFamily="34" charset="-120"/>
-              </a:rPr>
-              <a:t>外部妥当性チェック（見極め×強く）</a:t>
+                  <a:srgbClr val="065F46"/>
+                </a:solidFill>
+                <a:latin typeface="Meiryo" pitchFamily="34" charset="0"/>
+                <a:ea typeface="Meiryo" pitchFamily="34" charset="-122"/>
+                <a:cs typeface="Meiryo" pitchFamily="34" charset="-120"/>
+              </a:rPr>
+              <a:t>先行KPI（途中確認指標）：四半期振り返り実施率（計画通り1Q・2Q・3Q末に実施できたか）　／　アンケート・面談カバー率（配置メンバー・事業側双方で対象者をカバーできたか）</a:t>
             </a:r>
             <a:endParaRPr lang="en-US" sz="1200" dirty="0"/>
           </a:p>
@@ -8093,7 +8680,7 @@
                 <a:ea typeface="Meiryo" pitchFamily="34" charset="-122"/>
                 <a:cs typeface="Meiryo" pitchFamily="34" charset="-120"/>
               </a:rPr>
-              <a:t>DMチーム FY26 OKR  &gt;  別論点①</a:t>
+              <a:t>DMチーム FY26 OKR  &gt;  KR間連動</a:t>
             </a:r>
             <a:endParaRPr lang="en-US" sz="900" dirty="0"/>
           </a:p>
@@ -8207,7 +8794,7 @@
                 <a:ea typeface="Meiryo" pitchFamily="34" charset="-122"/>
                 <a:cs typeface="Meiryo" pitchFamily="34" charset="-120"/>
               </a:rPr>
-              <a:t>財務・労務・資産・セキュリティはMission射程外 ── 中長期の組織分離を議題化したい</a:t>
+              <a:t>挑戦3KRが循環し、基盤3KRが支える ── 6KRで成果の方程式を回す</a:t>
             </a:r>
             <a:endParaRPr lang="en-US" sz="1800" dirty="0"/>
           </a:p>
@@ -8271,6 +8858,961 @@
                 <a:ea typeface="Meiryo" pitchFamily="34" charset="-122"/>
                 <a:cs typeface="Meiryo" pitchFamily="34" charset="-120"/>
               </a:rPr>
+              <a:t>だから、6KRは一体で動く設計。どれか1本だけ追っても成果は出ない</a:t>
+            </a:r>
+            <a:endParaRPr lang="en-US" sz="1200" dirty="0"/>
+          </a:p>
+        </p:txBody>
+      </p:sp>
+      <p:sp>
+        <p:nvSpPr>
+          <p:cNvPr id="9" name="Shape 7"/>
+          <p:cNvSpPr/>
+          <p:nvPr/>
+        </p:nvSpPr>
+        <p:spPr>
+          <a:xfrm>
+            <a:off x="685800" y="1554480"/>
+            <a:ext cx="2286000" cy="777240"/>
+          </a:xfrm>
+          <a:prstGeom prst="roundRect">
+            <a:avLst>
+              <a:gd name="adj" fmla="val 3529"/>
+            </a:avLst>
+          </a:prstGeom>
+          <a:solidFill>
+            <a:srgbClr val="EEF3FA"/>
+          </a:solidFill>
+          <a:ln w="19050">
+            <a:solidFill>
+              <a:srgbClr val="004098"/>
+            </a:solidFill>
+            <a:prstDash val="solid"/>
+          </a:ln>
+        </p:spPr>
+      </p:sp>
+      <p:sp>
+        <p:nvSpPr>
+          <p:cNvPr id="10" name="Text 8"/>
+          <p:cNvSpPr/>
+          <p:nvPr/>
+        </p:nvSpPr>
+        <p:spPr>
+          <a:xfrm>
+            <a:off x="685800" y="1554480"/>
+            <a:ext cx="2286000" cy="777240"/>
+          </a:xfrm>
+          <a:prstGeom prst="rect">
+            <a:avLst/>
+          </a:prstGeom>
+          <a:noFill/>
+          <a:ln/>
+        </p:spPr>
+        <p:txBody>
+          <a:bodyPr wrap="square" lIns="0" tIns="0" rIns="0" bIns="0" rtlCol="0" anchor="ctr"/>
+          <a:lstStyle/>
+          <a:p>
+            <a:pPr algn="ctr" indent="0" marL="0">
+              <a:buNone/>
+            </a:pPr>
+            <a:r>
+              <a:rPr lang="en-US" sz="1300" b="1" dirty="0">
+                <a:solidFill>
+                  <a:srgbClr val="004098"/>
+                </a:solidFill>
+                <a:latin typeface="Meiryo" pitchFamily="34" charset="0"/>
+                <a:ea typeface="Meiryo" pitchFamily="34" charset="-122"/>
+                <a:cs typeface="Meiryo" pitchFamily="34" charset="-120"/>
+              </a:rPr>
+              <a:t>挑戦KR1
+</a:t>
+            </a:r>
+            <a:pPr algn="ctr" indent="0" marL="0">
+              <a:buNone/>
+            </a:pPr>
+            <a:r>
+              <a:rPr lang="en-US" sz="1200" dirty="0">
+                <a:solidFill>
+                  <a:srgbClr val="1A1A2E"/>
+                </a:solidFill>
+                <a:latin typeface="Meiryo" pitchFamily="34" charset="0"/>
+                <a:ea typeface="Meiryo" pitchFamily="34" charset="-122"/>
+                <a:cs typeface="Meiryo" pitchFamily="34" charset="-120"/>
+              </a:rPr>
+              <a:t>入口品質</a:t>
+            </a:r>
+            <a:endParaRPr lang="en-US" sz="1300" dirty="0"/>
+          </a:p>
+        </p:txBody>
+      </p:sp>
+      <p:sp>
+        <p:nvSpPr>
+          <p:cNvPr id="11" name="Text 9"/>
+          <p:cNvSpPr/>
+          <p:nvPr/>
+        </p:nvSpPr>
+        <p:spPr>
+          <a:xfrm>
+            <a:off x="3017520" y="1787652"/>
+            <a:ext cx="502920" cy="310896"/>
+          </a:xfrm>
+          <a:prstGeom prst="rect">
+            <a:avLst/>
+          </a:prstGeom>
+          <a:noFill/>
+          <a:ln/>
+        </p:spPr>
+        <p:txBody>
+          <a:bodyPr wrap="square" lIns="0" tIns="0" rIns="0" bIns="0" rtlCol="0" anchor="ctr"/>
+          <a:lstStyle/>
+          <a:p>
+            <a:pPr algn="ctr" indent="0" marL="0">
+              <a:buNone/>
+            </a:pPr>
+            <a:r>
+              <a:rPr lang="en-US" sz="2000" dirty="0">
+                <a:solidFill>
+                  <a:srgbClr val="DC2626"/>
+                </a:solidFill>
+                <a:latin typeface="Arial" pitchFamily="34" charset="0"/>
+                <a:ea typeface="Arial" pitchFamily="34" charset="-122"/>
+                <a:cs typeface="Arial" pitchFamily="34" charset="-120"/>
+              </a:rPr>
+              <a:t>▶</a:t>
+            </a:r>
+            <a:endParaRPr lang="en-US" sz="2000" dirty="0"/>
+          </a:p>
+        </p:txBody>
+      </p:sp>
+      <p:sp>
+        <p:nvSpPr>
+          <p:cNvPr id="12" name="Shape 10"/>
+          <p:cNvSpPr/>
+          <p:nvPr/>
+        </p:nvSpPr>
+        <p:spPr>
+          <a:xfrm>
+            <a:off x="3566160" y="1554480"/>
+            <a:ext cx="2286000" cy="777240"/>
+          </a:xfrm>
+          <a:prstGeom prst="roundRect">
+            <a:avLst>
+              <a:gd name="adj" fmla="val 3529"/>
+            </a:avLst>
+          </a:prstGeom>
+          <a:solidFill>
+            <a:srgbClr val="EEF3FA"/>
+          </a:solidFill>
+          <a:ln w="19050">
+            <a:solidFill>
+              <a:srgbClr val="004098"/>
+            </a:solidFill>
+            <a:prstDash val="solid"/>
+          </a:ln>
+        </p:spPr>
+      </p:sp>
+      <p:sp>
+        <p:nvSpPr>
+          <p:cNvPr id="13" name="Text 11"/>
+          <p:cNvSpPr/>
+          <p:nvPr/>
+        </p:nvSpPr>
+        <p:spPr>
+          <a:xfrm>
+            <a:off x="3566160" y="1554480"/>
+            <a:ext cx="2286000" cy="777240"/>
+          </a:xfrm>
+          <a:prstGeom prst="rect">
+            <a:avLst/>
+          </a:prstGeom>
+          <a:noFill/>
+          <a:ln/>
+        </p:spPr>
+        <p:txBody>
+          <a:bodyPr wrap="square" lIns="0" tIns="0" rIns="0" bIns="0" rtlCol="0" anchor="ctr"/>
+          <a:lstStyle/>
+          <a:p>
+            <a:pPr algn="ctr" indent="0" marL="0">
+              <a:buNone/>
+            </a:pPr>
+            <a:r>
+              <a:rPr lang="en-US" sz="1300" b="1" dirty="0">
+                <a:solidFill>
+                  <a:srgbClr val="004098"/>
+                </a:solidFill>
+                <a:latin typeface="Meiryo" pitchFamily="34" charset="0"/>
+                <a:ea typeface="Meiryo" pitchFamily="34" charset="-122"/>
+                <a:cs typeface="Meiryo" pitchFamily="34" charset="-120"/>
+              </a:rPr>
+              <a:t>挑戦KR2
+</a:t>
+            </a:r>
+            <a:pPr algn="ctr" indent="0" marL="0">
+              <a:buNone/>
+            </a:pPr>
+            <a:r>
+              <a:rPr lang="en-US" sz="1200" dirty="0">
+                <a:solidFill>
+                  <a:srgbClr val="1A1A2E"/>
+                </a:solidFill>
+                <a:latin typeface="Meiryo" pitchFamily="34" charset="0"/>
+                <a:ea typeface="Meiryo" pitchFamily="34" charset="-122"/>
+                <a:cs typeface="Meiryo" pitchFamily="34" charset="-120"/>
+              </a:rPr>
+              <a:t>フロー効率</a:t>
+            </a:r>
+            <a:endParaRPr lang="en-US" sz="1300" dirty="0"/>
+          </a:p>
+        </p:txBody>
+      </p:sp>
+      <p:sp>
+        <p:nvSpPr>
+          <p:cNvPr id="14" name="Text 12"/>
+          <p:cNvSpPr/>
+          <p:nvPr/>
+        </p:nvSpPr>
+        <p:spPr>
+          <a:xfrm>
+            <a:off x="5897880" y="1787652"/>
+            <a:ext cx="502920" cy="310896"/>
+          </a:xfrm>
+          <a:prstGeom prst="rect">
+            <a:avLst/>
+          </a:prstGeom>
+          <a:noFill/>
+          <a:ln/>
+        </p:spPr>
+        <p:txBody>
+          <a:bodyPr wrap="square" lIns="0" tIns="0" rIns="0" bIns="0" rtlCol="0" anchor="ctr"/>
+          <a:lstStyle/>
+          <a:p>
+            <a:pPr algn="ctr" indent="0" marL="0">
+              <a:buNone/>
+            </a:pPr>
+            <a:r>
+              <a:rPr lang="en-US" sz="2000" dirty="0">
+                <a:solidFill>
+                  <a:srgbClr val="DC2626"/>
+                </a:solidFill>
+                <a:latin typeface="Arial" pitchFamily="34" charset="0"/>
+                <a:ea typeface="Arial" pitchFamily="34" charset="-122"/>
+                <a:cs typeface="Arial" pitchFamily="34" charset="-120"/>
+              </a:rPr>
+              <a:t>▶</a:t>
+            </a:r>
+            <a:endParaRPr lang="en-US" sz="2000" dirty="0"/>
+          </a:p>
+        </p:txBody>
+      </p:sp>
+      <p:sp>
+        <p:nvSpPr>
+          <p:cNvPr id="15" name="Shape 13"/>
+          <p:cNvSpPr/>
+          <p:nvPr/>
+        </p:nvSpPr>
+        <p:spPr>
+          <a:xfrm>
+            <a:off x="6446520" y="1554480"/>
+            <a:ext cx="2286000" cy="777240"/>
+          </a:xfrm>
+          <a:prstGeom prst="roundRect">
+            <a:avLst>
+              <a:gd name="adj" fmla="val 3529"/>
+            </a:avLst>
+          </a:prstGeom>
+          <a:solidFill>
+            <a:srgbClr val="EEF3FA"/>
+          </a:solidFill>
+          <a:ln w="19050">
+            <a:solidFill>
+              <a:srgbClr val="004098"/>
+            </a:solidFill>
+            <a:prstDash val="solid"/>
+          </a:ln>
+        </p:spPr>
+      </p:sp>
+      <p:sp>
+        <p:nvSpPr>
+          <p:cNvPr id="16" name="Text 14"/>
+          <p:cNvSpPr/>
+          <p:nvPr/>
+        </p:nvSpPr>
+        <p:spPr>
+          <a:xfrm>
+            <a:off x="6446520" y="1554480"/>
+            <a:ext cx="2286000" cy="777240"/>
+          </a:xfrm>
+          <a:prstGeom prst="rect">
+            <a:avLst/>
+          </a:prstGeom>
+          <a:noFill/>
+          <a:ln/>
+        </p:spPr>
+        <p:txBody>
+          <a:bodyPr wrap="square" lIns="0" tIns="0" rIns="0" bIns="0" rtlCol="0" anchor="ctr"/>
+          <a:lstStyle/>
+          <a:p>
+            <a:pPr algn="ctr" indent="0" marL="0">
+              <a:buNone/>
+            </a:pPr>
+            <a:r>
+              <a:rPr lang="en-US" sz="1300" b="1" dirty="0">
+                <a:solidFill>
+                  <a:srgbClr val="004098"/>
+                </a:solidFill>
+                <a:latin typeface="Meiryo" pitchFamily="34" charset="0"/>
+                <a:ea typeface="Meiryo" pitchFamily="34" charset="-122"/>
+                <a:cs typeface="Meiryo" pitchFamily="34" charset="-120"/>
+              </a:rPr>
+              <a:t>挑戦KR3
+</a:t>
+            </a:r>
+            <a:pPr algn="ctr" indent="0" marL="0">
+              <a:buNone/>
+            </a:pPr>
+            <a:r>
+              <a:rPr lang="en-US" sz="1200" dirty="0">
+                <a:solidFill>
+                  <a:srgbClr val="1A1A2E"/>
+                </a:solidFill>
+                <a:latin typeface="Meiryo" pitchFamily="34" charset="0"/>
+                <a:ea typeface="Meiryo" pitchFamily="34" charset="-122"/>
+                <a:cs typeface="Meiryo" pitchFamily="34" charset="-120"/>
+              </a:rPr>
+              <a:t>学習ループ</a:t>
+            </a:r>
+            <a:endParaRPr lang="en-US" sz="1300" dirty="0"/>
+          </a:p>
+        </p:txBody>
+      </p:sp>
+      <p:sp>
+        <p:nvSpPr>
+          <p:cNvPr id="17" name="Text 15"/>
+          <p:cNvSpPr/>
+          <p:nvPr/>
+        </p:nvSpPr>
+        <p:spPr>
+          <a:xfrm>
+            <a:off x="685800" y="2423160"/>
+            <a:ext cx="8046720" cy="274320"/>
+          </a:xfrm>
+          <a:prstGeom prst="rect">
+            <a:avLst/>
+          </a:prstGeom>
+          <a:noFill/>
+          <a:ln/>
+        </p:spPr>
+        <p:txBody>
+          <a:bodyPr wrap="square" lIns="0" tIns="0" rIns="0" bIns="0" rtlCol="0" anchor="ctr"/>
+          <a:lstStyle/>
+          <a:p>
+            <a:pPr algn="ctr" indent="0" marL="0">
+              <a:buNone/>
+            </a:pPr>
+            <a:r>
+              <a:rPr lang="en-US" sz="1100" i="1" dirty="0">
+                <a:solidFill>
+                  <a:srgbClr val="DC2626"/>
+                </a:solidFill>
+                <a:latin typeface="Meiryo" pitchFamily="34" charset="0"/>
+                <a:ea typeface="Meiryo" pitchFamily="34" charset="-122"/>
+                <a:cs typeface="Meiryo" pitchFamily="34" charset="-120"/>
+              </a:rPr>
+              <a:t>◀ 学びが仮説精度を高める（KR3 → KR1）</a:t>
+            </a:r>
+            <a:endParaRPr lang="en-US" sz="1100" dirty="0"/>
+          </a:p>
+        </p:txBody>
+      </p:sp>
+      <p:sp>
+        <p:nvSpPr>
+          <p:cNvPr id="18" name="Shape 16"/>
+          <p:cNvSpPr/>
+          <p:nvPr/>
+        </p:nvSpPr>
+        <p:spPr>
+          <a:xfrm>
+            <a:off x="365760" y="2880360"/>
+            <a:ext cx="8412480" cy="10973"/>
+          </a:xfrm>
+          <a:prstGeom prst="rect">
+            <a:avLst/>
+          </a:prstGeom>
+          <a:solidFill>
+            <a:srgbClr val="CADCFC"/>
+          </a:solidFill>
+          <a:ln w="12700">
+            <a:solidFill>
+              <a:srgbClr val="CADCFC"/>
+            </a:solidFill>
+            <a:prstDash val="solid"/>
+          </a:ln>
+        </p:spPr>
+      </p:sp>
+      <p:sp>
+        <p:nvSpPr>
+          <p:cNvPr id="19" name="Text 17"/>
+          <p:cNvSpPr/>
+          <p:nvPr/>
+        </p:nvSpPr>
+        <p:spPr>
+          <a:xfrm>
+            <a:off x="365760" y="2926080"/>
+            <a:ext cx="8412480" cy="274320"/>
+          </a:xfrm>
+          <a:prstGeom prst="rect">
+            <a:avLst/>
+          </a:prstGeom>
+          <a:noFill/>
+          <a:ln/>
+        </p:spPr>
+        <p:txBody>
+          <a:bodyPr wrap="square" lIns="0" tIns="0" rIns="0" bIns="0" rtlCol="0" anchor="ctr"/>
+          <a:lstStyle/>
+          <a:p>
+            <a:pPr algn="ctr" indent="0" marL="0">
+              <a:buNone/>
+            </a:pPr>
+            <a:r>
+              <a:rPr lang="en-US" sz="1100" b="1" dirty="0">
+                <a:solidFill>
+                  <a:srgbClr val="444466"/>
+                </a:solidFill>
+                <a:latin typeface="Meiryo" pitchFamily="34" charset="0"/>
+                <a:ea typeface="Meiryo" pitchFamily="34" charset="-122"/>
+                <a:cs typeface="Meiryo" pitchFamily="34" charset="-120"/>
+              </a:rPr>
+              <a:t>── 挑戦3KR すべての前提・支え（基盤3KR）──</a:t>
+            </a:r>
+            <a:endParaRPr lang="en-US" sz="1100" dirty="0"/>
+          </a:p>
+        </p:txBody>
+      </p:sp>
+      <p:sp>
+        <p:nvSpPr>
+          <p:cNvPr id="20" name="Shape 18"/>
+          <p:cNvSpPr/>
+          <p:nvPr/>
+        </p:nvSpPr>
+        <p:spPr>
+          <a:xfrm>
+            <a:off x="365760" y="3246120"/>
+            <a:ext cx="8412480" cy="457200"/>
+          </a:xfrm>
+          <a:prstGeom prst="roundRect">
+            <a:avLst>
+              <a:gd name="adj" fmla="val 6000"/>
+            </a:avLst>
+          </a:prstGeom>
+          <a:solidFill>
+            <a:srgbClr val="F8FAFC"/>
+          </a:solidFill>
+          <a:ln w="12700">
+            <a:solidFill>
+              <a:srgbClr val="444466"/>
+            </a:solidFill>
+            <a:prstDash val="solid"/>
+          </a:ln>
+        </p:spPr>
+      </p:sp>
+      <p:sp>
+        <p:nvSpPr>
+          <p:cNvPr id="21" name="Text 19"/>
+          <p:cNvSpPr/>
+          <p:nvPr/>
+        </p:nvSpPr>
+        <p:spPr>
+          <a:xfrm>
+            <a:off x="502920" y="3246120"/>
+            <a:ext cx="8138160" cy="457200"/>
+          </a:xfrm>
+          <a:prstGeom prst="rect">
+            <a:avLst/>
+          </a:prstGeom>
+          <a:noFill/>
+          <a:ln/>
+        </p:spPr>
+        <p:txBody>
+          <a:bodyPr wrap="square" lIns="0" tIns="0" rIns="0" bIns="0" rtlCol="0" anchor="ctr"/>
+          <a:lstStyle/>
+          <a:p>
+            <a:pPr algn="l" indent="0" marL="0">
+              <a:buNone/>
+            </a:pPr>
+            <a:r>
+              <a:rPr lang="en-US" sz="1200" b="1" dirty="0">
+                <a:solidFill>
+                  <a:srgbClr val="004098"/>
+                </a:solidFill>
+                <a:latin typeface="Meiryo" pitchFamily="34" charset="0"/>
+                <a:ea typeface="Meiryo" pitchFamily="34" charset="-122"/>
+                <a:cs typeface="Meiryo" pitchFamily="34" charset="-120"/>
+              </a:rPr>
+              <a:t>基盤KR1 健全性＋開発環境</a:t>
+            </a:r>
+            <a:pPr algn="l" indent="0" marL="0">
+              <a:buNone/>
+            </a:pPr>
+            <a:r>
+              <a:rPr lang="en-US" sz="1100" dirty="0">
+                <a:solidFill>
+                  <a:srgbClr val="444466"/>
+                </a:solidFill>
+                <a:latin typeface="Meiryo" pitchFamily="34" charset="0"/>
+                <a:ea typeface="Meiryo" pitchFamily="34" charset="-122"/>
+                <a:cs typeface="Meiryo" pitchFamily="34" charset="-120"/>
+              </a:rPr>
+              <a:t>  —  </a:t>
+            </a:r>
+            <a:pPr algn="l" indent="0" marL="0">
+              <a:buNone/>
+            </a:pPr>
+            <a:r>
+              <a:rPr lang="en-US" sz="1100" dirty="0">
+                <a:solidFill>
+                  <a:srgbClr val="1A1A2E"/>
+                </a:solidFill>
+                <a:latin typeface="Meiryo" pitchFamily="34" charset="0"/>
+                <a:ea typeface="Meiryo" pitchFamily="34" charset="-122"/>
+                <a:cs typeface="Meiryo" pitchFamily="34" charset="-120"/>
+              </a:rPr>
+              <a:t>前提条件＋安全装置（守る／ムリ）</a:t>
+            </a:r>
+            <a:endParaRPr lang="en-US" sz="1200" dirty="0"/>
+          </a:p>
+        </p:txBody>
+      </p:sp>
+      <p:sp>
+        <p:nvSpPr>
+          <p:cNvPr id="22" name="Shape 20"/>
+          <p:cNvSpPr/>
+          <p:nvPr/>
+        </p:nvSpPr>
+        <p:spPr>
+          <a:xfrm>
+            <a:off x="365760" y="3813048"/>
+            <a:ext cx="8412480" cy="457200"/>
+          </a:xfrm>
+          <a:prstGeom prst="roundRect">
+            <a:avLst>
+              <a:gd name="adj" fmla="val 6000"/>
+            </a:avLst>
+          </a:prstGeom>
+          <a:solidFill>
+            <a:srgbClr val="F8FAFC"/>
+          </a:solidFill>
+          <a:ln w="12700">
+            <a:solidFill>
+              <a:srgbClr val="444466"/>
+            </a:solidFill>
+            <a:prstDash val="solid"/>
+          </a:ln>
+        </p:spPr>
+      </p:sp>
+      <p:sp>
+        <p:nvSpPr>
+          <p:cNvPr id="23" name="Text 21"/>
+          <p:cNvSpPr/>
+          <p:nvPr/>
+        </p:nvSpPr>
+        <p:spPr>
+          <a:xfrm>
+            <a:off x="502920" y="3813048"/>
+            <a:ext cx="8138160" cy="457200"/>
+          </a:xfrm>
+          <a:prstGeom prst="rect">
+            <a:avLst/>
+          </a:prstGeom>
+          <a:noFill/>
+          <a:ln/>
+        </p:spPr>
+        <p:txBody>
+          <a:bodyPr wrap="square" lIns="0" tIns="0" rIns="0" bIns="0" rtlCol="0" anchor="ctr"/>
+          <a:lstStyle/>
+          <a:p>
+            <a:pPr algn="l" indent="0" marL="0">
+              <a:buNone/>
+            </a:pPr>
+            <a:r>
+              <a:rPr lang="en-US" sz="1200" b="1" dirty="0">
+                <a:solidFill>
+                  <a:srgbClr val="004098"/>
+                </a:solidFill>
+                <a:latin typeface="Meiryo" pitchFamily="34" charset="0"/>
+                <a:ea typeface="Meiryo" pitchFamily="34" charset="-122"/>
+                <a:cs typeface="Meiryo" pitchFamily="34" charset="-120"/>
+              </a:rPr>
+              <a:t>基盤KR2 能力の多面的強化</a:t>
+            </a:r>
+            <a:pPr algn="l" indent="0" marL="0">
+              <a:buNone/>
+            </a:pPr>
+            <a:r>
+              <a:rPr lang="en-US" sz="1100" dirty="0">
+                <a:solidFill>
+                  <a:srgbClr val="444466"/>
+                </a:solidFill>
+                <a:latin typeface="Meiryo" pitchFamily="34" charset="0"/>
+                <a:ea typeface="Meiryo" pitchFamily="34" charset="-122"/>
+                <a:cs typeface="Meiryo" pitchFamily="34" charset="-120"/>
+              </a:rPr>
+              <a:t>  —  </a:t>
+            </a:r>
+            <a:pPr algn="l" indent="0" marL="0">
+              <a:buNone/>
+            </a:pPr>
+            <a:r>
+              <a:rPr lang="en-US" sz="1100" dirty="0">
+                <a:solidFill>
+                  <a:srgbClr val="1A1A2E"/>
+                </a:solidFill>
+                <a:latin typeface="Meiryo" pitchFamily="34" charset="0"/>
+                <a:ea typeface="Meiryo" pitchFamily="34" charset="-122"/>
+                <a:cs typeface="Meiryo" pitchFamily="34" charset="-120"/>
+              </a:rPr>
+              <a:t>中長期持続性（強くする／ムラ）</a:t>
+            </a:r>
+            <a:endParaRPr lang="en-US" sz="1200" dirty="0"/>
+          </a:p>
+        </p:txBody>
+      </p:sp>
+      <p:sp>
+        <p:nvSpPr>
+          <p:cNvPr id="24" name="Shape 22"/>
+          <p:cNvSpPr/>
+          <p:nvPr/>
+        </p:nvSpPr>
+        <p:spPr>
+          <a:xfrm>
+            <a:off x="365760" y="4379976"/>
+            <a:ext cx="8412480" cy="457200"/>
+          </a:xfrm>
+          <a:prstGeom prst="roundRect">
+            <a:avLst>
+              <a:gd name="adj" fmla="val 6000"/>
+            </a:avLst>
+          </a:prstGeom>
+          <a:solidFill>
+            <a:srgbClr val="F8FAFC"/>
+          </a:solidFill>
+          <a:ln w="12700">
+            <a:solidFill>
+              <a:srgbClr val="444466"/>
+            </a:solidFill>
+            <a:prstDash val="solid"/>
+          </a:ln>
+        </p:spPr>
+      </p:sp>
+      <p:sp>
+        <p:nvSpPr>
+          <p:cNvPr id="25" name="Text 23"/>
+          <p:cNvSpPr/>
+          <p:nvPr/>
+        </p:nvSpPr>
+        <p:spPr>
+          <a:xfrm>
+            <a:off x="502920" y="4379976"/>
+            <a:ext cx="8138160" cy="457200"/>
+          </a:xfrm>
+          <a:prstGeom prst="rect">
+            <a:avLst/>
+          </a:prstGeom>
+          <a:noFill/>
+          <a:ln/>
+        </p:spPr>
+        <p:txBody>
+          <a:bodyPr wrap="square" lIns="0" tIns="0" rIns="0" bIns="0" rtlCol="0" anchor="ctr"/>
+          <a:lstStyle/>
+          <a:p>
+            <a:pPr algn="l" indent="0" marL="0">
+              <a:buNone/>
+            </a:pPr>
+            <a:r>
+              <a:rPr lang="en-US" sz="1200" b="1" dirty="0">
+                <a:solidFill>
+                  <a:srgbClr val="004098"/>
+                </a:solidFill>
+                <a:latin typeface="Meiryo" pitchFamily="34" charset="0"/>
+                <a:ea typeface="Meiryo" pitchFamily="34" charset="-122"/>
+                <a:cs typeface="Meiryo" pitchFamily="34" charset="-120"/>
+              </a:rPr>
+              <a:t>基盤KR3 事業貢献PDCA</a:t>
+            </a:r>
+            <a:pPr algn="l" indent="0" marL="0">
+              <a:buNone/>
+            </a:pPr>
+            <a:r>
+              <a:rPr lang="en-US" sz="1100" dirty="0">
+                <a:solidFill>
+                  <a:srgbClr val="444466"/>
+                </a:solidFill>
+                <a:latin typeface="Meiryo" pitchFamily="34" charset="0"/>
+                <a:ea typeface="Meiryo" pitchFamily="34" charset="-122"/>
+                <a:cs typeface="Meiryo" pitchFamily="34" charset="-120"/>
+              </a:rPr>
+              <a:t>  —  </a:t>
+            </a:r>
+            <a:pPr algn="l" indent="0" marL="0">
+              <a:buNone/>
+            </a:pPr>
+            <a:r>
+              <a:rPr lang="en-US" sz="1100" dirty="0">
+                <a:solidFill>
+                  <a:srgbClr val="1A1A2E"/>
+                </a:solidFill>
+                <a:latin typeface="Meiryo" pitchFamily="34" charset="0"/>
+                <a:ea typeface="Meiryo" pitchFamily="34" charset="-122"/>
+                <a:cs typeface="Meiryo" pitchFamily="34" charset="-120"/>
+              </a:rPr>
+              <a:t>外部妥当性チェック（見極め×強く）</a:t>
+            </a:r>
+            <a:endParaRPr lang="en-US" sz="1200" dirty="0"/>
+          </a:p>
+        </p:txBody>
+      </p:sp>
+    </p:spTree>
+  </p:cSld>
+  <p:clrMapOvr>
+    <a:masterClrMapping/>
+  </p:clrMapOvr>
+</p:sld>
+</file>
+
+<file path=ppt/slides/slide17.xml><?xml version="1.0" encoding="utf-8"?>
+<p:sld xmlns:a="http://schemas.openxmlformats.org/drawingml/2006/main" xmlns:r="http://schemas.openxmlformats.org/officeDocument/2006/relationships" xmlns:p="http://schemas.openxmlformats.org/presentationml/2006/main">
+  <p:cSld name="Slide 17">
+    <p:bg>
+      <p:bgPr>
+        <a:solidFill>
+          <a:srgbClr val="FFFFFF"/>
+        </a:solidFill>
+      </p:bgPr>
+    </p:bg>
+    <p:spTree>
+      <p:nvGrpSpPr>
+        <p:cNvPr id="1" name=""/>
+        <p:cNvGrpSpPr/>
+        <p:nvPr/>
+      </p:nvGrpSpPr>
+      <p:grpSpPr>
+        <a:xfrm>
+          <a:off x="0" y="0"/>
+          <a:ext cx="0" cy="0"/>
+          <a:chOff x="0" y="0"/>
+          <a:chExt cx="0" cy="0"/>
+        </a:xfrm>
+      </p:grpSpPr>
+      <p:sp>
+        <p:nvSpPr>
+          <p:cNvPr id="2" name="Text 0"/>
+          <p:cNvSpPr/>
+          <p:nvPr/>
+        </p:nvSpPr>
+        <p:spPr>
+          <a:xfrm>
+            <a:off x="365760" y="73152"/>
+            <a:ext cx="8412480" cy="201168"/>
+          </a:xfrm>
+          <a:prstGeom prst="rect">
+            <a:avLst/>
+          </a:prstGeom>
+          <a:noFill/>
+          <a:ln/>
+        </p:spPr>
+        <p:txBody>
+          <a:bodyPr wrap="square" lIns="0" tIns="0" rIns="0" bIns="0" rtlCol="0" anchor="ctr"/>
+          <a:lstStyle/>
+          <a:p>
+            <a:pPr algn="l" indent="0" marL="0">
+              <a:buNone/>
+            </a:pPr>
+            <a:r>
+              <a:rPr lang="en-US" sz="900" dirty="0">
+                <a:solidFill>
+                  <a:srgbClr val="444466"/>
+                </a:solidFill>
+                <a:latin typeface="Meiryo" pitchFamily="34" charset="0"/>
+                <a:ea typeface="Meiryo" pitchFamily="34" charset="-122"/>
+                <a:cs typeface="Meiryo" pitchFamily="34" charset="-120"/>
+              </a:rPr>
+              <a:t>DMチーム FY26 OKR  &gt;  別論点①</a:t>
+            </a:r>
+            <a:endParaRPr lang="en-US" sz="900" dirty="0"/>
+          </a:p>
+        </p:txBody>
+      </p:sp>
+      <p:sp>
+        <p:nvSpPr>
+          <p:cNvPr id="3" name="Shape 1"/>
+          <p:cNvSpPr/>
+          <p:nvPr/>
+        </p:nvSpPr>
+        <p:spPr>
+          <a:xfrm>
+            <a:off x="0" y="310896"/>
+            <a:ext cx="9144000" cy="9144"/>
+          </a:xfrm>
+          <a:prstGeom prst="rect">
+            <a:avLst/>
+          </a:prstGeom>
+          <a:solidFill>
+            <a:srgbClr val="CADCFC"/>
+          </a:solidFill>
+          <a:ln w="12700">
+            <a:solidFill>
+              <a:srgbClr val="CADCFC"/>
+            </a:solidFill>
+            <a:prstDash val="solid"/>
+          </a:ln>
+        </p:spPr>
+      </p:sp>
+      <p:sp>
+        <p:nvSpPr>
+          <p:cNvPr id="4" name="Shape 2"/>
+          <p:cNvSpPr/>
+          <p:nvPr/>
+        </p:nvSpPr>
+        <p:spPr>
+          <a:xfrm>
+            <a:off x="0" y="5084064"/>
+            <a:ext cx="7315200" cy="64008"/>
+          </a:xfrm>
+          <a:prstGeom prst="rect">
+            <a:avLst/>
+          </a:prstGeom>
+          <a:solidFill>
+            <a:srgbClr val="004098"/>
+          </a:solidFill>
+          <a:ln w="12700">
+            <a:solidFill>
+              <a:srgbClr val="004098"/>
+            </a:solidFill>
+            <a:prstDash val="solid"/>
+          </a:ln>
+        </p:spPr>
+      </p:sp>
+      <p:sp>
+        <p:nvSpPr>
+          <p:cNvPr id="5" name="Shape 3"/>
+          <p:cNvSpPr/>
+          <p:nvPr/>
+        </p:nvSpPr>
+        <p:spPr>
+          <a:xfrm>
+            <a:off x="7315200" y="5084064"/>
+            <a:ext cx="1828800" cy="64008"/>
+          </a:xfrm>
+          <a:prstGeom prst="rect">
+            <a:avLst/>
+          </a:prstGeom>
+          <a:solidFill>
+            <a:srgbClr val="DC2626"/>
+          </a:solidFill>
+          <a:ln w="12700">
+            <a:solidFill>
+              <a:srgbClr val="DC2626"/>
+            </a:solidFill>
+            <a:prstDash val="solid"/>
+          </a:ln>
+        </p:spPr>
+      </p:sp>
+      <p:sp>
+        <p:nvSpPr>
+          <p:cNvPr id="6" name="Text 4"/>
+          <p:cNvSpPr/>
+          <p:nvPr/>
+        </p:nvSpPr>
+        <p:spPr>
+          <a:xfrm>
+            <a:off x="365760" y="384048"/>
+            <a:ext cx="8412480" cy="594360"/>
+          </a:xfrm>
+          <a:prstGeom prst="rect">
+            <a:avLst/>
+          </a:prstGeom>
+          <a:noFill/>
+          <a:ln/>
+        </p:spPr>
+        <p:txBody>
+          <a:bodyPr wrap="square" lIns="0" tIns="0" rIns="0" bIns="0" rtlCol="0" anchor="ctr"/>
+          <a:lstStyle/>
+          <a:p>
+            <a:pPr algn="l" indent="0" marL="0">
+              <a:buNone/>
+            </a:pPr>
+            <a:r>
+              <a:rPr lang="en-US" sz="1800" b="1" dirty="0">
+                <a:solidFill>
+                  <a:srgbClr val="1A1A2E"/>
+                </a:solidFill>
+                <a:latin typeface="Meiryo" pitchFamily="34" charset="0"/>
+                <a:ea typeface="Meiryo" pitchFamily="34" charset="-122"/>
+                <a:cs typeface="Meiryo" pitchFamily="34" charset="-120"/>
+              </a:rPr>
+              <a:t>財務・労務・資産・セキュリティはMission射程外 ── 中長期の組織分離を議題化したい</a:t>
+            </a:r>
+            <a:endParaRPr lang="en-US" sz="1800" dirty="0"/>
+          </a:p>
+        </p:txBody>
+      </p:sp>
+      <p:sp>
+        <p:nvSpPr>
+          <p:cNvPr id="7" name="Shape 5"/>
+          <p:cNvSpPr/>
+          <p:nvPr/>
+        </p:nvSpPr>
+        <p:spPr>
+          <a:xfrm>
+            <a:off x="0" y="1051560"/>
+            <a:ext cx="9144000" cy="9144"/>
+          </a:xfrm>
+          <a:prstGeom prst="rect">
+            <a:avLst/>
+          </a:prstGeom>
+          <a:solidFill>
+            <a:srgbClr val="CADCFC"/>
+          </a:solidFill>
+          <a:ln w="12700">
+            <a:solidFill>
+              <a:srgbClr val="CADCFC"/>
+            </a:solidFill>
+            <a:prstDash val="solid"/>
+          </a:ln>
+        </p:spPr>
+      </p:sp>
+      <p:sp>
+        <p:nvSpPr>
+          <p:cNvPr id="8" name="Text 6"/>
+          <p:cNvSpPr/>
+          <p:nvPr/>
+        </p:nvSpPr>
+        <p:spPr>
+          <a:xfrm>
+            <a:off x="365760" y="1097280"/>
+            <a:ext cx="8412480" cy="274320"/>
+          </a:xfrm>
+          <a:prstGeom prst="rect">
+            <a:avLst/>
+          </a:prstGeom>
+          <a:noFill/>
+          <a:ln/>
+        </p:spPr>
+        <p:txBody>
+          <a:bodyPr wrap="square" lIns="0" tIns="0" rIns="0" bIns="0" rtlCol="0" anchor="ctr"/>
+          <a:lstStyle/>
+          <a:p>
+            <a:pPr algn="l" indent="0" marL="0">
+              <a:buNone/>
+            </a:pPr>
+            <a:r>
+              <a:rPr lang="en-US" sz="1200" i="1" dirty="0">
+                <a:solidFill>
+                  <a:srgbClr val="444466"/>
+                </a:solidFill>
+                <a:latin typeface="Meiryo" pitchFamily="34" charset="0"/>
+                <a:ea typeface="Meiryo" pitchFamily="34" charset="-122"/>
+                <a:cs typeface="Meiryo" pitchFamily="34" charset="-120"/>
+              </a:rPr>
               <a:t>だから、今回はOKRに載せず、別論点として認識共有をしたい</a:t>
             </a:r>
             <a:endParaRPr lang="en-US" sz="1200" dirty="0"/>
@@ -8279,7 +9821,7 @@
       </p:sp>
       <p:graphicFrame>
         <p:nvGraphicFramePr>
-          <p:cNvPr id="17" name="Table 0"/>
+          <p:cNvPr id="18" name="Table 0"/>
           <p:cNvGraphicFramePr>
             <a:graphicFrameLocks noGrp="1"/>
           </p:cNvGraphicFramePr>
@@ -9830,9 +11372,9 @@
 </p:sld>
 </file>
 
-<file path=ppt/slides/slide17.xml><?xml version="1.0" encoding="utf-8"?>
+<file path=ppt/slides/slide18.xml><?xml version="1.0" encoding="utf-8"?>
 <p:sld xmlns:a="http://schemas.openxmlformats.org/drawingml/2006/main" xmlns:r="http://schemas.openxmlformats.org/officeDocument/2006/relationships" xmlns:p="http://schemas.openxmlformats.org/presentationml/2006/main">
-  <p:cSld name="Slide 17">
+  <p:cSld name="Slide 18">
     <p:bg>
       <p:bgPr>
         <a:solidFill>
@@ -10073,7 +11615,7 @@
       </p:sp>
       <p:graphicFrame>
         <p:nvGraphicFramePr>
-          <p:cNvPr id="18" name="Table 0"/>
+          <p:cNvPr id="19" name="Table 0"/>
           <p:cNvGraphicFramePr>
             <a:graphicFrameLocks noGrp="1"/>
           </p:cNvGraphicFramePr>
@@ -15002,7 +16544,7 @@
                 <a:ea typeface="Meiryo" pitchFamily="34" charset="-122"/>
                 <a:cs typeface="Meiryo" pitchFamily="34" charset="-120"/>
               </a:rPr>
-              <a:t>DMチーム FY26 OKR  &gt;  OKRツリー</a:t>
+              <a:t>DMチーム FY26 OKR  &gt;  ロジックツリー（問いの形）</a:t>
             </a:r>
             <a:endParaRPr lang="en-US" sz="900" dirty="0"/>
           </a:p>
@@ -15116,7 +16658,7 @@
                 <a:ea typeface="Meiryo" pitchFamily="34" charset="-122"/>
                 <a:cs typeface="Meiryo" pitchFamily="34" charset="-120"/>
               </a:rPr>
-              <a:t>Objectiveは挑戦3KR／基盤3KRに分解される ── 6KRは漏れなくObjectiveを支える</a:t>
+              <a:t>Missionを1つの大きな問いに変換し、6つのKRへ展開する（PLAID方式）</a:t>
             </a:r>
             <a:endParaRPr lang="en-US" sz="1800" dirty="0"/>
           </a:p>
@@ -15180,7 +16722,7 @@
                 <a:ea typeface="Meiryo" pitchFamily="34" charset="-122"/>
                 <a:cs typeface="Meiryo" pitchFamily="34" charset="-120"/>
               </a:rPr>
-              <a:t>だから、6KRは意図的な網羅設計であり、分散した寄せ集めではない</a:t>
+              <a:t>だから、6KRはMissionを漏れなく分解して導出された意図的な網羅設計である</a:t>
             </a:r>
             <a:endParaRPr lang="en-US" sz="1200" dirty="0"/>
           </a:p>
@@ -15194,12 +16736,12 @@
         </p:nvSpPr>
         <p:spPr>
           <a:xfrm>
-            <a:off x="1828800" y="1417320"/>
-            <a:ext cx="5486400" cy="502920"/>
+            <a:off x="365760" y="1417320"/>
+            <a:ext cx="8412480" cy="548640"/>
           </a:xfrm>
           <a:prstGeom prst="roundRect">
             <a:avLst>
-              <a:gd name="adj" fmla="val 5455"/>
+              <a:gd name="adj" fmla="val 5000"/>
             </a:avLst>
           </a:prstGeom>
           <a:solidFill>
@@ -15216,8 +16758,8 @@
         </p:nvSpPr>
         <p:spPr>
           <a:xfrm>
-            <a:off x="1828800" y="1417320"/>
-            <a:ext cx="5486400" cy="502920"/>
+            <a:off x="548640" y="1417320"/>
+            <a:ext cx="8046720" cy="548640"/>
           </a:xfrm>
           <a:prstGeom prst="rect">
             <a:avLst/>
@@ -15229,11 +16771,14 @@
           <a:bodyPr wrap="square" lIns="0" tIns="0" rIns="0" bIns="0" rtlCol="0" anchor="ctr"/>
           <a:lstStyle/>
           <a:p>
-            <a:pPr algn="ctr" indent="0" marL="0">
-              <a:buNone/>
-            </a:pPr>
-            <a:r>
-              <a:rPr lang="en-US" sz="1000" dirty="0">
+            <a:pPr algn="l" indent="0" marL="0">
+              <a:lnSpc>
+                <a:spcPct val="130000"/>
+              </a:lnSpc>
+              <a:buNone/>
+            </a:pPr>
+            <a:r>
+              <a:rPr lang="en-US" sz="1000" b="1" dirty="0">
                 <a:solidFill>
                   <a:srgbClr val="FFFFFF"/>
                 </a:solidFill>
@@ -15241,13 +16786,16 @@
                 <a:ea typeface="Meiryo" pitchFamily="34" charset="-122"/>
                 <a:cs typeface="Meiryo" pitchFamily="34" charset="-120"/>
               </a:rPr>
-              <a:t>O </a:t>
-            </a:r>
-            <a:pPr algn="ctr" indent="0" marL="0">
-              <a:buNone/>
-            </a:pPr>
-            <a:r>
-              <a:rPr lang="en-US" sz="1200" b="1" dirty="0">
+              <a:t>Q:  </a:t>
+            </a:r>
+            <a:pPr algn="l" indent="0" marL="0">
+              <a:lnSpc>
+                <a:spcPct val="130000"/>
+              </a:lnSpc>
+              <a:buNone/>
+            </a:pPr>
+            <a:r>
+              <a:rPr lang="en-US" sz="1300" b="1" dirty="0">
                 <a:solidFill>
                   <a:srgbClr val="FFFFFF"/>
                 </a:solidFill>
@@ -15255,10 +16803,36 @@
                 <a:ea typeface="Meiryo" pitchFamily="34" charset="-122"/>
                 <a:cs typeface="Meiryo" pitchFamily="34" charset="-120"/>
               </a:rPr>
-              <a:t>顧客価値を、正しく・速く・持続的に届けるデリバリーラインを確立する</a:t>
-            </a:r>
+              <a:t>作る力を価値に変えるために、デリバリーチームは何を実現すべきか？</a:t>
+            </a:r>
+            <a:pPr algn="l" indent="0" marL="0">
+              <a:lnSpc>
+                <a:spcPct val="130000"/>
+              </a:lnSpc>
+              <a:buNone/>
+            </a:pPr>
             <a:endParaRPr lang="en-US" sz="1000" dirty="0"/>
           </a:p>
+          <a:p>
+            <a:pPr algn="l" indent="0" marL="0">
+              <a:lnSpc>
+                <a:spcPct val="130000"/>
+              </a:lnSpc>
+              <a:buNone/>
+            </a:pPr>
+            <a:r>
+              <a:rPr lang="en-US" sz="900" i="1" dirty="0">
+                <a:solidFill>
+                  <a:srgbClr val="FFFFFF"/>
+                </a:solidFill>
+                <a:latin typeface="Meiryo" pitchFamily="34" charset="0"/>
+                <a:ea typeface="Meiryo" pitchFamily="34" charset="-122"/>
+                <a:cs typeface="Meiryo" pitchFamily="34" charset="-120"/>
+              </a:rPr>
+              <a:t>（＝顧客価値を、正しく・速く・持続的に届けるデリバリーラインを、どう確立するか？）</a:t>
+            </a:r>
+            <a:endParaRPr lang="en-US" sz="1000" dirty="0"/>
+          </a:p>
         </p:txBody>
       </p:sp>
       <p:sp>
@@ -15269,8 +16843,8 @@
         </p:nvSpPr>
         <p:spPr>
           <a:xfrm>
-            <a:off x="4562856" y="1920240"/>
-            <a:ext cx="18288" cy="91440"/>
+            <a:off x="722376" y="1965960"/>
+            <a:ext cx="18288" cy="2834640"/>
           </a:xfrm>
           <a:prstGeom prst="rect">
             <a:avLst/>
@@ -15294,8 +16868,8 @@
         </p:nvSpPr>
         <p:spPr>
           <a:xfrm>
-            <a:off x="2103120" y="2002536"/>
-            <a:ext cx="4937760" cy="18288"/>
+            <a:off x="731520" y="2231136"/>
+            <a:ext cx="274320" cy="18288"/>
           </a:xfrm>
           <a:prstGeom prst="rect">
             <a:avLst/>
@@ -15319,8 +16893,228 @@
         </p:nvSpPr>
         <p:spPr>
           <a:xfrm>
-            <a:off x="2093976" y="2011680"/>
-            <a:ext cx="18288" cy="164592"/>
+            <a:off x="1005840" y="1993392"/>
+            <a:ext cx="3749040" cy="493776"/>
+          </a:xfrm>
+          <a:prstGeom prst="roundRect">
+            <a:avLst>
+              <a:gd name="adj" fmla="val 3704"/>
+            </a:avLst>
+          </a:prstGeom>
+          <a:solidFill>
+            <a:srgbClr val="F8FAFC"/>
+          </a:solidFill>
+          <a:ln w="9525">
+            <a:solidFill>
+              <a:srgbClr val="444466"/>
+            </a:solidFill>
+            <a:prstDash val="solid"/>
+          </a:ln>
+        </p:spPr>
+      </p:sp>
+      <p:sp>
+        <p:nvSpPr>
+          <p:cNvPr id="14" name="Text 12"/>
+          <p:cNvSpPr/>
+          <p:nvPr/>
+        </p:nvSpPr>
+        <p:spPr>
+          <a:xfrm>
+            <a:off x="1115568" y="1993392"/>
+            <a:ext cx="3529584" cy="493776"/>
+          </a:xfrm>
+          <a:prstGeom prst="rect">
+            <a:avLst/>
+          </a:prstGeom>
+          <a:noFill/>
+          <a:ln/>
+        </p:spPr>
+        <p:txBody>
+          <a:bodyPr wrap="square" lIns="0" tIns="0" rIns="0" bIns="0" rtlCol="0" anchor="ctr"/>
+          <a:lstStyle/>
+          <a:p>
+            <a:pPr algn="l" indent="0" marL="0">
+              <a:lnSpc>
+                <a:spcPct val="125000"/>
+              </a:lnSpc>
+              <a:buNone/>
+            </a:pPr>
+            <a:r>
+              <a:rPr lang="en-US" sz="900" b="1" dirty="0">
+                <a:solidFill>
+                  <a:srgbClr val="004098"/>
+                </a:solidFill>
+                <a:latin typeface="Meiryo" pitchFamily="34" charset="0"/>
+                <a:ea typeface="Meiryo" pitchFamily="34" charset="-122"/>
+                <a:cs typeface="Meiryo" pitchFamily="34" charset="-120"/>
+              </a:rPr>
+              <a:t>Q1  </a:t>
+            </a:r>
+            <a:pPr algn="l" indent="0" marL="0">
+              <a:lnSpc>
+                <a:spcPct val="125000"/>
+              </a:lnSpc>
+              <a:buNone/>
+            </a:pPr>
+            <a:r>
+              <a:rPr lang="en-US" sz="900" dirty="0">
+                <a:solidFill>
+                  <a:srgbClr val="1A1A2E"/>
+                </a:solidFill>
+                <a:latin typeface="Meiryo" pitchFamily="34" charset="0"/>
+                <a:ea typeface="Meiryo" pitchFamily="34" charset="-122"/>
+                <a:cs typeface="Meiryo" pitchFamily="34" charset="-120"/>
+              </a:rPr>
+              <a:t>開発ラインに流す仕事の質と判断スピードを高め、仕様起因の手戻りと無駄な開発をなくせるか？</a:t>
+            </a:r>
+            <a:endParaRPr lang="en-US" sz="900" dirty="0"/>
+          </a:p>
+        </p:txBody>
+      </p:sp>
+      <p:sp>
+        <p:nvSpPr>
+          <p:cNvPr id="15" name="Text 13"/>
+          <p:cNvSpPr/>
+          <p:nvPr/>
+        </p:nvSpPr>
+        <p:spPr>
+          <a:xfrm>
+            <a:off x="4846320" y="2112264"/>
+            <a:ext cx="320040" cy="256032"/>
+          </a:xfrm>
+          <a:prstGeom prst="rect">
+            <a:avLst/>
+          </a:prstGeom>
+          <a:noFill/>
+          <a:ln/>
+        </p:spPr>
+        <p:txBody>
+          <a:bodyPr wrap="square" lIns="0" tIns="0" rIns="0" bIns="0" rtlCol="0" anchor="ctr"/>
+          <a:lstStyle/>
+          <a:p>
+            <a:pPr algn="ctr" indent="0" marL="0">
+              <a:buNone/>
+            </a:pPr>
+            <a:r>
+              <a:rPr lang="en-US" sz="1400" dirty="0">
+                <a:solidFill>
+                  <a:srgbClr val="DC2626"/>
+                </a:solidFill>
+                <a:latin typeface="Arial" pitchFamily="34" charset="0"/>
+                <a:ea typeface="Arial" pitchFamily="34" charset="-122"/>
+                <a:cs typeface="Arial" pitchFamily="34" charset="-120"/>
+              </a:rPr>
+              <a:t>▶</a:t>
+            </a:r>
+            <a:endParaRPr lang="en-US" sz="1400" dirty="0"/>
+          </a:p>
+        </p:txBody>
+      </p:sp>
+      <p:sp>
+        <p:nvSpPr>
+          <p:cNvPr id="16" name="Shape 14"/>
+          <p:cNvSpPr/>
+          <p:nvPr/>
+        </p:nvSpPr>
+        <p:spPr>
+          <a:xfrm>
+            <a:off x="5166360" y="1993392"/>
+            <a:ext cx="3611880" cy="493776"/>
+          </a:xfrm>
+          <a:prstGeom prst="roundRect">
+            <a:avLst>
+              <a:gd name="adj" fmla="val 3704"/>
+            </a:avLst>
+          </a:prstGeom>
+          <a:solidFill>
+            <a:srgbClr val="EEF3FA"/>
+          </a:solidFill>
+          <a:ln w="12700">
+            <a:solidFill>
+              <a:srgbClr val="004098"/>
+            </a:solidFill>
+            <a:prstDash val="solid"/>
+          </a:ln>
+        </p:spPr>
+      </p:sp>
+      <p:sp>
+        <p:nvSpPr>
+          <p:cNvPr id="17" name="Text 15"/>
+          <p:cNvSpPr/>
+          <p:nvPr/>
+        </p:nvSpPr>
+        <p:spPr>
+          <a:xfrm>
+            <a:off x="5276088" y="1993392"/>
+            <a:ext cx="3392424" cy="493776"/>
+          </a:xfrm>
+          <a:prstGeom prst="rect">
+            <a:avLst/>
+          </a:prstGeom>
+          <a:noFill/>
+          <a:ln/>
+        </p:spPr>
+        <p:txBody>
+          <a:bodyPr wrap="square" lIns="0" tIns="0" rIns="0" bIns="0" rtlCol="0" anchor="ctr"/>
+          <a:lstStyle/>
+          <a:p>
+            <a:pPr algn="l" indent="0" marL="0">
+              <a:lnSpc>
+                <a:spcPct val="125000"/>
+              </a:lnSpc>
+              <a:buNone/>
+            </a:pPr>
+            <a:r>
+              <a:rPr lang="en-US" sz="1100" b="1" dirty="0">
+                <a:solidFill>
+                  <a:srgbClr val="004098"/>
+                </a:solidFill>
+                <a:latin typeface="Meiryo" pitchFamily="34" charset="0"/>
+                <a:ea typeface="Meiryo" pitchFamily="34" charset="-122"/>
+                <a:cs typeface="Meiryo" pitchFamily="34" charset="-120"/>
+              </a:rPr>
+              <a:t>挑戦KR1 入口品質</a:t>
+            </a:r>
+            <a:pPr algn="l" indent="0" marL="0">
+              <a:lnSpc>
+                <a:spcPct val="125000"/>
+              </a:lnSpc>
+              <a:buNone/>
+            </a:pPr>
+            <a:endParaRPr lang="en-US" sz="1100" dirty="0"/>
+          </a:p>
+          <a:p>
+            <a:pPr algn="l" indent="0" marL="0">
+              <a:lnSpc>
+                <a:spcPct val="125000"/>
+              </a:lnSpc>
+              <a:buNone/>
+            </a:pPr>
+            <a:r>
+              <a:rPr lang="en-US" sz="900" dirty="0">
+                <a:solidFill>
+                  <a:srgbClr val="1A1A2E"/>
+                </a:solidFill>
+                <a:latin typeface="Meiryo" pitchFamily="34" charset="0"/>
+                <a:ea typeface="Meiryo" pitchFamily="34" charset="-122"/>
+                <a:cs typeface="Meiryo" pitchFamily="34" charset="-120"/>
+              </a:rPr>
+              <a:t>─ 開発に入る前の前提整理・要求定義の曖昧さをなくし、仕様起因の手戻りをゼロにする</a:t>
+            </a:r>
+            <a:endParaRPr lang="en-US" sz="1100" dirty="0"/>
+          </a:p>
+        </p:txBody>
+      </p:sp>
+      <p:sp>
+        <p:nvSpPr>
+          <p:cNvPr id="18" name="Shape 16"/>
+          <p:cNvSpPr/>
+          <p:nvPr/>
+        </p:nvSpPr>
+        <p:spPr>
+          <a:xfrm>
+            <a:off x="731520" y="2743200"/>
+            <a:ext cx="274320" cy="18288"/>
           </a:xfrm>
           <a:prstGeom prst="rect">
             <a:avLst/>
@@ -15338,14 +17132,234 @@
       </p:sp>
       <p:sp>
         <p:nvSpPr>
-          <p:cNvPr id="14" name="Shape 12"/>
-          <p:cNvSpPr/>
-          <p:nvPr/>
-        </p:nvSpPr>
-        <p:spPr>
-          <a:xfrm>
-            <a:off x="7031736" y="2011680"/>
-            <a:ext cx="18288" cy="164592"/>
+          <p:cNvPr id="19" name="Shape 17"/>
+          <p:cNvSpPr/>
+          <p:nvPr/>
+        </p:nvSpPr>
+        <p:spPr>
+          <a:xfrm>
+            <a:off x="1005840" y="2505456"/>
+            <a:ext cx="3749040" cy="493776"/>
+          </a:xfrm>
+          <a:prstGeom prst="roundRect">
+            <a:avLst>
+              <a:gd name="adj" fmla="val 3704"/>
+            </a:avLst>
+          </a:prstGeom>
+          <a:solidFill>
+            <a:srgbClr val="F8FAFC"/>
+          </a:solidFill>
+          <a:ln w="9525">
+            <a:solidFill>
+              <a:srgbClr val="444466"/>
+            </a:solidFill>
+            <a:prstDash val="solid"/>
+          </a:ln>
+        </p:spPr>
+      </p:sp>
+      <p:sp>
+        <p:nvSpPr>
+          <p:cNvPr id="20" name="Text 18"/>
+          <p:cNvSpPr/>
+          <p:nvPr/>
+        </p:nvSpPr>
+        <p:spPr>
+          <a:xfrm>
+            <a:off x="1115568" y="2505456"/>
+            <a:ext cx="3529584" cy="493776"/>
+          </a:xfrm>
+          <a:prstGeom prst="rect">
+            <a:avLst/>
+          </a:prstGeom>
+          <a:noFill/>
+          <a:ln/>
+        </p:spPr>
+        <p:txBody>
+          <a:bodyPr wrap="square" lIns="0" tIns="0" rIns="0" bIns="0" rtlCol="0" anchor="ctr"/>
+          <a:lstStyle/>
+          <a:p>
+            <a:pPr algn="l" indent="0" marL="0">
+              <a:lnSpc>
+                <a:spcPct val="125000"/>
+              </a:lnSpc>
+              <a:buNone/>
+            </a:pPr>
+            <a:r>
+              <a:rPr lang="en-US" sz="900" b="1" dirty="0">
+                <a:solidFill>
+                  <a:srgbClr val="004098"/>
+                </a:solidFill>
+                <a:latin typeface="Meiryo" pitchFamily="34" charset="0"/>
+                <a:ea typeface="Meiryo" pitchFamily="34" charset="-122"/>
+                <a:cs typeface="Meiryo" pitchFamily="34" charset="-120"/>
+              </a:rPr>
+              <a:t>Q2  </a:t>
+            </a:r>
+            <a:pPr algn="l" indent="0" marL="0">
+              <a:lnSpc>
+                <a:spcPct val="125000"/>
+              </a:lnSpc>
+              <a:buNone/>
+            </a:pPr>
+            <a:r>
+              <a:rPr lang="en-US" sz="900" dirty="0">
+                <a:solidFill>
+                  <a:srgbClr val="1A1A2E"/>
+                </a:solidFill>
+                <a:latin typeface="Meiryo" pitchFamily="34" charset="0"/>
+                <a:ea typeface="Meiryo" pitchFamily="34" charset="-122"/>
+                <a:cs typeface="Meiryo" pitchFamily="34" charset="-120"/>
+              </a:rPr>
+              <a:t>顧客に届くスピードをどう上げるか？</a:t>
+            </a:r>
+            <a:endParaRPr lang="en-US" sz="900" dirty="0"/>
+          </a:p>
+        </p:txBody>
+      </p:sp>
+      <p:sp>
+        <p:nvSpPr>
+          <p:cNvPr id="21" name="Text 19"/>
+          <p:cNvSpPr/>
+          <p:nvPr/>
+        </p:nvSpPr>
+        <p:spPr>
+          <a:xfrm>
+            <a:off x="4846320" y="2624328"/>
+            <a:ext cx="320040" cy="256032"/>
+          </a:xfrm>
+          <a:prstGeom prst="rect">
+            <a:avLst/>
+          </a:prstGeom>
+          <a:noFill/>
+          <a:ln/>
+        </p:spPr>
+        <p:txBody>
+          <a:bodyPr wrap="square" lIns="0" tIns="0" rIns="0" bIns="0" rtlCol="0" anchor="ctr"/>
+          <a:lstStyle/>
+          <a:p>
+            <a:pPr algn="ctr" indent="0" marL="0">
+              <a:buNone/>
+            </a:pPr>
+            <a:r>
+              <a:rPr lang="en-US" sz="1400" dirty="0">
+                <a:solidFill>
+                  <a:srgbClr val="DC2626"/>
+                </a:solidFill>
+                <a:latin typeface="Arial" pitchFamily="34" charset="0"/>
+                <a:ea typeface="Arial" pitchFamily="34" charset="-122"/>
+                <a:cs typeface="Arial" pitchFamily="34" charset="-120"/>
+              </a:rPr>
+              <a:t>▶</a:t>
+            </a:r>
+            <a:endParaRPr lang="en-US" sz="1400" dirty="0"/>
+          </a:p>
+        </p:txBody>
+      </p:sp>
+      <p:sp>
+        <p:nvSpPr>
+          <p:cNvPr id="22" name="Shape 20"/>
+          <p:cNvSpPr/>
+          <p:nvPr/>
+        </p:nvSpPr>
+        <p:spPr>
+          <a:xfrm>
+            <a:off x="5166360" y="2505456"/>
+            <a:ext cx="3611880" cy="493776"/>
+          </a:xfrm>
+          <a:prstGeom prst="roundRect">
+            <a:avLst>
+              <a:gd name="adj" fmla="val 3704"/>
+            </a:avLst>
+          </a:prstGeom>
+          <a:solidFill>
+            <a:srgbClr val="EEF3FA"/>
+          </a:solidFill>
+          <a:ln w="12700">
+            <a:solidFill>
+              <a:srgbClr val="004098"/>
+            </a:solidFill>
+            <a:prstDash val="solid"/>
+          </a:ln>
+        </p:spPr>
+      </p:sp>
+      <p:sp>
+        <p:nvSpPr>
+          <p:cNvPr id="23" name="Text 21"/>
+          <p:cNvSpPr/>
+          <p:nvPr/>
+        </p:nvSpPr>
+        <p:spPr>
+          <a:xfrm>
+            <a:off x="5276088" y="2505456"/>
+            <a:ext cx="3392424" cy="493776"/>
+          </a:xfrm>
+          <a:prstGeom prst="rect">
+            <a:avLst/>
+          </a:prstGeom>
+          <a:noFill/>
+          <a:ln/>
+        </p:spPr>
+        <p:txBody>
+          <a:bodyPr wrap="square" lIns="0" tIns="0" rIns="0" bIns="0" rtlCol="0" anchor="ctr"/>
+          <a:lstStyle/>
+          <a:p>
+            <a:pPr algn="l" indent="0" marL="0">
+              <a:lnSpc>
+                <a:spcPct val="125000"/>
+              </a:lnSpc>
+              <a:buNone/>
+            </a:pPr>
+            <a:r>
+              <a:rPr lang="en-US" sz="1100" b="1" dirty="0">
+                <a:solidFill>
+                  <a:srgbClr val="004098"/>
+                </a:solidFill>
+                <a:latin typeface="Meiryo" pitchFamily="34" charset="0"/>
+                <a:ea typeface="Meiryo" pitchFamily="34" charset="-122"/>
+                <a:cs typeface="Meiryo" pitchFamily="34" charset="-120"/>
+              </a:rPr>
+              <a:t>挑戦KR2 フロー効率</a:t>
+            </a:r>
+            <a:pPr algn="l" indent="0" marL="0">
+              <a:lnSpc>
+                <a:spcPct val="125000"/>
+              </a:lnSpc>
+              <a:buNone/>
+            </a:pPr>
+            <a:endParaRPr lang="en-US" sz="1100" dirty="0"/>
+          </a:p>
+          <a:p>
+            <a:pPr algn="l" indent="0" marL="0">
+              <a:lnSpc>
+                <a:spcPct val="125000"/>
+              </a:lnSpc>
+              <a:buNone/>
+            </a:pPr>
+            <a:r>
+              <a:rPr lang="en-US" sz="900" dirty="0">
+                <a:solidFill>
+                  <a:srgbClr val="1A1A2E"/>
+                </a:solidFill>
+                <a:latin typeface="Meiryo" pitchFamily="34" charset="0"/>
+                <a:ea typeface="Meiryo" pitchFamily="34" charset="-122"/>
+                <a:cs typeface="Meiryo" pitchFamily="34" charset="-120"/>
+              </a:rPr>
+              <a:t>─ 開発工程のムリ・ムダ・ムラをなくし、案件を停滞させずスムーズに顧客へ届ける</a:t>
+            </a:r>
+            <a:endParaRPr lang="en-US" sz="1100" dirty="0"/>
+          </a:p>
+        </p:txBody>
+      </p:sp>
+      <p:sp>
+        <p:nvSpPr>
+          <p:cNvPr id="24" name="Shape 22"/>
+          <p:cNvSpPr/>
+          <p:nvPr/>
+        </p:nvSpPr>
+        <p:spPr>
+          <a:xfrm>
+            <a:off x="731520" y="3255264"/>
+            <a:ext cx="274320" cy="18288"/>
           </a:xfrm>
           <a:prstGeom prst="rect">
             <a:avLst/>
@@ -15363,36 +17377,41 @@
       </p:sp>
       <p:sp>
         <p:nvSpPr>
-          <p:cNvPr id="15" name="Shape 13"/>
-          <p:cNvSpPr/>
-          <p:nvPr/>
-        </p:nvSpPr>
-        <p:spPr>
-          <a:xfrm>
-            <a:off x="548640" y="2176272"/>
-            <a:ext cx="3108960" cy="365760"/>
+          <p:cNvPr id="25" name="Shape 23"/>
+          <p:cNvSpPr/>
+          <p:nvPr/>
+        </p:nvSpPr>
+        <p:spPr>
+          <a:xfrm>
+            <a:off x="1005840" y="3017520"/>
+            <a:ext cx="3749040" cy="493776"/>
           </a:xfrm>
           <a:prstGeom prst="roundRect">
             <a:avLst>
-              <a:gd name="adj" fmla="val 7500"/>
+              <a:gd name="adj" fmla="val 3704"/>
             </a:avLst>
           </a:prstGeom>
           <a:solidFill>
-            <a:srgbClr val="004098"/>
+            <a:srgbClr val="F8FAFC"/>
           </a:solidFill>
-          <a:ln/>
-        </p:spPr>
-      </p:sp>
-      <p:sp>
-        <p:nvSpPr>
-          <p:cNvPr id="16" name="Text 14"/>
-          <p:cNvSpPr/>
-          <p:nvPr/>
-        </p:nvSpPr>
-        <p:spPr>
-          <a:xfrm>
-            <a:off x="548640" y="2176272"/>
-            <a:ext cx="3108960" cy="365760"/>
+          <a:ln w="9525">
+            <a:solidFill>
+              <a:srgbClr val="444466"/>
+            </a:solidFill>
+            <a:prstDash val="solid"/>
+          </a:ln>
+        </p:spPr>
+      </p:sp>
+      <p:sp>
+        <p:nvSpPr>
+          <p:cNvPr id="26" name="Text 24"/>
+          <p:cNvSpPr/>
+          <p:nvPr/>
+        </p:nvSpPr>
+        <p:spPr>
+          <a:xfrm>
+            <a:off x="1115568" y="3017520"/>
+            <a:ext cx="3529584" cy="493776"/>
           </a:xfrm>
           <a:prstGeom prst="rect">
             <a:avLst/>
@@ -15404,56 +17423,54 @@
           <a:bodyPr wrap="square" lIns="0" tIns="0" rIns="0" bIns="0" rtlCol="0" anchor="ctr"/>
           <a:lstStyle/>
           <a:p>
-            <a:pPr algn="ctr" indent="0" marL="0">
-              <a:buNone/>
-            </a:pPr>
-            <a:r>
-              <a:rPr lang="en-US" sz="1200" b="1" dirty="0">
-                <a:solidFill>
-                  <a:srgbClr val="FFFFFF"/>
-                </a:solidFill>
-                <a:latin typeface="Meiryo" pitchFamily="34" charset="0"/>
-                <a:ea typeface="Meiryo" pitchFamily="34" charset="-122"/>
-                <a:cs typeface="Meiryo" pitchFamily="34" charset="-120"/>
-              </a:rPr>
-              <a:t>挑戦（速く届ける能力を磨く）</a:t>
-            </a:r>
-            <a:endParaRPr lang="en-US" sz="1200" dirty="0"/>
+            <a:pPr algn="l" indent="0" marL="0">
+              <a:lnSpc>
+                <a:spcPct val="125000"/>
+              </a:lnSpc>
+              <a:buNone/>
+            </a:pPr>
+            <a:r>
+              <a:rPr lang="en-US" sz="900" b="1" dirty="0">
+                <a:solidFill>
+                  <a:srgbClr val="004098"/>
+                </a:solidFill>
+                <a:latin typeface="Meiryo" pitchFamily="34" charset="0"/>
+                <a:ea typeface="Meiryo" pitchFamily="34" charset="-122"/>
+                <a:cs typeface="Meiryo" pitchFamily="34" charset="-120"/>
+              </a:rPr>
+              <a:t>Q3  </a:t>
+            </a:r>
+            <a:pPr algn="l" indent="0" marL="0">
+              <a:lnSpc>
+                <a:spcPct val="125000"/>
+              </a:lnSpc>
+              <a:buNone/>
+            </a:pPr>
+            <a:r>
+              <a:rPr lang="en-US" sz="900" dirty="0">
+                <a:solidFill>
+                  <a:srgbClr val="1A1A2E"/>
+                </a:solidFill>
+                <a:latin typeface="Meiryo" pitchFamily="34" charset="0"/>
+                <a:ea typeface="Meiryo" pitchFamily="34" charset="-122"/>
+                <a:cs typeface="Meiryo" pitchFamily="34" charset="-120"/>
+              </a:rPr>
+              <a:t>届けた価値を検証し、学びを次のサイクルにどう反映し続けるか？</a:t>
+            </a:r>
+            <a:endParaRPr lang="en-US" sz="900" dirty="0"/>
           </a:p>
         </p:txBody>
       </p:sp>
       <p:sp>
         <p:nvSpPr>
-          <p:cNvPr id="17" name="Shape 15"/>
-          <p:cNvSpPr/>
-          <p:nvPr/>
-        </p:nvSpPr>
-        <p:spPr>
-          <a:xfrm>
-            <a:off x="5486400" y="2176272"/>
-            <a:ext cx="3108960" cy="365760"/>
-          </a:xfrm>
-          <a:prstGeom prst="roundRect">
-            <a:avLst>
-              <a:gd name="adj" fmla="val 7500"/>
-            </a:avLst>
-          </a:prstGeom>
-          <a:solidFill>
-            <a:srgbClr val="444466"/>
-          </a:solidFill>
-          <a:ln/>
-        </p:spPr>
-      </p:sp>
-      <p:sp>
-        <p:nvSpPr>
-          <p:cNvPr id="18" name="Text 16"/>
-          <p:cNvSpPr/>
-          <p:nvPr/>
-        </p:nvSpPr>
-        <p:spPr>
-          <a:xfrm>
-            <a:off x="5486400" y="2176272"/>
-            <a:ext cx="3108960" cy="365760"/>
+          <p:cNvPr id="27" name="Text 25"/>
+          <p:cNvSpPr/>
+          <p:nvPr/>
+        </p:nvSpPr>
+        <p:spPr>
+          <a:xfrm>
+            <a:off x="4846320" y="3136392"/>
+            <a:ext cx="320040" cy="256032"/>
           </a:xfrm>
           <a:prstGeom prst="rect">
             <a:avLst/>
@@ -15469,30 +17486,125 @@
               <a:buNone/>
             </a:pPr>
             <a:r>
-              <a:rPr lang="en-US" sz="1200" b="1" dirty="0">
-                <a:solidFill>
-                  <a:srgbClr val="FFFFFF"/>
-                </a:solidFill>
-                <a:latin typeface="Meiryo" pitchFamily="34" charset="0"/>
-                <a:ea typeface="Meiryo" pitchFamily="34" charset="-122"/>
-                <a:cs typeface="Meiryo" pitchFamily="34" charset="-120"/>
-              </a:rPr>
-              <a:t>基盤（走り続ける土台を守る）</a:t>
-            </a:r>
-            <a:endParaRPr lang="en-US" sz="1200" dirty="0"/>
+              <a:rPr lang="en-US" sz="1400" dirty="0">
+                <a:solidFill>
+                  <a:srgbClr val="DC2626"/>
+                </a:solidFill>
+                <a:latin typeface="Arial" pitchFamily="34" charset="0"/>
+                <a:ea typeface="Arial" pitchFamily="34" charset="-122"/>
+                <a:cs typeface="Arial" pitchFamily="34" charset="-120"/>
+              </a:rPr>
+              <a:t>▶</a:t>
+            </a:r>
+            <a:endParaRPr lang="en-US" sz="1400" dirty="0"/>
           </a:p>
         </p:txBody>
       </p:sp>
       <p:sp>
         <p:nvSpPr>
-          <p:cNvPr id="19" name="Shape 17"/>
-          <p:cNvSpPr/>
-          <p:nvPr/>
-        </p:nvSpPr>
-        <p:spPr>
-          <a:xfrm>
-            <a:off x="2093976" y="2542032"/>
-            <a:ext cx="18288" cy="1883664"/>
+          <p:cNvPr id="28" name="Shape 26"/>
+          <p:cNvSpPr/>
+          <p:nvPr/>
+        </p:nvSpPr>
+        <p:spPr>
+          <a:xfrm>
+            <a:off x="5166360" y="3017520"/>
+            <a:ext cx="3611880" cy="493776"/>
+          </a:xfrm>
+          <a:prstGeom prst="roundRect">
+            <a:avLst>
+              <a:gd name="adj" fmla="val 3704"/>
+            </a:avLst>
+          </a:prstGeom>
+          <a:solidFill>
+            <a:srgbClr val="EEF3FA"/>
+          </a:solidFill>
+          <a:ln w="12700">
+            <a:solidFill>
+              <a:srgbClr val="004098"/>
+            </a:solidFill>
+            <a:prstDash val="solid"/>
+          </a:ln>
+        </p:spPr>
+      </p:sp>
+      <p:sp>
+        <p:nvSpPr>
+          <p:cNvPr id="29" name="Text 27"/>
+          <p:cNvSpPr/>
+          <p:nvPr/>
+        </p:nvSpPr>
+        <p:spPr>
+          <a:xfrm>
+            <a:off x="5276088" y="3017520"/>
+            <a:ext cx="3392424" cy="493776"/>
+          </a:xfrm>
+          <a:prstGeom prst="rect">
+            <a:avLst/>
+          </a:prstGeom>
+          <a:noFill/>
+          <a:ln/>
+        </p:spPr>
+        <p:txBody>
+          <a:bodyPr wrap="square" lIns="0" tIns="0" rIns="0" bIns="0" rtlCol="0" anchor="ctr"/>
+          <a:lstStyle/>
+          <a:p>
+            <a:pPr algn="l" indent="0" marL="0">
+              <a:lnSpc>
+                <a:spcPct val="125000"/>
+              </a:lnSpc>
+              <a:buNone/>
+            </a:pPr>
+            <a:r>
+              <a:rPr lang="en-US" sz="1100" b="1" dirty="0">
+                <a:solidFill>
+                  <a:srgbClr val="004098"/>
+                </a:solidFill>
+                <a:latin typeface="Meiryo" pitchFamily="34" charset="0"/>
+                <a:ea typeface="Meiryo" pitchFamily="34" charset="-122"/>
+                <a:cs typeface="Meiryo" pitchFamily="34" charset="-120"/>
+              </a:rPr>
+              <a:t>挑戦KR3 学習ループ</a:t>
+            </a:r>
+            <a:pPr algn="l" indent="0" marL="0">
+              <a:lnSpc>
+                <a:spcPct val="125000"/>
+              </a:lnSpc>
+              <a:buNone/>
+            </a:pPr>
+            <a:endParaRPr lang="en-US" sz="1100" dirty="0"/>
+          </a:p>
+          <a:p>
+            <a:pPr algn="l" indent="0" marL="0">
+              <a:lnSpc>
+                <a:spcPct val="125000"/>
+              </a:lnSpc>
+              <a:buNone/>
+            </a:pPr>
+            <a:r>
+              <a:rPr lang="en-US" sz="900" dirty="0">
+                <a:solidFill>
+                  <a:srgbClr val="1A1A2E"/>
+                </a:solidFill>
+                <a:latin typeface="Meiryo" pitchFamily="34" charset="0"/>
+                <a:ea typeface="Meiryo" pitchFamily="34" charset="-122"/>
+                <a:cs typeface="Meiryo" pitchFamily="34" charset="-120"/>
+              </a:rPr>
+              <a:t>─ リリースして終わりにせず、お客様の反応を見て「次にやること／やめること」を決める</a:t>
+            </a:r>
+            <a:endParaRPr lang="en-US" sz="1100" dirty="0"/>
+          </a:p>
+        </p:txBody>
+      </p:sp>
+      <p:sp>
+        <p:nvSpPr>
+          <p:cNvPr id="30" name="Shape 28"/>
+          <p:cNvSpPr/>
+          <p:nvPr/>
+        </p:nvSpPr>
+        <p:spPr>
+          <a:xfrm>
+            <a:off x="731520" y="3767328"/>
+            <a:ext cx="274320" cy="18288"/>
           </a:xfrm>
           <a:prstGeom prst="rect">
             <a:avLst/>
@@ -15510,14 +17622,234 @@
       </p:sp>
       <p:sp>
         <p:nvSpPr>
-          <p:cNvPr id="20" name="Shape 18"/>
-          <p:cNvSpPr/>
-          <p:nvPr/>
-        </p:nvSpPr>
-        <p:spPr>
-          <a:xfrm>
-            <a:off x="2103120" y="3026664"/>
-            <a:ext cx="1554480" cy="18288"/>
+          <p:cNvPr id="31" name="Shape 29"/>
+          <p:cNvSpPr/>
+          <p:nvPr/>
+        </p:nvSpPr>
+        <p:spPr>
+          <a:xfrm>
+            <a:off x="1005840" y="3529584"/>
+            <a:ext cx="3749040" cy="493776"/>
+          </a:xfrm>
+          <a:prstGeom prst="roundRect">
+            <a:avLst>
+              <a:gd name="adj" fmla="val 3704"/>
+            </a:avLst>
+          </a:prstGeom>
+          <a:solidFill>
+            <a:srgbClr val="F8FAFC"/>
+          </a:solidFill>
+          <a:ln w="9525">
+            <a:solidFill>
+              <a:srgbClr val="444466"/>
+            </a:solidFill>
+            <a:prstDash val="solid"/>
+          </a:ln>
+        </p:spPr>
+      </p:sp>
+      <p:sp>
+        <p:nvSpPr>
+          <p:cNvPr id="32" name="Text 30"/>
+          <p:cNvSpPr/>
+          <p:nvPr/>
+        </p:nvSpPr>
+        <p:spPr>
+          <a:xfrm>
+            <a:off x="1115568" y="3529584"/>
+            <a:ext cx="3529584" cy="493776"/>
+          </a:xfrm>
+          <a:prstGeom prst="rect">
+            <a:avLst/>
+          </a:prstGeom>
+          <a:noFill/>
+          <a:ln/>
+        </p:spPr>
+        <p:txBody>
+          <a:bodyPr wrap="square" lIns="0" tIns="0" rIns="0" bIns="0" rtlCol="0" anchor="ctr"/>
+          <a:lstStyle/>
+          <a:p>
+            <a:pPr algn="l" indent="0" marL="0">
+              <a:lnSpc>
+                <a:spcPct val="125000"/>
+              </a:lnSpc>
+              <a:buNone/>
+            </a:pPr>
+            <a:r>
+              <a:rPr lang="en-US" sz="900" b="1" dirty="0">
+                <a:solidFill>
+                  <a:srgbClr val="004098"/>
+                </a:solidFill>
+                <a:latin typeface="Meiryo" pitchFamily="34" charset="0"/>
+                <a:ea typeface="Meiryo" pitchFamily="34" charset="-122"/>
+                <a:cs typeface="Meiryo" pitchFamily="34" charset="-120"/>
+              </a:rPr>
+              <a:t>Q4  </a:t>
+            </a:r>
+            <a:pPr algn="l" indent="0" marL="0">
+              <a:lnSpc>
+                <a:spcPct val="125000"/>
+              </a:lnSpc>
+              <a:buNone/>
+            </a:pPr>
+            <a:r>
+              <a:rPr lang="en-US" sz="900" dirty="0">
+                <a:solidFill>
+                  <a:srgbClr val="1A1A2E"/>
+                </a:solidFill>
+                <a:latin typeface="Meiryo" pitchFamily="34" charset="0"/>
+                <a:ea typeface="Meiryo" pitchFamily="34" charset="-122"/>
+                <a:cs typeface="Meiryo" pitchFamily="34" charset="-120"/>
+              </a:rPr>
+              <a:t>チームが走り続けられる土台と開発環境をどう担保するか？</a:t>
+            </a:r>
+            <a:endParaRPr lang="en-US" sz="900" dirty="0"/>
+          </a:p>
+        </p:txBody>
+      </p:sp>
+      <p:sp>
+        <p:nvSpPr>
+          <p:cNvPr id="33" name="Text 31"/>
+          <p:cNvSpPr/>
+          <p:nvPr/>
+        </p:nvSpPr>
+        <p:spPr>
+          <a:xfrm>
+            <a:off x="4846320" y="3648456"/>
+            <a:ext cx="320040" cy="256032"/>
+          </a:xfrm>
+          <a:prstGeom prst="rect">
+            <a:avLst/>
+          </a:prstGeom>
+          <a:noFill/>
+          <a:ln/>
+        </p:spPr>
+        <p:txBody>
+          <a:bodyPr wrap="square" lIns="0" tIns="0" rIns="0" bIns="0" rtlCol="0" anchor="ctr"/>
+          <a:lstStyle/>
+          <a:p>
+            <a:pPr algn="ctr" indent="0" marL="0">
+              <a:buNone/>
+            </a:pPr>
+            <a:r>
+              <a:rPr lang="en-US" sz="1400" dirty="0">
+                <a:solidFill>
+                  <a:srgbClr val="DC2626"/>
+                </a:solidFill>
+                <a:latin typeface="Arial" pitchFamily="34" charset="0"/>
+                <a:ea typeface="Arial" pitchFamily="34" charset="-122"/>
+                <a:cs typeface="Arial" pitchFamily="34" charset="-120"/>
+              </a:rPr>
+              <a:t>▶</a:t>
+            </a:r>
+            <a:endParaRPr lang="en-US" sz="1400" dirty="0"/>
+          </a:p>
+        </p:txBody>
+      </p:sp>
+      <p:sp>
+        <p:nvSpPr>
+          <p:cNvPr id="34" name="Shape 32"/>
+          <p:cNvSpPr/>
+          <p:nvPr/>
+        </p:nvSpPr>
+        <p:spPr>
+          <a:xfrm>
+            <a:off x="5166360" y="3529584"/>
+            <a:ext cx="3611880" cy="493776"/>
+          </a:xfrm>
+          <a:prstGeom prst="roundRect">
+            <a:avLst>
+              <a:gd name="adj" fmla="val 3704"/>
+            </a:avLst>
+          </a:prstGeom>
+          <a:solidFill>
+            <a:srgbClr val="EEF3FA"/>
+          </a:solidFill>
+          <a:ln w="12700">
+            <a:solidFill>
+              <a:srgbClr val="004098"/>
+            </a:solidFill>
+            <a:prstDash val="solid"/>
+          </a:ln>
+        </p:spPr>
+      </p:sp>
+      <p:sp>
+        <p:nvSpPr>
+          <p:cNvPr id="35" name="Text 33"/>
+          <p:cNvSpPr/>
+          <p:nvPr/>
+        </p:nvSpPr>
+        <p:spPr>
+          <a:xfrm>
+            <a:off x="5276088" y="3529584"/>
+            <a:ext cx="3392424" cy="493776"/>
+          </a:xfrm>
+          <a:prstGeom prst="rect">
+            <a:avLst/>
+          </a:prstGeom>
+          <a:noFill/>
+          <a:ln/>
+        </p:spPr>
+        <p:txBody>
+          <a:bodyPr wrap="square" lIns="0" tIns="0" rIns="0" bIns="0" rtlCol="0" anchor="ctr"/>
+          <a:lstStyle/>
+          <a:p>
+            <a:pPr algn="l" indent="0" marL="0">
+              <a:lnSpc>
+                <a:spcPct val="125000"/>
+              </a:lnSpc>
+              <a:buNone/>
+            </a:pPr>
+            <a:r>
+              <a:rPr lang="en-US" sz="1100" b="1" dirty="0">
+                <a:solidFill>
+                  <a:srgbClr val="004098"/>
+                </a:solidFill>
+                <a:latin typeface="Meiryo" pitchFamily="34" charset="0"/>
+                <a:ea typeface="Meiryo" pitchFamily="34" charset="-122"/>
+                <a:cs typeface="Meiryo" pitchFamily="34" charset="-120"/>
+              </a:rPr>
+              <a:t>基盤KR1 健全性＋開発環境</a:t>
+            </a:r>
+            <a:pPr algn="l" indent="0" marL="0">
+              <a:lnSpc>
+                <a:spcPct val="125000"/>
+              </a:lnSpc>
+              <a:buNone/>
+            </a:pPr>
+            <a:endParaRPr lang="en-US" sz="1100" dirty="0"/>
+          </a:p>
+          <a:p>
+            <a:pPr algn="l" indent="0" marL="0">
+              <a:lnSpc>
+                <a:spcPct val="125000"/>
+              </a:lnSpc>
+              <a:buNone/>
+            </a:pPr>
+            <a:r>
+              <a:rPr lang="en-US" sz="900" dirty="0">
+                <a:solidFill>
+                  <a:srgbClr val="1A1A2E"/>
+                </a:solidFill>
+                <a:latin typeface="Meiryo" pitchFamily="34" charset="0"/>
+                <a:ea typeface="Meiryo" pitchFamily="34" charset="-122"/>
+                <a:cs typeface="Meiryo" pitchFamily="34" charset="-120"/>
+              </a:rPr>
+              <a:t>─ 健全性・サブKPI・開発環境を整え、チームが走り続けられる土台を通年で担保する</a:t>
+            </a:r>
+            <a:endParaRPr lang="en-US" sz="1100" dirty="0"/>
+          </a:p>
+        </p:txBody>
+      </p:sp>
+      <p:sp>
+        <p:nvSpPr>
+          <p:cNvPr id="36" name="Shape 34"/>
+          <p:cNvSpPr/>
+          <p:nvPr/>
+        </p:nvSpPr>
+        <p:spPr>
+          <a:xfrm>
+            <a:off x="731520" y="4279392"/>
+            <a:ext cx="274320" cy="18288"/>
           </a:xfrm>
           <a:prstGeom prst="rect">
             <a:avLst/>
@@ -15535,18 +17867,143 @@
       </p:sp>
       <p:sp>
         <p:nvSpPr>
-          <p:cNvPr id="21" name="Shape 19"/>
-          <p:cNvSpPr/>
-          <p:nvPr/>
-        </p:nvSpPr>
-        <p:spPr>
-          <a:xfrm>
-            <a:off x="548640" y="2724912"/>
-            <a:ext cx="3108960" cy="621792"/>
+          <p:cNvPr id="37" name="Shape 35"/>
+          <p:cNvSpPr/>
+          <p:nvPr/>
+        </p:nvSpPr>
+        <p:spPr>
+          <a:xfrm>
+            <a:off x="1005840" y="4041648"/>
+            <a:ext cx="3749040" cy="493776"/>
           </a:xfrm>
           <a:prstGeom prst="roundRect">
             <a:avLst>
-              <a:gd name="adj" fmla="val 4412"/>
+              <a:gd name="adj" fmla="val 3704"/>
+            </a:avLst>
+          </a:prstGeom>
+          <a:solidFill>
+            <a:srgbClr val="F8FAFC"/>
+          </a:solidFill>
+          <a:ln w="9525">
+            <a:solidFill>
+              <a:srgbClr val="444466"/>
+            </a:solidFill>
+            <a:prstDash val="solid"/>
+          </a:ln>
+        </p:spPr>
+      </p:sp>
+      <p:sp>
+        <p:nvSpPr>
+          <p:cNvPr id="38" name="Text 36"/>
+          <p:cNvSpPr/>
+          <p:nvPr/>
+        </p:nvSpPr>
+        <p:spPr>
+          <a:xfrm>
+            <a:off x="1115568" y="4041648"/>
+            <a:ext cx="3529584" cy="493776"/>
+          </a:xfrm>
+          <a:prstGeom prst="rect">
+            <a:avLst/>
+          </a:prstGeom>
+          <a:noFill/>
+          <a:ln/>
+        </p:spPr>
+        <p:txBody>
+          <a:bodyPr wrap="square" lIns="0" tIns="0" rIns="0" bIns="0" rtlCol="0" anchor="ctr"/>
+          <a:lstStyle/>
+          <a:p>
+            <a:pPr algn="l" indent="0" marL="0">
+              <a:lnSpc>
+                <a:spcPct val="125000"/>
+              </a:lnSpc>
+              <a:buNone/>
+            </a:pPr>
+            <a:r>
+              <a:rPr lang="en-US" sz="900" b="1" dirty="0">
+                <a:solidFill>
+                  <a:srgbClr val="004098"/>
+                </a:solidFill>
+                <a:latin typeface="Meiryo" pitchFamily="34" charset="0"/>
+                <a:ea typeface="Meiryo" pitchFamily="34" charset="-122"/>
+                <a:cs typeface="Meiryo" pitchFamily="34" charset="-120"/>
+              </a:rPr>
+              <a:t>Q5  </a:t>
+            </a:r>
+            <a:pPr algn="l" indent="0" marL="0">
+              <a:lnSpc>
+                <a:spcPct val="125000"/>
+              </a:lnSpc>
+              <a:buNone/>
+            </a:pPr>
+            <a:r>
+              <a:rPr lang="en-US" sz="900" dirty="0">
+                <a:solidFill>
+                  <a:srgbClr val="1A1A2E"/>
+                </a:solidFill>
+                <a:latin typeface="Meiryo" pitchFamily="34" charset="0"/>
+                <a:ea typeface="Meiryo" pitchFamily="34" charset="-122"/>
+                <a:cs typeface="Meiryo" pitchFamily="34" charset="-120"/>
+              </a:rPr>
+              <a:t>デリバリー組織そのものを中長期にどう強くしていくか？</a:t>
+            </a:r>
+            <a:endParaRPr lang="en-US" sz="900" dirty="0"/>
+          </a:p>
+        </p:txBody>
+      </p:sp>
+      <p:sp>
+        <p:nvSpPr>
+          <p:cNvPr id="39" name="Text 37"/>
+          <p:cNvSpPr/>
+          <p:nvPr/>
+        </p:nvSpPr>
+        <p:spPr>
+          <a:xfrm>
+            <a:off x="4846320" y="4160520"/>
+            <a:ext cx="320040" cy="256032"/>
+          </a:xfrm>
+          <a:prstGeom prst="rect">
+            <a:avLst/>
+          </a:prstGeom>
+          <a:noFill/>
+          <a:ln/>
+        </p:spPr>
+        <p:txBody>
+          <a:bodyPr wrap="square" lIns="0" tIns="0" rIns="0" bIns="0" rtlCol="0" anchor="ctr"/>
+          <a:lstStyle/>
+          <a:p>
+            <a:pPr algn="ctr" indent="0" marL="0">
+              <a:buNone/>
+            </a:pPr>
+            <a:r>
+              <a:rPr lang="en-US" sz="1400" dirty="0">
+                <a:solidFill>
+                  <a:srgbClr val="DC2626"/>
+                </a:solidFill>
+                <a:latin typeface="Arial" pitchFamily="34" charset="0"/>
+                <a:ea typeface="Arial" pitchFamily="34" charset="-122"/>
+                <a:cs typeface="Arial" pitchFamily="34" charset="-120"/>
+              </a:rPr>
+              <a:t>▶</a:t>
+            </a:r>
+            <a:endParaRPr lang="en-US" sz="1400" dirty="0"/>
+          </a:p>
+        </p:txBody>
+      </p:sp>
+      <p:sp>
+        <p:nvSpPr>
+          <p:cNvPr id="40" name="Shape 38"/>
+          <p:cNvSpPr/>
+          <p:nvPr/>
+        </p:nvSpPr>
+        <p:spPr>
+          <a:xfrm>
+            <a:off x="5166360" y="4041648"/>
+            <a:ext cx="3611880" cy="493776"/>
+          </a:xfrm>
+          <a:prstGeom prst="roundRect">
+            <a:avLst>
+              <a:gd name="adj" fmla="val 3704"/>
             </a:avLst>
           </a:prstGeom>
           <a:solidFill>
@@ -15562,14 +18019,14 @@
       </p:sp>
       <p:sp>
         <p:nvSpPr>
-          <p:cNvPr id="22" name="Text 20"/>
-          <p:cNvSpPr/>
-          <p:nvPr/>
-        </p:nvSpPr>
-        <p:spPr>
-          <a:xfrm>
-            <a:off x="658368" y="2724912"/>
-            <a:ext cx="2889504" cy="621792"/>
+          <p:cNvPr id="41" name="Text 39"/>
+          <p:cNvSpPr/>
+          <p:nvPr/>
+        </p:nvSpPr>
+        <p:spPr>
+          <a:xfrm>
+            <a:off x="5276088" y="4041648"/>
+            <a:ext cx="3392424" cy="493776"/>
           </a:xfrm>
           <a:prstGeom prst="rect">
             <a:avLst/>
@@ -15583,12 +18040,12 @@
           <a:p>
             <a:pPr algn="l" indent="0" marL="0">
               <a:lnSpc>
-                <a:spcPct val="120000"/>
+                <a:spcPct val="125000"/>
               </a:lnSpc>
               <a:buNone/>
             </a:pPr>
             <a:r>
-              <a:rPr lang="en-US" sz="1200" b="1" dirty="0">
+              <a:rPr lang="en-US" sz="1100" b="1" dirty="0">
                 <a:solidFill>
                   <a:srgbClr val="004098"/>
                 </a:solidFill>
@@ -15596,25 +18053,25 @@
                 <a:ea typeface="Meiryo" pitchFamily="34" charset="-122"/>
                 <a:cs typeface="Meiryo" pitchFamily="34" charset="-120"/>
               </a:rPr>
-              <a:t>KR1 入口品質</a:t>
+              <a:t>基盤KR2 能力の多面的強化</a:t>
             </a:r>
             <a:pPr algn="l" indent="0" marL="0">
               <a:lnSpc>
-                <a:spcPct val="120000"/>
+                <a:spcPct val="125000"/>
               </a:lnSpc>
               <a:buNone/>
             </a:pPr>
-            <a:endParaRPr lang="en-US" sz="1200" dirty="0"/>
+            <a:endParaRPr lang="en-US" sz="1100" dirty="0"/>
           </a:p>
           <a:p>
             <a:pPr algn="l" indent="0" marL="0">
               <a:lnSpc>
-                <a:spcPct val="120000"/>
+                <a:spcPct val="125000"/>
               </a:lnSpc>
               <a:buNone/>
             </a:pPr>
             <a:r>
-              <a:rPr lang="en-US" sz="800" dirty="0">
+              <a:rPr lang="en-US" sz="900" dirty="0">
                 <a:solidFill>
                   <a:srgbClr val="1A1A2E"/>
                 </a:solidFill>
@@ -15622,51 +18079,22 @@
                 <a:ea typeface="Meiryo" pitchFamily="34" charset="-122"/>
                 <a:cs typeface="Meiryo" pitchFamily="34" charset="-120"/>
               </a:rPr>
-              <a:t>開発に入る前の前提整理・要求定義の曖昧さをなくし、仕様起因の手戻りをゼロにする</a:t>
-            </a:r>
-            <a:endParaRPr lang="en-US" sz="1200" dirty="0"/>
-          </a:p>
-          <a:p>
-            <a:pPr algn="l" indent="0" marL="0">
-              <a:lnSpc>
-                <a:spcPct val="120000"/>
-              </a:lnSpc>
-              <a:buNone/>
-            </a:pPr>
-            <a:endParaRPr lang="en-US" sz="1200" dirty="0"/>
-          </a:p>
-          <a:p>
-            <a:pPr algn="l" indent="0" marL="0">
-              <a:lnSpc>
-                <a:spcPct val="120000"/>
-              </a:lnSpc>
-              <a:buNone/>
-            </a:pPr>
-            <a:r>
-              <a:rPr lang="en-US" sz="800" i="1" dirty="0">
-                <a:solidFill>
-                  <a:srgbClr val="444466"/>
-                </a:solidFill>
-                <a:latin typeface="Meiryo" pitchFamily="34" charset="0"/>
-                <a:ea typeface="Meiryo" pitchFamily="34" charset="-122"/>
-                <a:cs typeface="Meiryo" pitchFamily="34" charset="-120"/>
-              </a:rPr>
-              <a:t>（見極める／ムダ）</a:t>
-            </a:r>
-            <a:endParaRPr lang="en-US" sz="1200" dirty="0"/>
+              <a:t>─ プロセス・人・基盤の3層を同時に強化し、中長期的にデリバリー組織そのものを強くする</a:t>
+            </a:r>
+            <a:endParaRPr lang="en-US" sz="1100" dirty="0"/>
           </a:p>
         </p:txBody>
       </p:sp>
       <p:sp>
         <p:nvSpPr>
-          <p:cNvPr id="23" name="Shape 21"/>
-          <p:cNvSpPr/>
-          <p:nvPr/>
-        </p:nvSpPr>
-        <p:spPr>
-          <a:xfrm>
-            <a:off x="2103120" y="3721608"/>
-            <a:ext cx="1554480" cy="18288"/>
+          <p:cNvPr id="42" name="Shape 40"/>
+          <p:cNvSpPr/>
+          <p:nvPr/>
+        </p:nvSpPr>
+        <p:spPr>
+          <a:xfrm>
+            <a:off x="731520" y="4791456"/>
+            <a:ext cx="274320" cy="18288"/>
           </a:xfrm>
           <a:prstGeom prst="rect">
             <a:avLst/>
@@ -15684,18 +18112,143 @@
       </p:sp>
       <p:sp>
         <p:nvSpPr>
-          <p:cNvPr id="24" name="Shape 22"/>
-          <p:cNvSpPr/>
-          <p:nvPr/>
-        </p:nvSpPr>
-        <p:spPr>
-          <a:xfrm>
-            <a:off x="548640" y="3419856"/>
-            <a:ext cx="3108960" cy="621792"/>
+          <p:cNvPr id="43" name="Shape 41"/>
+          <p:cNvSpPr/>
+          <p:nvPr/>
+        </p:nvSpPr>
+        <p:spPr>
+          <a:xfrm>
+            <a:off x="1005840" y="4553712"/>
+            <a:ext cx="3749040" cy="493776"/>
           </a:xfrm>
           <a:prstGeom prst="roundRect">
             <a:avLst>
-              <a:gd name="adj" fmla="val 4412"/>
+              <a:gd name="adj" fmla="val 3704"/>
+            </a:avLst>
+          </a:prstGeom>
+          <a:solidFill>
+            <a:srgbClr val="F8FAFC"/>
+          </a:solidFill>
+          <a:ln w="9525">
+            <a:solidFill>
+              <a:srgbClr val="444466"/>
+            </a:solidFill>
+            <a:prstDash val="solid"/>
+          </a:ln>
+        </p:spPr>
+      </p:sp>
+      <p:sp>
+        <p:nvSpPr>
+          <p:cNvPr id="44" name="Text 42"/>
+          <p:cNvSpPr/>
+          <p:nvPr/>
+        </p:nvSpPr>
+        <p:spPr>
+          <a:xfrm>
+            <a:off x="1115568" y="4553712"/>
+            <a:ext cx="3529584" cy="493776"/>
+          </a:xfrm>
+          <a:prstGeom prst="rect">
+            <a:avLst/>
+          </a:prstGeom>
+          <a:noFill/>
+          <a:ln/>
+        </p:spPr>
+        <p:txBody>
+          <a:bodyPr wrap="square" lIns="0" tIns="0" rIns="0" bIns="0" rtlCol="0" anchor="ctr"/>
+          <a:lstStyle/>
+          <a:p>
+            <a:pPr algn="l" indent="0" marL="0">
+              <a:lnSpc>
+                <a:spcPct val="125000"/>
+              </a:lnSpc>
+              <a:buNone/>
+            </a:pPr>
+            <a:r>
+              <a:rPr lang="en-US" sz="900" b="1" dirty="0">
+                <a:solidFill>
+                  <a:srgbClr val="004098"/>
+                </a:solidFill>
+                <a:latin typeface="Meiryo" pitchFamily="34" charset="0"/>
+                <a:ea typeface="Meiryo" pitchFamily="34" charset="-122"/>
+                <a:cs typeface="Meiryo" pitchFamily="34" charset="-120"/>
+              </a:rPr>
+              <a:t>Q6  </a:t>
+            </a:r>
+            <a:pPr algn="l" indent="0" marL="0">
+              <a:lnSpc>
+                <a:spcPct val="125000"/>
+              </a:lnSpc>
+              <a:buNone/>
+            </a:pPr>
+            <a:r>
+              <a:rPr lang="en-US" sz="900" dirty="0">
+                <a:solidFill>
+                  <a:srgbClr val="1A1A2E"/>
+                </a:solidFill>
+                <a:latin typeface="Meiryo" pitchFamily="34" charset="0"/>
+                <a:ea typeface="Meiryo" pitchFamily="34" charset="-122"/>
+                <a:cs typeface="Meiryo" pitchFamily="34" charset="-120"/>
+              </a:rPr>
+              <a:t>事業側から見て、このデリバリー機能は本当に価値を生んでいるか？</a:t>
+            </a:r>
+            <a:endParaRPr lang="en-US" sz="900" dirty="0"/>
+          </a:p>
+        </p:txBody>
+      </p:sp>
+      <p:sp>
+        <p:nvSpPr>
+          <p:cNvPr id="45" name="Text 43"/>
+          <p:cNvSpPr/>
+          <p:nvPr/>
+        </p:nvSpPr>
+        <p:spPr>
+          <a:xfrm>
+            <a:off x="4846320" y="4672584"/>
+            <a:ext cx="320040" cy="256032"/>
+          </a:xfrm>
+          <a:prstGeom prst="rect">
+            <a:avLst/>
+          </a:prstGeom>
+          <a:noFill/>
+          <a:ln/>
+        </p:spPr>
+        <p:txBody>
+          <a:bodyPr wrap="square" lIns="0" tIns="0" rIns="0" bIns="0" rtlCol="0" anchor="ctr"/>
+          <a:lstStyle/>
+          <a:p>
+            <a:pPr algn="ctr" indent="0" marL="0">
+              <a:buNone/>
+            </a:pPr>
+            <a:r>
+              <a:rPr lang="en-US" sz="1400" dirty="0">
+                <a:solidFill>
+                  <a:srgbClr val="DC2626"/>
+                </a:solidFill>
+                <a:latin typeface="Arial" pitchFamily="34" charset="0"/>
+                <a:ea typeface="Arial" pitchFamily="34" charset="-122"/>
+                <a:cs typeface="Arial" pitchFamily="34" charset="-120"/>
+              </a:rPr>
+              <a:t>▶</a:t>
+            </a:r>
+            <a:endParaRPr lang="en-US" sz="1400" dirty="0"/>
+          </a:p>
+        </p:txBody>
+      </p:sp>
+      <p:sp>
+        <p:nvSpPr>
+          <p:cNvPr id="46" name="Shape 44"/>
+          <p:cNvSpPr/>
+          <p:nvPr/>
+        </p:nvSpPr>
+        <p:spPr>
+          <a:xfrm>
+            <a:off x="5166360" y="4553712"/>
+            <a:ext cx="3611880" cy="493776"/>
+          </a:xfrm>
+          <a:prstGeom prst="roundRect">
+            <a:avLst>
+              <a:gd name="adj" fmla="val 3704"/>
             </a:avLst>
           </a:prstGeom>
           <a:solidFill>
@@ -15711,14 +18264,14 @@
       </p:sp>
       <p:sp>
         <p:nvSpPr>
-          <p:cNvPr id="25" name="Text 23"/>
-          <p:cNvSpPr/>
-          <p:nvPr/>
-        </p:nvSpPr>
-        <p:spPr>
-          <a:xfrm>
-            <a:off x="658368" y="3419856"/>
-            <a:ext cx="2889504" cy="621792"/>
+          <p:cNvPr id="47" name="Text 45"/>
+          <p:cNvSpPr/>
+          <p:nvPr/>
+        </p:nvSpPr>
+        <p:spPr>
+          <a:xfrm>
+            <a:off x="5276088" y="4553712"/>
+            <a:ext cx="3392424" cy="493776"/>
           </a:xfrm>
           <a:prstGeom prst="rect">
             <a:avLst/>
@@ -15732,12 +18285,12 @@
           <a:p>
             <a:pPr algn="l" indent="0" marL="0">
               <a:lnSpc>
-                <a:spcPct val="120000"/>
+                <a:spcPct val="125000"/>
               </a:lnSpc>
               <a:buNone/>
             </a:pPr>
             <a:r>
-              <a:rPr lang="en-US" sz="1200" b="1" dirty="0">
+              <a:rPr lang="en-US" sz="1100" b="1" dirty="0">
                 <a:solidFill>
                   <a:srgbClr val="004098"/>
                 </a:solidFill>
@@ -15745,25 +18298,25 @@
                 <a:ea typeface="Meiryo" pitchFamily="34" charset="-122"/>
                 <a:cs typeface="Meiryo" pitchFamily="34" charset="-120"/>
               </a:rPr>
-              <a:t>KR2 フロー効率</a:t>
+              <a:t>基盤KR3 事業貢献PDCA</a:t>
             </a:r>
             <a:pPr algn="l" indent="0" marL="0">
               <a:lnSpc>
-                <a:spcPct val="120000"/>
+                <a:spcPct val="125000"/>
               </a:lnSpc>
               <a:buNone/>
             </a:pPr>
-            <a:endParaRPr lang="en-US" sz="1200" dirty="0"/>
+            <a:endParaRPr lang="en-US" sz="1100" dirty="0"/>
           </a:p>
           <a:p>
             <a:pPr algn="l" indent="0" marL="0">
               <a:lnSpc>
-                <a:spcPct val="120000"/>
+                <a:spcPct val="125000"/>
               </a:lnSpc>
               <a:buNone/>
             </a:pPr>
             <a:r>
-              <a:rPr lang="en-US" sz="800" dirty="0">
+              <a:rPr lang="en-US" sz="900" dirty="0">
                 <a:solidFill>
                   <a:srgbClr val="1A1A2E"/>
                 </a:solidFill>
@@ -15771,659 +18324,9 @@
                 <a:ea typeface="Meiryo" pitchFamily="34" charset="-122"/>
                 <a:cs typeface="Meiryo" pitchFamily="34" charset="-120"/>
               </a:rPr>
-              <a:t>開発工程のムリ・ムダ・ムラをなくし、案件を停滞させずスムーズに顧客へ届ける</a:t>
-            </a:r>
-            <a:endParaRPr lang="en-US" sz="1200" dirty="0"/>
-          </a:p>
-          <a:p>
-            <a:pPr algn="l" indent="0" marL="0">
-              <a:lnSpc>
-                <a:spcPct val="120000"/>
-              </a:lnSpc>
-              <a:buNone/>
-            </a:pPr>
-            <a:endParaRPr lang="en-US" sz="1200" dirty="0"/>
-          </a:p>
-          <a:p>
-            <a:pPr algn="l" indent="0" marL="0">
-              <a:lnSpc>
-                <a:spcPct val="120000"/>
-              </a:lnSpc>
-              <a:buNone/>
-            </a:pPr>
-            <a:r>
-              <a:rPr lang="en-US" sz="800" i="1" dirty="0">
-                <a:solidFill>
-                  <a:srgbClr val="444466"/>
-                </a:solidFill>
-                <a:latin typeface="Meiryo" pitchFamily="34" charset="0"/>
-                <a:ea typeface="Meiryo" pitchFamily="34" charset="-122"/>
-                <a:cs typeface="Meiryo" pitchFamily="34" charset="-120"/>
-              </a:rPr>
-              <a:t>（速くする／ムダ）</a:t>
-            </a:r>
-            <a:endParaRPr lang="en-US" sz="1200" dirty="0"/>
-          </a:p>
-        </p:txBody>
-      </p:sp>
-      <p:sp>
-        <p:nvSpPr>
-          <p:cNvPr id="26" name="Shape 24"/>
-          <p:cNvSpPr/>
-          <p:nvPr/>
-        </p:nvSpPr>
-        <p:spPr>
-          <a:xfrm>
-            <a:off x="2103120" y="4416552"/>
-            <a:ext cx="1554480" cy="18288"/>
-          </a:xfrm>
-          <a:prstGeom prst="rect">
-            <a:avLst/>
-          </a:prstGeom>
-          <a:solidFill>
-            <a:srgbClr val="004098"/>
-          </a:solidFill>
-          <a:ln w="12700">
-            <a:solidFill>
-              <a:srgbClr val="004098"/>
-            </a:solidFill>
-            <a:prstDash val="solid"/>
-          </a:ln>
-        </p:spPr>
-      </p:sp>
-      <p:sp>
-        <p:nvSpPr>
-          <p:cNvPr id="27" name="Shape 25"/>
-          <p:cNvSpPr/>
-          <p:nvPr/>
-        </p:nvSpPr>
-        <p:spPr>
-          <a:xfrm>
-            <a:off x="548640" y="4114800"/>
-            <a:ext cx="3108960" cy="621792"/>
-          </a:xfrm>
-          <a:prstGeom prst="roundRect">
-            <a:avLst>
-              <a:gd name="adj" fmla="val 4412"/>
-            </a:avLst>
-          </a:prstGeom>
-          <a:solidFill>
-            <a:srgbClr val="EEF3FA"/>
-          </a:solidFill>
-          <a:ln w="12700">
-            <a:solidFill>
-              <a:srgbClr val="004098"/>
-            </a:solidFill>
-            <a:prstDash val="solid"/>
-          </a:ln>
-        </p:spPr>
-      </p:sp>
-      <p:sp>
-        <p:nvSpPr>
-          <p:cNvPr id="28" name="Text 26"/>
-          <p:cNvSpPr/>
-          <p:nvPr/>
-        </p:nvSpPr>
-        <p:spPr>
-          <a:xfrm>
-            <a:off x="658368" y="4114800"/>
-            <a:ext cx="2889504" cy="621792"/>
-          </a:xfrm>
-          <a:prstGeom prst="rect">
-            <a:avLst/>
-          </a:prstGeom>
-          <a:noFill/>
-          <a:ln/>
-        </p:spPr>
-        <p:txBody>
-          <a:bodyPr wrap="square" lIns="0" tIns="0" rIns="0" bIns="0" rtlCol="0" anchor="ctr"/>
-          <a:lstStyle/>
-          <a:p>
-            <a:pPr algn="l" indent="0" marL="0">
-              <a:lnSpc>
-                <a:spcPct val="120000"/>
-              </a:lnSpc>
-              <a:buNone/>
-            </a:pPr>
-            <a:r>
-              <a:rPr lang="en-US" sz="1200" b="1" dirty="0">
-                <a:solidFill>
-                  <a:srgbClr val="004098"/>
-                </a:solidFill>
-                <a:latin typeface="Meiryo" pitchFamily="34" charset="0"/>
-                <a:ea typeface="Meiryo" pitchFamily="34" charset="-122"/>
-                <a:cs typeface="Meiryo" pitchFamily="34" charset="-120"/>
-              </a:rPr>
-              <a:t>KR3 学習ループ</a:t>
-            </a:r>
-            <a:pPr algn="l" indent="0" marL="0">
-              <a:lnSpc>
-                <a:spcPct val="120000"/>
-              </a:lnSpc>
-              <a:buNone/>
-            </a:pPr>
-            <a:endParaRPr lang="en-US" sz="1200" dirty="0"/>
-          </a:p>
-          <a:p>
-            <a:pPr algn="l" indent="0" marL="0">
-              <a:lnSpc>
-                <a:spcPct val="120000"/>
-              </a:lnSpc>
-              <a:buNone/>
-            </a:pPr>
-            <a:r>
-              <a:rPr lang="en-US" sz="800" dirty="0">
-                <a:solidFill>
-                  <a:srgbClr val="1A1A2E"/>
-                </a:solidFill>
-                <a:latin typeface="Meiryo" pitchFamily="34" charset="0"/>
-                <a:ea typeface="Meiryo" pitchFamily="34" charset="-122"/>
-                <a:cs typeface="Meiryo" pitchFamily="34" charset="-120"/>
-              </a:rPr>
-              <a:t>リリースして終わりにせず、お客様の反応を見て「次にやること／やめること」を決める</a:t>
-            </a:r>
-            <a:endParaRPr lang="en-US" sz="1200" dirty="0"/>
-          </a:p>
-          <a:p>
-            <a:pPr algn="l" indent="0" marL="0">
-              <a:lnSpc>
-                <a:spcPct val="120000"/>
-              </a:lnSpc>
-              <a:buNone/>
-            </a:pPr>
-            <a:endParaRPr lang="en-US" sz="1200" dirty="0"/>
-          </a:p>
-          <a:p>
-            <a:pPr algn="l" indent="0" marL="0">
-              <a:lnSpc>
-                <a:spcPct val="120000"/>
-              </a:lnSpc>
-              <a:buNone/>
-            </a:pPr>
-            <a:r>
-              <a:rPr lang="en-US" sz="800" i="1" dirty="0">
-                <a:solidFill>
-                  <a:srgbClr val="444466"/>
-                </a:solidFill>
-                <a:latin typeface="Meiryo" pitchFamily="34" charset="0"/>
-                <a:ea typeface="Meiryo" pitchFamily="34" charset="-122"/>
-                <a:cs typeface="Meiryo" pitchFamily="34" charset="-120"/>
-              </a:rPr>
-              <a:t>（見極める／ムダ）</a:t>
-            </a:r>
-            <a:endParaRPr lang="en-US" sz="1200" dirty="0"/>
-          </a:p>
-        </p:txBody>
-      </p:sp>
-      <p:sp>
-        <p:nvSpPr>
-          <p:cNvPr id="29" name="Shape 27"/>
-          <p:cNvSpPr/>
-          <p:nvPr/>
-        </p:nvSpPr>
-        <p:spPr>
-          <a:xfrm>
-            <a:off x="7031736" y="2542032"/>
-            <a:ext cx="18288" cy="1883664"/>
-          </a:xfrm>
-          <a:prstGeom prst="rect">
-            <a:avLst/>
-          </a:prstGeom>
-          <a:solidFill>
-            <a:srgbClr val="444466"/>
-          </a:solidFill>
-          <a:ln w="12700">
-            <a:solidFill>
-              <a:srgbClr val="444466"/>
-            </a:solidFill>
-            <a:prstDash val="solid"/>
-          </a:ln>
-        </p:spPr>
-      </p:sp>
-      <p:sp>
-        <p:nvSpPr>
-          <p:cNvPr id="30" name="Shape 28"/>
-          <p:cNvSpPr/>
-          <p:nvPr/>
-        </p:nvSpPr>
-        <p:spPr>
-          <a:xfrm>
-            <a:off x="5486400" y="3026664"/>
-            <a:ext cx="1554480" cy="18288"/>
-          </a:xfrm>
-          <a:prstGeom prst="rect">
-            <a:avLst/>
-          </a:prstGeom>
-          <a:solidFill>
-            <a:srgbClr val="444466"/>
-          </a:solidFill>
-          <a:ln w="12700">
-            <a:solidFill>
-              <a:srgbClr val="444466"/>
-            </a:solidFill>
-            <a:prstDash val="solid"/>
-          </a:ln>
-        </p:spPr>
-      </p:sp>
-      <p:sp>
-        <p:nvSpPr>
-          <p:cNvPr id="31" name="Shape 29"/>
-          <p:cNvSpPr/>
-          <p:nvPr/>
-        </p:nvSpPr>
-        <p:spPr>
-          <a:xfrm>
-            <a:off x="5486400" y="2724912"/>
-            <a:ext cx="3108960" cy="621792"/>
-          </a:xfrm>
-          <a:prstGeom prst="roundRect">
-            <a:avLst>
-              <a:gd name="adj" fmla="val 4412"/>
-            </a:avLst>
-          </a:prstGeom>
-          <a:solidFill>
-            <a:srgbClr val="EEF3FA"/>
-          </a:solidFill>
-          <a:ln w="12700">
-            <a:solidFill>
-              <a:srgbClr val="444466"/>
-            </a:solidFill>
-            <a:prstDash val="solid"/>
-          </a:ln>
-        </p:spPr>
-      </p:sp>
-      <p:sp>
-        <p:nvSpPr>
-          <p:cNvPr id="32" name="Text 30"/>
-          <p:cNvSpPr/>
-          <p:nvPr/>
-        </p:nvSpPr>
-        <p:spPr>
-          <a:xfrm>
-            <a:off x="5596128" y="2724912"/>
-            <a:ext cx="2889504" cy="621792"/>
-          </a:xfrm>
-          <a:prstGeom prst="rect">
-            <a:avLst/>
-          </a:prstGeom>
-          <a:noFill/>
-          <a:ln/>
-        </p:spPr>
-        <p:txBody>
-          <a:bodyPr wrap="square" lIns="0" tIns="0" rIns="0" bIns="0" rtlCol="0" anchor="ctr"/>
-          <a:lstStyle/>
-          <a:p>
-            <a:pPr algn="l" indent="0" marL="0">
-              <a:lnSpc>
-                <a:spcPct val="120000"/>
-              </a:lnSpc>
-              <a:buNone/>
-            </a:pPr>
-            <a:r>
-              <a:rPr lang="en-US" sz="1200" b="1" dirty="0">
-                <a:solidFill>
-                  <a:srgbClr val="004098"/>
-                </a:solidFill>
-                <a:latin typeface="Meiryo" pitchFamily="34" charset="0"/>
-                <a:ea typeface="Meiryo" pitchFamily="34" charset="-122"/>
-                <a:cs typeface="Meiryo" pitchFamily="34" charset="-120"/>
-              </a:rPr>
-              <a:t>KR1 健全性＋開発環境</a:t>
-            </a:r>
-            <a:pPr algn="l" indent="0" marL="0">
-              <a:lnSpc>
-                <a:spcPct val="120000"/>
-              </a:lnSpc>
-              <a:buNone/>
-            </a:pPr>
-            <a:endParaRPr lang="en-US" sz="1200" dirty="0"/>
-          </a:p>
-          <a:p>
-            <a:pPr algn="l" indent="0" marL="0">
-              <a:lnSpc>
-                <a:spcPct val="120000"/>
-              </a:lnSpc>
-              <a:buNone/>
-            </a:pPr>
-            <a:r>
-              <a:rPr lang="en-US" sz="800" dirty="0">
-                <a:solidFill>
-                  <a:srgbClr val="1A1A2E"/>
-                </a:solidFill>
-                <a:latin typeface="Meiryo" pitchFamily="34" charset="0"/>
-                <a:ea typeface="Meiryo" pitchFamily="34" charset="-122"/>
-                <a:cs typeface="Meiryo" pitchFamily="34" charset="-120"/>
-              </a:rPr>
-              <a:t>健全性・サブKPI・開発環境を整え、チームが走り続けられる土台を通年で担保する</a:t>
-            </a:r>
-            <a:endParaRPr lang="en-US" sz="1200" dirty="0"/>
-          </a:p>
-          <a:p>
-            <a:pPr algn="l" indent="0" marL="0">
-              <a:lnSpc>
-                <a:spcPct val="120000"/>
-              </a:lnSpc>
-              <a:buNone/>
-            </a:pPr>
-            <a:endParaRPr lang="en-US" sz="1200" dirty="0"/>
-          </a:p>
-          <a:p>
-            <a:pPr algn="l" indent="0" marL="0">
-              <a:lnSpc>
-                <a:spcPct val="120000"/>
-              </a:lnSpc>
-              <a:buNone/>
-            </a:pPr>
-            <a:r>
-              <a:rPr lang="en-US" sz="800" i="1" dirty="0">
-                <a:solidFill>
-                  <a:srgbClr val="444466"/>
-                </a:solidFill>
-                <a:latin typeface="Meiryo" pitchFamily="34" charset="0"/>
-                <a:ea typeface="Meiryo" pitchFamily="34" charset="-122"/>
-                <a:cs typeface="Meiryo" pitchFamily="34" charset="-120"/>
-              </a:rPr>
-              <a:t>（守る／ムリ）</a:t>
-            </a:r>
-            <a:endParaRPr lang="en-US" sz="1200" dirty="0"/>
-          </a:p>
-        </p:txBody>
-      </p:sp>
-      <p:sp>
-        <p:nvSpPr>
-          <p:cNvPr id="33" name="Shape 31"/>
-          <p:cNvSpPr/>
-          <p:nvPr/>
-        </p:nvSpPr>
-        <p:spPr>
-          <a:xfrm>
-            <a:off x="5486400" y="3721608"/>
-            <a:ext cx="1554480" cy="18288"/>
-          </a:xfrm>
-          <a:prstGeom prst="rect">
-            <a:avLst/>
-          </a:prstGeom>
-          <a:solidFill>
-            <a:srgbClr val="444466"/>
-          </a:solidFill>
-          <a:ln w="12700">
-            <a:solidFill>
-              <a:srgbClr val="444466"/>
-            </a:solidFill>
-            <a:prstDash val="solid"/>
-          </a:ln>
-        </p:spPr>
-      </p:sp>
-      <p:sp>
-        <p:nvSpPr>
-          <p:cNvPr id="34" name="Shape 32"/>
-          <p:cNvSpPr/>
-          <p:nvPr/>
-        </p:nvSpPr>
-        <p:spPr>
-          <a:xfrm>
-            <a:off x="5486400" y="3419856"/>
-            <a:ext cx="3108960" cy="621792"/>
-          </a:xfrm>
-          <a:prstGeom prst="roundRect">
-            <a:avLst>
-              <a:gd name="adj" fmla="val 4412"/>
-            </a:avLst>
-          </a:prstGeom>
-          <a:solidFill>
-            <a:srgbClr val="EEF3FA"/>
-          </a:solidFill>
-          <a:ln w="12700">
-            <a:solidFill>
-              <a:srgbClr val="444466"/>
-            </a:solidFill>
-            <a:prstDash val="solid"/>
-          </a:ln>
-        </p:spPr>
-      </p:sp>
-      <p:sp>
-        <p:nvSpPr>
-          <p:cNvPr id="35" name="Text 33"/>
-          <p:cNvSpPr/>
-          <p:nvPr/>
-        </p:nvSpPr>
-        <p:spPr>
-          <a:xfrm>
-            <a:off x="5596128" y="3419856"/>
-            <a:ext cx="2889504" cy="621792"/>
-          </a:xfrm>
-          <a:prstGeom prst="rect">
-            <a:avLst/>
-          </a:prstGeom>
-          <a:noFill/>
-          <a:ln/>
-        </p:spPr>
-        <p:txBody>
-          <a:bodyPr wrap="square" lIns="0" tIns="0" rIns="0" bIns="0" rtlCol="0" anchor="ctr"/>
-          <a:lstStyle/>
-          <a:p>
-            <a:pPr algn="l" indent="0" marL="0">
-              <a:lnSpc>
-                <a:spcPct val="120000"/>
-              </a:lnSpc>
-              <a:buNone/>
-            </a:pPr>
-            <a:r>
-              <a:rPr lang="en-US" sz="1200" b="1" dirty="0">
-                <a:solidFill>
-                  <a:srgbClr val="004098"/>
-                </a:solidFill>
-                <a:latin typeface="Meiryo" pitchFamily="34" charset="0"/>
-                <a:ea typeface="Meiryo" pitchFamily="34" charset="-122"/>
-                <a:cs typeface="Meiryo" pitchFamily="34" charset="-120"/>
-              </a:rPr>
-              <a:t>KR2 能力の多面的強化</a:t>
-            </a:r>
-            <a:pPr algn="l" indent="0" marL="0">
-              <a:lnSpc>
-                <a:spcPct val="120000"/>
-              </a:lnSpc>
-              <a:buNone/>
-            </a:pPr>
-            <a:endParaRPr lang="en-US" sz="1200" dirty="0"/>
-          </a:p>
-          <a:p>
-            <a:pPr algn="l" indent="0" marL="0">
-              <a:lnSpc>
-                <a:spcPct val="120000"/>
-              </a:lnSpc>
-              <a:buNone/>
-            </a:pPr>
-            <a:r>
-              <a:rPr lang="en-US" sz="800" dirty="0">
-                <a:solidFill>
-                  <a:srgbClr val="1A1A2E"/>
-                </a:solidFill>
-                <a:latin typeface="Meiryo" pitchFamily="34" charset="0"/>
-                <a:ea typeface="Meiryo" pitchFamily="34" charset="-122"/>
-                <a:cs typeface="Meiryo" pitchFamily="34" charset="-120"/>
-              </a:rPr>
-              <a:t>プロセス・人・基盤の3層を同時に強化し、中長期的にデリバリー組織そのものを強くする</a:t>
-            </a:r>
-            <a:endParaRPr lang="en-US" sz="1200" dirty="0"/>
-          </a:p>
-          <a:p>
-            <a:pPr algn="l" indent="0" marL="0">
-              <a:lnSpc>
-                <a:spcPct val="120000"/>
-              </a:lnSpc>
-              <a:buNone/>
-            </a:pPr>
-            <a:endParaRPr lang="en-US" sz="1200" dirty="0"/>
-          </a:p>
-          <a:p>
-            <a:pPr algn="l" indent="0" marL="0">
-              <a:lnSpc>
-                <a:spcPct val="120000"/>
-              </a:lnSpc>
-              <a:buNone/>
-            </a:pPr>
-            <a:r>
-              <a:rPr lang="en-US" sz="800" i="1" dirty="0">
-                <a:solidFill>
-                  <a:srgbClr val="444466"/>
-                </a:solidFill>
-                <a:latin typeface="Meiryo" pitchFamily="34" charset="0"/>
-                <a:ea typeface="Meiryo" pitchFamily="34" charset="-122"/>
-                <a:cs typeface="Meiryo" pitchFamily="34" charset="-120"/>
-              </a:rPr>
-              <a:t>（強くする／ムラ）</a:t>
-            </a:r>
-            <a:endParaRPr lang="en-US" sz="1200" dirty="0"/>
-          </a:p>
-        </p:txBody>
-      </p:sp>
-      <p:sp>
-        <p:nvSpPr>
-          <p:cNvPr id="36" name="Shape 34"/>
-          <p:cNvSpPr/>
-          <p:nvPr/>
-        </p:nvSpPr>
-        <p:spPr>
-          <a:xfrm>
-            <a:off x="5486400" y="4416552"/>
-            <a:ext cx="1554480" cy="18288"/>
-          </a:xfrm>
-          <a:prstGeom prst="rect">
-            <a:avLst/>
-          </a:prstGeom>
-          <a:solidFill>
-            <a:srgbClr val="444466"/>
-          </a:solidFill>
-          <a:ln w="12700">
-            <a:solidFill>
-              <a:srgbClr val="444466"/>
-            </a:solidFill>
-            <a:prstDash val="solid"/>
-          </a:ln>
-        </p:spPr>
-      </p:sp>
-      <p:sp>
-        <p:nvSpPr>
-          <p:cNvPr id="37" name="Shape 35"/>
-          <p:cNvSpPr/>
-          <p:nvPr/>
-        </p:nvSpPr>
-        <p:spPr>
-          <a:xfrm>
-            <a:off x="5486400" y="4114800"/>
-            <a:ext cx="3108960" cy="621792"/>
-          </a:xfrm>
-          <a:prstGeom prst="roundRect">
-            <a:avLst>
-              <a:gd name="adj" fmla="val 4412"/>
-            </a:avLst>
-          </a:prstGeom>
-          <a:solidFill>
-            <a:srgbClr val="EEF3FA"/>
-          </a:solidFill>
-          <a:ln w="12700">
-            <a:solidFill>
-              <a:srgbClr val="444466"/>
-            </a:solidFill>
-            <a:prstDash val="solid"/>
-          </a:ln>
-        </p:spPr>
-      </p:sp>
-      <p:sp>
-        <p:nvSpPr>
-          <p:cNvPr id="38" name="Text 36"/>
-          <p:cNvSpPr/>
-          <p:nvPr/>
-        </p:nvSpPr>
-        <p:spPr>
-          <a:xfrm>
-            <a:off x="5596128" y="4114800"/>
-            <a:ext cx="2889504" cy="621792"/>
-          </a:xfrm>
-          <a:prstGeom prst="rect">
-            <a:avLst/>
-          </a:prstGeom>
-          <a:noFill/>
-          <a:ln/>
-        </p:spPr>
-        <p:txBody>
-          <a:bodyPr wrap="square" lIns="0" tIns="0" rIns="0" bIns="0" rtlCol="0" anchor="ctr"/>
-          <a:lstStyle/>
-          <a:p>
-            <a:pPr algn="l" indent="0" marL="0">
-              <a:lnSpc>
-                <a:spcPct val="120000"/>
-              </a:lnSpc>
-              <a:buNone/>
-            </a:pPr>
-            <a:r>
-              <a:rPr lang="en-US" sz="1200" b="1" dirty="0">
-                <a:solidFill>
-                  <a:srgbClr val="004098"/>
-                </a:solidFill>
-                <a:latin typeface="Meiryo" pitchFamily="34" charset="0"/>
-                <a:ea typeface="Meiryo" pitchFamily="34" charset="-122"/>
-                <a:cs typeface="Meiryo" pitchFamily="34" charset="-120"/>
-              </a:rPr>
-              <a:t>KR3 事業貢献PDCA</a:t>
-            </a:r>
-            <a:pPr algn="l" indent="0" marL="0">
-              <a:lnSpc>
-                <a:spcPct val="120000"/>
-              </a:lnSpc>
-              <a:buNone/>
-            </a:pPr>
-            <a:endParaRPr lang="en-US" sz="1200" dirty="0"/>
-          </a:p>
-          <a:p>
-            <a:pPr algn="l" indent="0" marL="0">
-              <a:lnSpc>
-                <a:spcPct val="120000"/>
-              </a:lnSpc>
-              <a:buNone/>
-            </a:pPr>
-            <a:r>
-              <a:rPr lang="en-US" sz="800" dirty="0">
-                <a:solidFill>
-                  <a:srgbClr val="1A1A2E"/>
-                </a:solidFill>
-                <a:latin typeface="Meiryo" pitchFamily="34" charset="0"/>
-                <a:ea typeface="Meiryo" pitchFamily="34" charset="-122"/>
-                <a:cs typeface="Meiryo" pitchFamily="34" charset="-120"/>
-              </a:rPr>
-              <a:t>事業側との四半期相互検証で、配置メンバーの事業貢献に相互納得を形成し外部妥当性を担保する</a:t>
-            </a:r>
-            <a:endParaRPr lang="en-US" sz="1200" dirty="0"/>
-          </a:p>
-          <a:p>
-            <a:pPr algn="l" indent="0" marL="0">
-              <a:lnSpc>
-                <a:spcPct val="120000"/>
-              </a:lnSpc>
-              <a:buNone/>
-            </a:pPr>
-            <a:endParaRPr lang="en-US" sz="1200" dirty="0"/>
-          </a:p>
-          <a:p>
-            <a:pPr algn="l" indent="0" marL="0">
-              <a:lnSpc>
-                <a:spcPct val="120000"/>
-              </a:lnSpc>
-              <a:buNone/>
-            </a:pPr>
-            <a:r>
-              <a:rPr lang="en-US" sz="800" i="1" dirty="0">
-                <a:solidFill>
-                  <a:srgbClr val="444466"/>
-                </a:solidFill>
-                <a:latin typeface="Meiryo" pitchFamily="34" charset="0"/>
-                <a:ea typeface="Meiryo" pitchFamily="34" charset="-122"/>
-                <a:cs typeface="Meiryo" pitchFamily="34" charset="-120"/>
-              </a:rPr>
-              <a:t>（見極め×強く／外部妥当性）</a:t>
-            </a:r>
-            <a:endParaRPr lang="en-US" sz="1200" dirty="0"/>
+              <a:t>─ 事業側との四半期相互検証で、配置メンバーの事業貢献に相互納得を形成し外部妥当性を担保する</a:t>
+            </a:r>
+            <a:endParaRPr lang="en-US" sz="1100" dirty="0"/>
           </a:p>
         </p:txBody>
       </p:sp>
